--- a/Programacion II/Clases/Clase 1 - Introduccion a POO/Presentacion.pptx
+++ b/Programacion II/Clases/Clase 1 - Introduccion a POO/Presentacion.pptx
@@ -16,6 +16,8 @@
     <p:sldId id="264" r:id="rId15"/>
     <p:sldId id="265" r:id="rId16"/>
     <p:sldId id="266" r:id="rId17"/>
+    <p:sldId id="267" r:id="rId18"/>
+    <p:sldId id="268" r:id="rId19"/>
   </p:sldIdLst>
   <p:sldSz cx="12191695" cy="6858000" type="screen4x3"/>
   <p:notesSz cx="6858000" cy="9144000"/>
@@ -3118,7 +3120,6 @@
           <a:ln>
             <a:noFill/>
           </a:ln>
-          <a:effectLst/>
         </p:spPr>
         <p:style>
           <a:lnRef idx="1">
@@ -3162,7 +3163,6 @@
           <a:ln>
             <a:noFill/>
           </a:ln>
-          <a:effectLst/>
         </p:spPr>
         <p:style>
           <a:lnRef idx="1">
@@ -3206,7 +3206,6 @@
           <a:ln>
             <a:noFill/>
           </a:ln>
-          <a:effectLst/>
         </p:spPr>
         <p:style>
           <a:lnRef idx="1">
@@ -3232,7 +3231,7 @@
       </p:sp>
       <p:pic>
         <p:nvPicPr>
-          <p:cNvPr id="5" name="Picture 4" descr="logo_uniajc.png"/>
+          <p:cNvPr id="5" name="Picture 4" descr="logo_uniajc_blanco.png"/>
           <p:cNvPicPr>
             <a:picLocks noChangeAspect="1"/>
           </p:cNvPicPr>
@@ -3262,11 +3261,13 @@
         </p:nvSpPr>
         <p:spPr>
           <a:xfrm>
-            <a:off x="9859975" y="384048"/>
+            <a:off x="10042855" y="384048"/>
             <a:ext cx="1691640" cy="384048"/>
           </a:xfrm>
           <a:prstGeom prst="roundRect">
-            <a:avLst/>
+            <a:avLst>
+              <a:gd name="adj" fmla="val 12000"/>
+            </a:avLst>
           </a:prstGeom>
           <a:solidFill>
             <a:srgbClr val="269CCB"/>
@@ -3274,7 +3275,6 @@
           <a:ln>
             <a:noFill/>
           </a:ln>
-          <a:effectLst/>
         </p:spPr>
         <p:style>
           <a:lnRef idx="1">
@@ -3306,7 +3306,7 @@
         </p:nvSpPr>
         <p:spPr>
           <a:xfrm>
-            <a:off x="9859975" y="384048"/>
+            <a:off x="10042855" y="384048"/>
             <a:ext cx="1691640" cy="384048"/>
           </a:xfrm>
           <a:prstGeom prst="rect">
@@ -3315,9 +3315,7 @@
           <a:noFill/>
         </p:spPr>
         <p:txBody>
-          <a:bodyPr wrap="square" anchor="ctr" lIns="0" rIns="0" tIns="0" bIns="0">
-            <a:spAutoFit/>
-          </a:bodyPr>
+          <a:bodyPr wrap="square" anchor="ctr"/>
           <a:lstStyle/>
           <a:p>
             <a:pPr algn="ctr"/>
@@ -3341,8 +3339,8 @@
         </p:nvSpPr>
         <p:spPr>
           <a:xfrm>
-            <a:off x="914400" y="2331720"/>
-            <a:ext cx="10362895" cy="1828800"/>
+            <a:off x="731520" y="2331720"/>
+            <a:ext cx="10728655" cy="1828800"/>
           </a:xfrm>
           <a:prstGeom prst="rect">
             <a:avLst/>
@@ -3350,20 +3348,18 @@
           <a:noFill/>
         </p:spPr>
         <p:txBody>
-          <a:bodyPr wrap="square" anchor="ctr" lIns="0" rIns="0" tIns="0" bIns="0">
-            <a:spAutoFit/>
-          </a:bodyPr>
+          <a:bodyPr wrap="square" anchor="ctr"/>
           <a:lstStyle/>
           <a:p>
             <a:pPr algn="ctr"/>
             <a:r>
-              <a:rPr sz="4000" b="1" i="0">
+              <a:rPr sz="3400" b="1" i="0">
                 <a:solidFill>
                   <a:srgbClr val="FFFFFF"/>
                 </a:solidFill>
                 <a:latin typeface="Calibri"/>
               </a:rPr>
-              <a:t>Introducción a POO</a:t>
+              <a:t>Introduccion a la Programacion Orientada a Objetos</a:t>
             </a:r>
           </a:p>
         </p:txBody>
@@ -3388,7 +3384,6 @@
           <a:ln>
             <a:noFill/>
           </a:ln>
-          <a:effectLst/>
         </p:spPr>
         <p:style>
           <a:lnRef idx="1">
@@ -3420,8 +3415,8 @@
         </p:nvSpPr>
         <p:spPr>
           <a:xfrm>
-            <a:off x="914400" y="4361688"/>
-            <a:ext cx="10362895" cy="640080"/>
+            <a:off x="731520" y="4361688"/>
+            <a:ext cx="10728655" cy="640080"/>
           </a:xfrm>
           <a:prstGeom prst="rect">
             <a:avLst/>
@@ -3429,7 +3424,7 @@
           <a:noFill/>
         </p:spPr>
         <p:txBody>
-          <a:bodyPr wrap="square" anchor="t" lIns="0" rIns="0" tIns="0" bIns="0">
+          <a:bodyPr wrap="square">
             <a:spAutoFit/>
           </a:bodyPr>
           <a:lstStyle/>
@@ -3442,7 +3437,7 @@
                 </a:solidFill>
                 <a:latin typeface="Calibri"/>
               </a:rPr>
-              <a:t>Clase vs objeto · encapsulamiento · entorno listo</a:t>
+              <a:t>Clase vs objeto y los cuatro pilares</a:t>
             </a:r>
           </a:p>
         </p:txBody>
@@ -3464,7 +3459,7 @@
           <a:noFill/>
         </p:spPr>
         <p:txBody>
-          <a:bodyPr wrap="square" anchor="t" lIns="0" rIns="0" tIns="0" bIns="0">
+          <a:bodyPr wrap="square">
             <a:spAutoFit/>
           </a:bodyPr>
           <a:lstStyle/>
@@ -3517,7 +3512,7 @@
         <p:spPr>
           <a:xfrm>
             <a:off x="0" y="0"/>
-            <a:ext cx="12191695" cy="1188720"/>
+            <a:ext cx="12191695" cy="960120"/>
           </a:xfrm>
           <a:prstGeom prst="rect">
             <a:avLst/>
@@ -3528,7 +3523,6 @@
           <a:ln>
             <a:noFill/>
           </a:ln>
-          <a:effectLst/>
         </p:spPr>
         <p:style>
           <a:lnRef idx="1">
@@ -3560,8 +3554,175 @@
         </p:nvSpPr>
         <p:spPr>
           <a:xfrm>
-            <a:off x="0" y="1188720"/>
-            <a:ext cx="12191695" cy="54864"/>
+            <a:off x="0" y="960120"/>
+            <a:ext cx="12191695" cy="41148"/>
+          </a:xfrm>
+          <a:prstGeom prst="rect">
+            <a:avLst/>
+          </a:prstGeom>
+          <a:solidFill>
+            <a:srgbClr val="FFD000"/>
+          </a:solidFill>
+          <a:ln>
+            <a:noFill/>
+          </a:ln>
+        </p:spPr>
+        <p:style>
+          <a:lnRef idx="1">
+            <a:schemeClr val="accent1"/>
+          </a:lnRef>
+          <a:fillRef idx="3">
+            <a:schemeClr val="accent1"/>
+          </a:fillRef>
+          <a:effectRef idx="2">
+            <a:schemeClr val="accent1"/>
+          </a:effectRef>
+          <a:fontRef idx="minor">
+            <a:schemeClr val="lt1"/>
+          </a:fontRef>
+        </p:style>
+        <p:txBody>
+          <a:bodyPr rtlCol="0" anchor="ctr"/>
+          <a:lstStyle/>
+          <a:p>
+            <a:pPr algn="ctr"/>
+          </a:p>
+        </p:txBody>
+      </p:sp>
+      <p:sp>
+        <p:nvSpPr>
+          <p:cNvPr id="4" name="TextBox 3"/>
+          <p:cNvSpPr txBox="1"/>
+          <p:nvPr/>
+        </p:nvSpPr>
+        <p:spPr>
+          <a:xfrm>
+            <a:off x="457200" y="164592"/>
+            <a:ext cx="11277295" cy="502920"/>
+          </a:xfrm>
+          <a:prstGeom prst="rect">
+            <a:avLst/>
+          </a:prstGeom>
+          <a:noFill/>
+        </p:spPr>
+        <p:txBody>
+          <a:bodyPr wrap="square">
+            <a:spAutoFit/>
+          </a:bodyPr>
+          <a:lstStyle/>
+          <a:p>
+            <a:r>
+              <a:rPr sz="2600" b="1" i="0">
+                <a:solidFill>
+                  <a:srgbClr val="FFFFFF"/>
+                </a:solidFill>
+                <a:latin typeface="Calibri"/>
+              </a:rPr>
+              <a:t>Antes de entregar — autochequeo</a:t>
+            </a:r>
+          </a:p>
+        </p:txBody>
+      </p:sp>
+      <p:sp>
+        <p:nvSpPr>
+          <p:cNvPr id="5" name="Rounded Rectangle 4"/>
+          <p:cNvSpPr/>
+          <p:nvPr/>
+        </p:nvSpPr>
+        <p:spPr>
+          <a:xfrm>
+            <a:off x="457200" y="1261872"/>
+            <a:ext cx="11277295" cy="566928"/>
+          </a:xfrm>
+          <a:prstGeom prst="roundRect">
+            <a:avLst>
+              <a:gd name="adj" fmla="val 12000"/>
+            </a:avLst>
+          </a:prstGeom>
+          <a:solidFill>
+            <a:srgbClr val="F2F2F2"/>
+          </a:solidFill>
+          <a:ln>
+            <a:noFill/>
+          </a:ln>
+        </p:spPr>
+        <p:style>
+          <a:lnRef idx="1">
+            <a:schemeClr val="accent1"/>
+          </a:lnRef>
+          <a:fillRef idx="3">
+            <a:schemeClr val="accent1"/>
+          </a:fillRef>
+          <a:effectRef idx="2">
+            <a:schemeClr val="accent1"/>
+          </a:effectRef>
+          <a:fontRef idx="minor">
+            <a:schemeClr val="lt1"/>
+          </a:fontRef>
+        </p:style>
+        <p:txBody>
+          <a:bodyPr rtlCol="0" anchor="ctr"/>
+          <a:lstStyle/>
+          <a:p>
+            <a:pPr algn="ctr"/>
+          </a:p>
+        </p:txBody>
+      </p:sp>
+      <p:sp>
+        <p:nvSpPr>
+          <p:cNvPr id="6" name="Rectangle 5"/>
+          <p:cNvSpPr/>
+          <p:nvPr/>
+        </p:nvSpPr>
+        <p:spPr>
+          <a:xfrm>
+            <a:off x="640080" y="1408175"/>
+            <a:ext cx="274320" cy="274320"/>
+          </a:xfrm>
+          <a:prstGeom prst="rect">
+            <a:avLst/>
+          </a:prstGeom>
+          <a:solidFill>
+            <a:srgbClr val="FFFFFF"/>
+          </a:solidFill>
+          <a:ln>
+            <a:solidFill>
+              <a:srgbClr val="333333"/>
+            </a:solidFill>
+          </a:ln>
+        </p:spPr>
+        <p:style>
+          <a:lnRef idx="1">
+            <a:schemeClr val="accent1"/>
+          </a:lnRef>
+          <a:fillRef idx="3">
+            <a:schemeClr val="accent1"/>
+          </a:fillRef>
+          <a:effectRef idx="2">
+            <a:schemeClr val="accent1"/>
+          </a:effectRef>
+          <a:fontRef idx="minor">
+            <a:schemeClr val="lt1"/>
+          </a:fontRef>
+        </p:style>
+        <p:txBody>
+          <a:bodyPr rtlCol="0" anchor="ctr"/>
+          <a:lstStyle/>
+          <a:p>
+            <a:pPr algn="ctr"/>
+          </a:p>
+        </p:txBody>
+      </p:sp>
+      <p:sp>
+        <p:nvSpPr>
+          <p:cNvPr id="7" name="Rectangle 6"/>
+          <p:cNvSpPr/>
+          <p:nvPr/>
+        </p:nvSpPr>
+        <p:spPr>
+          <a:xfrm>
+            <a:off x="640080" y="1408175"/>
+            <a:ext cx="73152" cy="274320"/>
           </a:xfrm>
           <a:prstGeom prst="rect">
             <a:avLst/>
@@ -3572,7 +3733,6 @@
           <a:ln>
             <a:noFill/>
           </a:ln>
-          <a:effectLst/>
         </p:spPr>
         <p:style>
           <a:lnRef idx="1">
@@ -3598,14 +3758,14 @@
       </p:sp>
       <p:sp>
         <p:nvSpPr>
-          <p:cNvPr id="4" name="TextBox 3"/>
+          <p:cNvPr id="8" name="TextBox 7"/>
           <p:cNvSpPr txBox="1"/>
           <p:nvPr/>
         </p:nvSpPr>
         <p:spPr>
           <a:xfrm>
-            <a:off x="640080" y="0"/>
-            <a:ext cx="9082735" cy="1188720"/>
+            <a:off x="1097280" y="1353312"/>
+            <a:ext cx="10362895" cy="402336"/>
           </a:xfrm>
           <a:prstGeom prst="rect">
             <a:avLst/>
@@ -3613,45 +3773,43 @@
           <a:noFill/>
         </p:spPr>
         <p:txBody>
-          <a:bodyPr wrap="square" anchor="ctr" lIns="0" rIns="0" tIns="0" bIns="0">
-            <a:spAutoFit/>
-          </a:bodyPr>
-          <a:lstStyle/>
-          <a:p>
-            <a:pPr algn="ctr"/>
-            <a:r>
-              <a:rPr sz="2600" b="1" i="0">
-                <a:solidFill>
-                  <a:srgbClr val="FFFFFF"/>
-                </a:solidFill>
-                <a:latin typeface="Calibri"/>
-              </a:rPr>
-              <a:t>Para esta semana</a:t>
-            </a:r>
-          </a:p>
-        </p:txBody>
-      </p:sp>
-      <p:sp>
-        <p:nvSpPr>
-          <p:cNvPr id="5" name="Rounded Rectangle 4"/>
+          <a:bodyPr wrap="square" anchor="ctr"/>
+          <a:lstStyle/>
+          <a:p>
+            <a:r>
+              <a:rPr sz="1500" b="0" i="0">
+                <a:solidFill>
+                  <a:srgbClr val="333333"/>
+                </a:solidFill>
+                <a:latin typeface="Calibri"/>
+              </a:rPr>
+              <a:t>¿Los atributos quedaron private o los deje accesibles desde fuera?</a:t>
+            </a:r>
+          </a:p>
+        </p:txBody>
+      </p:sp>
+      <p:sp>
+        <p:nvSpPr>
+          <p:cNvPr id="9" name="Rounded Rectangle 8"/>
           <p:cNvSpPr/>
           <p:nvPr/>
         </p:nvSpPr>
         <p:spPr>
           <a:xfrm>
-            <a:off x="640080" y="1783080"/>
-            <a:ext cx="10911535" cy="713232"/>
+            <a:off x="457200" y="1938528"/>
+            <a:ext cx="11277295" cy="566928"/>
           </a:xfrm>
           <a:prstGeom prst="roundRect">
-            <a:avLst/>
+            <a:avLst>
+              <a:gd name="adj" fmla="val 12000"/>
+            </a:avLst>
           </a:prstGeom>
           <a:solidFill>
-            <a:srgbClr val="FFF8D6"/>
+            <a:srgbClr val="F2F2F2"/>
           </a:solidFill>
           <a:ln>
             <a:noFill/>
           </a:ln>
-          <a:effectLst/>
         </p:spPr>
         <p:style>
           <a:lnRef idx="1">
@@ -3677,75 +3835,26 @@
       </p:sp>
       <p:sp>
         <p:nvSpPr>
-          <p:cNvPr id="6" name="TextBox 5"/>
-          <p:cNvSpPr txBox="1"/>
-          <p:nvPr/>
-        </p:nvSpPr>
-        <p:spPr>
-          <a:xfrm>
-            <a:off x="868680" y="1892807"/>
-            <a:ext cx="10454335" cy="493776"/>
-          </a:xfrm>
-          <a:prstGeom prst="rect">
-            <a:avLst/>
-          </a:prstGeom>
-          <a:noFill/>
-        </p:spPr>
-        <p:txBody>
-          <a:bodyPr wrap="square" anchor="t" lIns="0" rIns="0" tIns="0" bIns="0">
-            <a:spAutoFit/>
-          </a:bodyPr>
-          <a:lstStyle/>
-          <a:p>
-            <a:r>
-              <a:rPr sz="1300" b="1" i="0">
-                <a:solidFill>
-                  <a:srgbClr val="095292"/>
-                </a:solidFill>
-                <a:latin typeface="Calibri"/>
-              </a:rPr>
-              <a:t>💡 Aclaración</a:t>
-            </a:r>
-          </a:p>
-          <a:p>
-            <a:pPr>
-              <a:spcBef>
-                <a:spcPts val="400"/>
-              </a:spcBef>
-            </a:pPr>
-            <a:r>
-              <a:rPr sz="1300" b="0" i="0">
-                <a:solidFill>
-                  <a:srgbClr val="2B2B2B"/>
-                </a:solidFill>
-                <a:latin typeface="Calibri"/>
-              </a:rPr>
-              <a:t>Independiente: lectura de conceptos previos de POO + entorno 100% funcional.</a:t>
-            </a:r>
-          </a:p>
-        </p:txBody>
-      </p:sp>
-      <p:sp>
-        <p:nvSpPr>
-          <p:cNvPr id="7" name="Rounded Rectangle 6"/>
+          <p:cNvPr id="10" name="Rectangle 9"/>
           <p:cNvSpPr/>
           <p:nvPr/>
         </p:nvSpPr>
         <p:spPr>
           <a:xfrm>
-            <a:off x="640080" y="2724912"/>
-            <a:ext cx="10911535" cy="713232"/>
-          </a:xfrm>
-          <a:prstGeom prst="roundRect">
+            <a:off x="640080" y="2084832"/>
+            <a:ext cx="274320" cy="274320"/>
+          </a:xfrm>
+          <a:prstGeom prst="rect">
             <a:avLst/>
           </a:prstGeom>
           <a:solidFill>
-            <a:srgbClr val="E8F4FA"/>
+            <a:srgbClr val="FFFFFF"/>
           </a:solidFill>
           <a:ln>
-            <a:noFill/>
+            <a:solidFill>
+              <a:srgbClr val="333333"/>
+            </a:solidFill>
           </a:ln>
-          <a:effectLst/>
         </p:spPr>
         <p:style>
           <a:lnRef idx="1">
@@ -3771,75 +3880,24 @@
       </p:sp>
       <p:sp>
         <p:nvSpPr>
-          <p:cNvPr id="8" name="TextBox 7"/>
-          <p:cNvSpPr txBox="1"/>
-          <p:nvPr/>
-        </p:nvSpPr>
-        <p:spPr>
-          <a:xfrm>
-            <a:off x="868680" y="2834640"/>
-            <a:ext cx="10454335" cy="493776"/>
-          </a:xfrm>
-          <a:prstGeom prst="rect">
-            <a:avLst/>
-          </a:prstGeom>
-          <a:noFill/>
-        </p:spPr>
-        <p:txBody>
-          <a:bodyPr wrap="square" anchor="t" lIns="0" rIns="0" tIns="0" bIns="0">
-            <a:spAutoFit/>
-          </a:bodyPr>
-          <a:lstStyle/>
-          <a:p>
-            <a:r>
-              <a:rPr sz="1300" b="1" i="0">
-                <a:solidFill>
-                  <a:srgbClr val="095292"/>
-                </a:solidFill>
-                <a:latin typeface="Calibri"/>
-              </a:rPr>
-              <a:t>ℹ️ Nota institucional</a:t>
-            </a:r>
-          </a:p>
-          <a:p>
-            <a:pPr>
-              <a:spcBef>
-                <a:spcPts val="400"/>
-              </a:spcBef>
-            </a:pPr>
-            <a:r>
-              <a:rPr sz="1300" b="0" i="0">
-                <a:solidFill>
-                  <a:srgbClr val="2B2B2B"/>
-                </a:solidFill>
-                <a:latin typeface="Calibri"/>
-              </a:rPr>
-              <a:t>Traer a la siguiente clase dudas concretas de ArrayList (siguiente trabajo dirigido).</a:t>
-            </a:r>
-          </a:p>
-        </p:txBody>
-      </p:sp>
-      <p:sp>
-        <p:nvSpPr>
-          <p:cNvPr id="9" name="Rounded Rectangle 8"/>
+          <p:cNvPr id="11" name="Rectangle 10"/>
           <p:cNvSpPr/>
           <p:nvPr/>
         </p:nvSpPr>
         <p:spPr>
           <a:xfrm>
-            <a:off x="640080" y="3666744"/>
-            <a:ext cx="10911535" cy="969264"/>
-          </a:xfrm>
-          <a:prstGeom prst="roundRect">
+            <a:off x="640080" y="2084832"/>
+            <a:ext cx="73152" cy="274320"/>
+          </a:xfrm>
+          <a:prstGeom prst="rect">
             <a:avLst/>
           </a:prstGeom>
           <a:solidFill>
-            <a:srgbClr val="FBE4E4"/>
+            <a:srgbClr val="269CCB"/>
           </a:solidFill>
           <a:ln>
             <a:noFill/>
           </a:ln>
-          <a:effectLst/>
         </p:spPr>
         <p:style>
           <a:lnRef idx="1">
@@ -3865,14 +3923,14 @@
       </p:sp>
       <p:sp>
         <p:nvSpPr>
-          <p:cNvPr id="10" name="TextBox 9"/>
+          <p:cNvPr id="12" name="TextBox 11"/>
           <p:cNvSpPr txBox="1"/>
           <p:nvPr/>
         </p:nvSpPr>
         <p:spPr>
           <a:xfrm>
-            <a:off x="868680" y="3776472"/>
-            <a:ext cx="10454335" cy="749808"/>
+            <a:off x="1097280" y="2029968"/>
+            <a:ext cx="10362895" cy="402336"/>
           </a:xfrm>
           <a:prstGeom prst="rect">
             <a:avLst/>
@@ -3880,66 +3938,213 @@
           <a:noFill/>
         </p:spPr>
         <p:txBody>
-          <a:bodyPr wrap="square" anchor="t" lIns="0" rIns="0" tIns="0" bIns="0">
+          <a:bodyPr wrap="square" anchor="ctr"/>
+          <a:lstStyle/>
+          <a:p>
+            <a:r>
+              <a:rPr sz="1500" b="0" i="0">
+                <a:solidFill>
+                  <a:srgbClr val="333333"/>
+                </a:solidFill>
+                <a:latin typeface="Calibri"/>
+              </a:rPr>
+              <a:t>¿El constructor inicializa TODOS los atributos?</a:t>
+            </a:r>
+          </a:p>
+        </p:txBody>
+      </p:sp>
+      <p:sp>
+        <p:nvSpPr>
+          <p:cNvPr id="13" name="Rounded Rectangle 12"/>
+          <p:cNvSpPr/>
+          <p:nvPr/>
+        </p:nvSpPr>
+        <p:spPr>
+          <a:xfrm>
+            <a:off x="457200" y="2615184"/>
+            <a:ext cx="11277295" cy="566928"/>
+          </a:xfrm>
+          <a:prstGeom prst="roundRect">
+            <a:avLst>
+              <a:gd name="adj" fmla="val 12000"/>
+            </a:avLst>
+          </a:prstGeom>
+          <a:solidFill>
+            <a:srgbClr val="F2F2F2"/>
+          </a:solidFill>
+          <a:ln>
+            <a:noFill/>
+          </a:ln>
+        </p:spPr>
+        <p:style>
+          <a:lnRef idx="1">
+            <a:schemeClr val="accent1"/>
+          </a:lnRef>
+          <a:fillRef idx="3">
+            <a:schemeClr val="accent1"/>
+          </a:fillRef>
+          <a:effectRef idx="2">
+            <a:schemeClr val="accent1"/>
+          </a:effectRef>
+          <a:fontRef idx="minor">
+            <a:schemeClr val="lt1"/>
+          </a:fontRef>
+        </p:style>
+        <p:txBody>
+          <a:bodyPr rtlCol="0" anchor="ctr"/>
+          <a:lstStyle/>
+          <a:p>
+            <a:pPr algn="ctr"/>
+          </a:p>
+        </p:txBody>
+      </p:sp>
+      <p:sp>
+        <p:nvSpPr>
+          <p:cNvPr id="14" name="Rectangle 13"/>
+          <p:cNvSpPr/>
+          <p:nvPr/>
+        </p:nvSpPr>
+        <p:spPr>
+          <a:xfrm>
+            <a:off x="640080" y="2761488"/>
+            <a:ext cx="274320" cy="274320"/>
+          </a:xfrm>
+          <a:prstGeom prst="rect">
+            <a:avLst/>
+          </a:prstGeom>
+          <a:solidFill>
+            <a:srgbClr val="FFFFFF"/>
+          </a:solidFill>
+          <a:ln>
+            <a:solidFill>
+              <a:srgbClr val="333333"/>
+            </a:solidFill>
+          </a:ln>
+        </p:spPr>
+        <p:style>
+          <a:lnRef idx="1">
+            <a:schemeClr val="accent1"/>
+          </a:lnRef>
+          <a:fillRef idx="3">
+            <a:schemeClr val="accent1"/>
+          </a:fillRef>
+          <a:effectRef idx="2">
+            <a:schemeClr val="accent1"/>
+          </a:effectRef>
+          <a:fontRef idx="minor">
+            <a:schemeClr val="lt1"/>
+          </a:fontRef>
+        </p:style>
+        <p:txBody>
+          <a:bodyPr rtlCol="0" anchor="ctr"/>
+          <a:lstStyle/>
+          <a:p>
+            <a:pPr algn="ctr"/>
+          </a:p>
+        </p:txBody>
+      </p:sp>
+      <p:sp>
+        <p:nvSpPr>
+          <p:cNvPr id="15" name="Rectangle 14"/>
+          <p:cNvSpPr/>
+          <p:nvPr/>
+        </p:nvSpPr>
+        <p:spPr>
+          <a:xfrm>
+            <a:off x="640080" y="2761488"/>
+            <a:ext cx="73152" cy="274320"/>
+          </a:xfrm>
+          <a:prstGeom prst="rect">
+            <a:avLst/>
+          </a:prstGeom>
+          <a:solidFill>
+            <a:srgbClr val="269CCB"/>
+          </a:solidFill>
+          <a:ln>
+            <a:noFill/>
+          </a:ln>
+        </p:spPr>
+        <p:style>
+          <a:lnRef idx="1">
+            <a:schemeClr val="accent1"/>
+          </a:lnRef>
+          <a:fillRef idx="3">
+            <a:schemeClr val="accent1"/>
+          </a:fillRef>
+          <a:effectRef idx="2">
+            <a:schemeClr val="accent1"/>
+          </a:effectRef>
+          <a:fontRef idx="minor">
+            <a:schemeClr val="lt1"/>
+          </a:fontRef>
+        </p:style>
+        <p:txBody>
+          <a:bodyPr rtlCol="0" anchor="ctr"/>
+          <a:lstStyle/>
+          <a:p>
+            <a:pPr algn="ctr"/>
+          </a:p>
+        </p:txBody>
+      </p:sp>
+      <p:sp>
+        <p:nvSpPr>
+          <p:cNvPr id="16" name="TextBox 15"/>
+          <p:cNvSpPr txBox="1"/>
+          <p:nvPr/>
+        </p:nvSpPr>
+        <p:spPr>
+          <a:xfrm>
+            <a:off x="1097280" y="2706624"/>
+            <a:ext cx="10362895" cy="402336"/>
+          </a:xfrm>
+          <a:prstGeom prst="rect">
+            <a:avLst/>
+          </a:prstGeom>
+          <a:noFill/>
+        </p:spPr>
+        <p:txBody>
+          <a:bodyPr wrap="square" anchor="ctr"/>
+          <a:lstStyle/>
+          <a:p>
+            <a:r>
+              <a:rPr sz="1500" b="0" i="0">
+                <a:solidFill>
+                  <a:srgbClr val="333333"/>
+                </a:solidFill>
+                <a:latin typeface="Calibri"/>
+              </a:rPr>
+              <a:t>¿Sobreescribi toString() o estoy imprimiendo la direccion de memoria?</a:t>
+            </a:r>
+          </a:p>
+        </p:txBody>
+      </p:sp>
+      <p:sp>
+        <p:nvSpPr>
+          <p:cNvPr id="17" name="TextBox 16"/>
+          <p:cNvSpPr txBox="1"/>
+          <p:nvPr/>
+        </p:nvSpPr>
+        <p:spPr>
+          <a:xfrm>
+            <a:off x="11185855" y="6473952"/>
+            <a:ext cx="640080" cy="274320"/>
+          </a:xfrm>
+          <a:prstGeom prst="rect">
+            <a:avLst/>
+          </a:prstGeom>
+          <a:noFill/>
+        </p:spPr>
+        <p:txBody>
+          <a:bodyPr wrap="square">
             <a:spAutoFit/>
           </a:bodyPr>
           <a:lstStyle/>
           <a:p>
-            <a:r>
-              <a:rPr sz="1300" b="1" i="0">
-                <a:solidFill>
-                  <a:srgbClr val="095292"/>
-                </a:solidFill>
-                <a:latin typeface="Calibri"/>
-              </a:rPr>
-              <a:t>⚠️ Importante</a:t>
-            </a:r>
-          </a:p>
-          <a:p>
-            <a:pPr>
-              <a:spcBef>
-                <a:spcPts val="400"/>
-              </a:spcBef>
-            </a:pPr>
-            <a:r>
-              <a:rPr sz="1300" b="0" i="0">
-                <a:solidFill>
-                  <a:srgbClr val="2B2B2B"/>
-                </a:solidFill>
-                <a:latin typeface="Calibri"/>
-              </a:rPr>
-              <a:t>El taller/actividad de la semana se entrega a más tardar el domingo 23:59 (regla del Acuerdo).</a:t>
-            </a:r>
-          </a:p>
-        </p:txBody>
-      </p:sp>
-      <p:sp>
-        <p:nvSpPr>
-          <p:cNvPr id="11" name="TextBox 10"/>
-          <p:cNvSpPr txBox="1"/>
-          <p:nvPr/>
-        </p:nvSpPr>
-        <p:spPr>
-          <a:xfrm>
-            <a:off x="11094415" y="6446520"/>
-            <a:ext cx="548640" cy="274320"/>
-          </a:xfrm>
-          <a:prstGeom prst="rect">
-            <a:avLst/>
-          </a:prstGeom>
-          <a:noFill/>
-        </p:spPr>
-        <p:txBody>
-          <a:bodyPr wrap="square" anchor="t" lIns="0" rIns="0" tIns="0" bIns="0">
-            <a:spAutoFit/>
-          </a:bodyPr>
-          <a:lstStyle/>
-          <a:p>
             <a:pPr algn="r"/>
             <a:r>
-              <a:rPr sz="1000" b="1" i="0">
-                <a:solidFill>
-                  <a:srgbClr val="8F989D"/>
+              <a:rPr sz="1100" b="0" i="0">
+                <a:solidFill>
+                  <a:srgbClr val="666666"/>
                 </a:solidFill>
                 <a:latin typeface="Calibri"/>
               </a:rPr>
@@ -3983,7 +4188,580 @@
         <p:spPr>
           <a:xfrm>
             <a:off x="0" y="0"/>
-            <a:ext cx="12191695" cy="164592"/>
+            <a:ext cx="12191695" cy="960120"/>
+          </a:xfrm>
+          <a:prstGeom prst="rect">
+            <a:avLst/>
+          </a:prstGeom>
+          <a:solidFill>
+            <a:srgbClr val="095292"/>
+          </a:solidFill>
+          <a:ln>
+            <a:noFill/>
+          </a:ln>
+        </p:spPr>
+        <p:style>
+          <a:lnRef idx="1">
+            <a:schemeClr val="accent1"/>
+          </a:lnRef>
+          <a:fillRef idx="3">
+            <a:schemeClr val="accent1"/>
+          </a:fillRef>
+          <a:effectRef idx="2">
+            <a:schemeClr val="accent1"/>
+          </a:effectRef>
+          <a:fontRef idx="minor">
+            <a:schemeClr val="lt1"/>
+          </a:fontRef>
+        </p:style>
+        <p:txBody>
+          <a:bodyPr rtlCol="0" anchor="ctr"/>
+          <a:lstStyle/>
+          <a:p>
+            <a:pPr algn="ctr"/>
+          </a:p>
+        </p:txBody>
+      </p:sp>
+      <p:sp>
+        <p:nvSpPr>
+          <p:cNvPr id="3" name="Rectangle 2"/>
+          <p:cNvSpPr/>
+          <p:nvPr/>
+        </p:nvSpPr>
+        <p:spPr>
+          <a:xfrm>
+            <a:off x="0" y="960120"/>
+            <a:ext cx="12191695" cy="41148"/>
+          </a:xfrm>
+          <a:prstGeom prst="rect">
+            <a:avLst/>
+          </a:prstGeom>
+          <a:solidFill>
+            <a:srgbClr val="FFD000"/>
+          </a:solidFill>
+          <a:ln>
+            <a:noFill/>
+          </a:ln>
+        </p:spPr>
+        <p:style>
+          <a:lnRef idx="1">
+            <a:schemeClr val="accent1"/>
+          </a:lnRef>
+          <a:fillRef idx="3">
+            <a:schemeClr val="accent1"/>
+          </a:fillRef>
+          <a:effectRef idx="2">
+            <a:schemeClr val="accent1"/>
+          </a:effectRef>
+          <a:fontRef idx="minor">
+            <a:schemeClr val="lt1"/>
+          </a:fontRef>
+        </p:style>
+        <p:txBody>
+          <a:bodyPr rtlCol="0" anchor="ctr"/>
+          <a:lstStyle/>
+          <a:p>
+            <a:pPr algn="ctr"/>
+          </a:p>
+        </p:txBody>
+      </p:sp>
+      <p:sp>
+        <p:nvSpPr>
+          <p:cNvPr id="4" name="TextBox 3"/>
+          <p:cNvSpPr txBox="1"/>
+          <p:nvPr/>
+        </p:nvSpPr>
+        <p:spPr>
+          <a:xfrm>
+            <a:off x="457200" y="164592"/>
+            <a:ext cx="11277295" cy="502920"/>
+          </a:xfrm>
+          <a:prstGeom prst="rect">
+            <a:avLst/>
+          </a:prstGeom>
+          <a:noFill/>
+        </p:spPr>
+        <p:txBody>
+          <a:bodyPr wrap="square">
+            <a:spAutoFit/>
+          </a:bodyPr>
+          <a:lstStyle/>
+          <a:p>
+            <a:r>
+              <a:rPr sz="2600" b="1" i="0">
+                <a:solidFill>
+                  <a:srgbClr val="FFFFFF"/>
+                </a:solidFill>
+                <a:latin typeface="Calibri"/>
+              </a:rPr>
+              <a:t>Criterios de exito / entregable</a:t>
+            </a:r>
+          </a:p>
+        </p:txBody>
+      </p:sp>
+      <p:sp>
+        <p:nvSpPr>
+          <p:cNvPr id="5" name="TextBox 4"/>
+          <p:cNvSpPr txBox="1"/>
+          <p:nvPr/>
+        </p:nvSpPr>
+        <p:spPr>
+          <a:xfrm>
+            <a:off x="457200" y="1170432"/>
+            <a:ext cx="11277295" cy="5230368"/>
+          </a:xfrm>
+          <a:prstGeom prst="rect">
+            <a:avLst/>
+          </a:prstGeom>
+          <a:noFill/>
+        </p:spPr>
+        <p:txBody>
+          <a:bodyPr wrap="square">
+            <a:spAutoFit/>
+          </a:bodyPr>
+          <a:lstStyle/>
+          <a:p>
+            <a:pPr>
+              <a:spcAft>
+                <a:spcPts val="800"/>
+              </a:spcAft>
+            </a:pPr>
+            <a:r>
+              <a:rPr sz="1600" b="0" i="0">
+                <a:solidFill>
+                  <a:srgbClr val="333333"/>
+                </a:solidFill>
+                <a:latin typeface="Calibri"/>
+              </a:rPr>
+              <a:t>–   </a:t>
+            </a:r>
+            <a:r>
+              <a:rPr sz="1600" b="1" i="0">
+                <a:solidFill>
+                  <a:srgbClr val="333333"/>
+                </a:solidFill>
+                <a:latin typeface="Calibri"/>
+              </a:rPr>
+              <a:t>Entregable:</a:t>
+            </a:r>
+            <a:r>
+              <a:rPr sz="1600" b="0" i="0">
+                <a:solidFill>
+                  <a:srgbClr val="333333"/>
+                </a:solidFill>
+                <a:latin typeface="Calibri"/>
+              </a:rPr>
+              <a:t> Proyecto NetBeans con la clase Mascota (atributos privados, constructor y toString) y un main que crea dos objetos distintos</a:t>
+            </a:r>
+          </a:p>
+          <a:p>
+            <a:pPr>
+              <a:spcAft>
+                <a:spcPts val="800"/>
+              </a:spcAft>
+            </a:pPr>
+            <a:r>
+              <a:rPr sz="1600" b="0" i="0">
+                <a:solidFill>
+                  <a:srgbClr val="333333"/>
+                </a:solidFill>
+                <a:latin typeface="Calibri"/>
+              </a:rPr>
+              <a:t>–   </a:t>
+            </a:r>
+            <a:r>
+              <a:rPr sz="1600" b="1" i="0">
+                <a:solidFill>
+                  <a:srgbClr val="333333"/>
+                </a:solidFill>
+                <a:latin typeface="Calibri"/>
+              </a:rPr>
+              <a:t>Exito:</a:t>
+            </a:r>
+            <a:r>
+              <a:rPr sz="1600" b="0" i="0">
+                <a:solidFill>
+                  <a:srgbClr val="333333"/>
+                </a:solidFill>
+                <a:latin typeface="Calibri"/>
+              </a:rPr>
+              <a:t> El proyecto compila y ejecuta sin errores en NetBeans.</a:t>
+            </a:r>
+          </a:p>
+          <a:p>
+            <a:pPr>
+              <a:spcAft>
+                <a:spcPts val="800"/>
+              </a:spcAft>
+            </a:pPr>
+            <a:r>
+              <a:rPr sz="1600" b="0" i="0">
+                <a:solidFill>
+                  <a:srgbClr val="333333"/>
+                </a:solidFill>
+                <a:latin typeface="Calibri"/>
+              </a:rPr>
+              <a:t>–   </a:t>
+            </a:r>
+            <a:r>
+              <a:rPr sz="1600" b="1" i="0">
+                <a:solidFill>
+                  <a:srgbClr val="333333"/>
+                </a:solidFill>
+                <a:latin typeface="Calibri"/>
+              </a:rPr>
+              <a:t>Exito:</a:t>
+            </a:r>
+            <a:r>
+              <a:rPr sz="1600" b="0" i="0">
+                <a:solidFill>
+                  <a:srgbClr val="333333"/>
+                </a:solidFill>
+                <a:latin typeface="Calibri"/>
+              </a:rPr>
+              <a:t> La clase Mascota tiene atributos private y un constructor que los inicializa todos.</a:t>
+            </a:r>
+          </a:p>
+          <a:p>
+            <a:pPr>
+              <a:spcAft>
+                <a:spcPts val="800"/>
+              </a:spcAft>
+            </a:pPr>
+            <a:r>
+              <a:rPr sz="1600" b="0" i="0">
+                <a:solidFill>
+                  <a:srgbClr val="333333"/>
+                </a:solidFill>
+                <a:latin typeface="Calibri"/>
+              </a:rPr>
+              <a:t>–   </a:t>
+            </a:r>
+            <a:r>
+              <a:rPr sz="1600" b="1" i="0">
+                <a:solidFill>
+                  <a:srgbClr val="333333"/>
+                </a:solidFill>
+                <a:latin typeface="Calibri"/>
+              </a:rPr>
+              <a:t>Exito:</a:t>
+            </a:r>
+            <a:r>
+              <a:rPr sz="1600" b="0" i="0">
+                <a:solidFill>
+                  <a:srgbClr val="333333"/>
+                </a:solidFill>
+                <a:latin typeface="Calibri"/>
+              </a:rPr>
+              <a:t> El main crea dos objetos distintos de la misma clase.</a:t>
+            </a:r>
+          </a:p>
+          <a:p>
+            <a:pPr>
+              <a:spcAft>
+                <a:spcPts val="800"/>
+              </a:spcAft>
+            </a:pPr>
+            <a:r>
+              <a:rPr sz="1600" b="0" i="0">
+                <a:solidFill>
+                  <a:srgbClr val="333333"/>
+                </a:solidFill>
+                <a:latin typeface="Calibri"/>
+              </a:rPr>
+              <a:t>–   </a:t>
+            </a:r>
+            <a:r>
+              <a:rPr sz="1600" b="1" i="0">
+                <a:solidFill>
+                  <a:srgbClr val="333333"/>
+                </a:solidFill>
+                <a:latin typeface="Calibri"/>
+              </a:rPr>
+              <a:t>Exito:</a:t>
+            </a:r>
+            <a:r>
+              <a:rPr sz="1600" b="0" i="0">
+                <a:solidFill>
+                  <a:srgbClr val="333333"/>
+                </a:solidFill>
+                <a:latin typeface="Calibri"/>
+              </a:rPr>
+              <a:t> Al imprimir una mascota se ve texto legible, no vetcare.Mascota@6d06d69c.</a:t>
+            </a:r>
+          </a:p>
+          <a:p>
+            <a:pPr>
+              <a:spcAft>
+                <a:spcPts val="800"/>
+              </a:spcAft>
+            </a:pPr>
+            <a:r>
+              <a:rPr sz="1600" b="0" i="0">
+                <a:solidFill>
+                  <a:srgbClr val="333333"/>
+                </a:solidFill>
+                <a:latin typeface="Calibri"/>
+              </a:rPr>
+              <a:t>–   </a:t>
+            </a:r>
+            <a:r>
+              <a:rPr sz="1600" b="1" i="0">
+                <a:solidFill>
+                  <a:srgbClr val="333333"/>
+                </a:solidFill>
+                <a:latin typeface="Calibri"/>
+              </a:rPr>
+              <a:t>Entrega en ExamLab (examlab.lovable.app/app)</a:t>
+            </a:r>
+            <a:r>
+              <a:rPr sz="1600" b="0" i="0">
+                <a:solidFill>
+                  <a:srgbClr val="333333"/>
+                </a:solidFill>
+                <a:latin typeface="Calibri"/>
+              </a:rPr>
+              <a:t> — domingo 23:59.</a:t>
+            </a:r>
+          </a:p>
+        </p:txBody>
+      </p:sp>
+      <p:sp>
+        <p:nvSpPr>
+          <p:cNvPr id="6" name="TextBox 5"/>
+          <p:cNvSpPr txBox="1"/>
+          <p:nvPr/>
+        </p:nvSpPr>
+        <p:spPr>
+          <a:xfrm>
+            <a:off x="11185855" y="6473952"/>
+            <a:ext cx="640080" cy="274320"/>
+          </a:xfrm>
+          <a:prstGeom prst="rect">
+            <a:avLst/>
+          </a:prstGeom>
+          <a:noFill/>
+        </p:spPr>
+        <p:txBody>
+          <a:bodyPr wrap="square">
+            <a:spAutoFit/>
+          </a:bodyPr>
+          <a:lstStyle/>
+          <a:p>
+            <a:pPr algn="r"/>
+            <a:r>
+              <a:rPr sz="1100" b="0" i="0">
+                <a:solidFill>
+                  <a:srgbClr val="666666"/>
+                </a:solidFill>
+                <a:latin typeface="Calibri"/>
+              </a:rPr>
+              <a:t>11</a:t>
+            </a:r>
+          </a:p>
+        </p:txBody>
+      </p:sp>
+    </p:spTree>
+  </p:cSld>
+  <p:clrMapOvr>
+    <a:masterClrMapping/>
+  </p:clrMapOvr>
+</p:sld>
+</file>
+
+<file path=ppt/slides/slide12.xml><?xml version="1.0" encoding="utf-8"?>
+<p:sld xmlns:a="http://schemas.openxmlformats.org/drawingml/2006/main" xmlns:p="http://schemas.openxmlformats.org/presentationml/2006/main" xmlns:r="http://schemas.openxmlformats.org/officeDocument/2006/relationships">
+  <p:cSld>
+    <p:bg>
+      <p:bgPr>
+        <a:solidFill>
+          <a:srgbClr val="FFFFFF"/>
+        </a:solidFill>
+        <a:effectLst/>
+      </p:bgPr>
+    </p:bg>
+    <p:spTree>
+      <p:nvGrpSpPr>
+        <p:cNvPr id="1" name=""/>
+        <p:cNvGrpSpPr/>
+        <p:nvPr/>
+      </p:nvGrpSpPr>
+      <p:grpSpPr/>
+      <p:sp>
+        <p:nvSpPr>
+          <p:cNvPr id="2" name="Rectangle 1"/>
+          <p:cNvSpPr/>
+          <p:nvPr/>
+        </p:nvSpPr>
+        <p:spPr>
+          <a:xfrm>
+            <a:off x="0" y="0"/>
+            <a:ext cx="12191695" cy="960120"/>
+          </a:xfrm>
+          <a:prstGeom prst="rect">
+            <a:avLst/>
+          </a:prstGeom>
+          <a:solidFill>
+            <a:srgbClr val="095292"/>
+          </a:solidFill>
+          <a:ln>
+            <a:noFill/>
+          </a:ln>
+        </p:spPr>
+        <p:style>
+          <a:lnRef idx="1">
+            <a:schemeClr val="accent1"/>
+          </a:lnRef>
+          <a:fillRef idx="3">
+            <a:schemeClr val="accent1"/>
+          </a:fillRef>
+          <a:effectRef idx="2">
+            <a:schemeClr val="accent1"/>
+          </a:effectRef>
+          <a:fontRef idx="minor">
+            <a:schemeClr val="lt1"/>
+          </a:fontRef>
+        </p:style>
+        <p:txBody>
+          <a:bodyPr rtlCol="0" anchor="ctr"/>
+          <a:lstStyle/>
+          <a:p>
+            <a:pPr algn="ctr"/>
+          </a:p>
+        </p:txBody>
+      </p:sp>
+      <p:sp>
+        <p:nvSpPr>
+          <p:cNvPr id="3" name="Rectangle 2"/>
+          <p:cNvSpPr/>
+          <p:nvPr/>
+        </p:nvSpPr>
+        <p:spPr>
+          <a:xfrm>
+            <a:off x="0" y="960120"/>
+            <a:ext cx="12191695" cy="41148"/>
+          </a:xfrm>
+          <a:prstGeom prst="rect">
+            <a:avLst/>
+          </a:prstGeom>
+          <a:solidFill>
+            <a:srgbClr val="FFD000"/>
+          </a:solidFill>
+          <a:ln>
+            <a:noFill/>
+          </a:ln>
+        </p:spPr>
+        <p:style>
+          <a:lnRef idx="1">
+            <a:schemeClr val="accent1"/>
+          </a:lnRef>
+          <a:fillRef idx="3">
+            <a:schemeClr val="accent1"/>
+          </a:fillRef>
+          <a:effectRef idx="2">
+            <a:schemeClr val="accent1"/>
+          </a:effectRef>
+          <a:fontRef idx="minor">
+            <a:schemeClr val="lt1"/>
+          </a:fontRef>
+        </p:style>
+        <p:txBody>
+          <a:bodyPr rtlCol="0" anchor="ctr"/>
+          <a:lstStyle/>
+          <a:p>
+            <a:pPr algn="ctr"/>
+          </a:p>
+        </p:txBody>
+      </p:sp>
+      <p:sp>
+        <p:nvSpPr>
+          <p:cNvPr id="4" name="TextBox 3"/>
+          <p:cNvSpPr txBox="1"/>
+          <p:nvPr/>
+        </p:nvSpPr>
+        <p:spPr>
+          <a:xfrm>
+            <a:off x="457200" y="164592"/>
+            <a:ext cx="11277295" cy="502920"/>
+          </a:xfrm>
+          <a:prstGeom prst="rect">
+            <a:avLst/>
+          </a:prstGeom>
+          <a:noFill/>
+        </p:spPr>
+        <p:txBody>
+          <a:bodyPr wrap="square">
+            <a:spAutoFit/>
+          </a:bodyPr>
+          <a:lstStyle/>
+          <a:p>
+            <a:r>
+              <a:rPr sz="2600" b="1" i="0">
+                <a:solidFill>
+                  <a:srgbClr val="FFFFFF"/>
+                </a:solidFill>
+                <a:latin typeface="Calibri"/>
+              </a:rPr>
+              <a:t>Para el PI esta semana</a:t>
+            </a:r>
+          </a:p>
+        </p:txBody>
+      </p:sp>
+      <p:sp>
+        <p:nvSpPr>
+          <p:cNvPr id="5" name="Rounded Rectangle 4"/>
+          <p:cNvSpPr/>
+          <p:nvPr/>
+        </p:nvSpPr>
+        <p:spPr>
+          <a:xfrm>
+            <a:off x="457200" y="1261872"/>
+            <a:ext cx="11277295" cy="1051560"/>
+          </a:xfrm>
+          <a:prstGeom prst="roundRect">
+            <a:avLst>
+              <a:gd name="adj" fmla="val 12000"/>
+            </a:avLst>
+          </a:prstGeom>
+          <a:solidFill>
+            <a:srgbClr val="E8F4FA"/>
+          </a:solidFill>
+          <a:ln>
+            <a:noFill/>
+          </a:ln>
+        </p:spPr>
+        <p:style>
+          <a:lnRef idx="1">
+            <a:schemeClr val="accent1"/>
+          </a:lnRef>
+          <a:fillRef idx="3">
+            <a:schemeClr val="accent1"/>
+          </a:fillRef>
+          <a:effectRef idx="2">
+            <a:schemeClr val="accent1"/>
+          </a:effectRef>
+          <a:fontRef idx="minor">
+            <a:schemeClr val="lt1"/>
+          </a:fontRef>
+        </p:style>
+        <p:txBody>
+          <a:bodyPr rtlCol="0" anchor="ctr"/>
+          <a:lstStyle/>
+          <a:p>
+            <a:pPr algn="ctr"/>
+          </a:p>
+        </p:txBody>
+      </p:sp>
+      <p:sp>
+        <p:nvSpPr>
+          <p:cNvPr id="6" name="Rectangle 5"/>
+          <p:cNvSpPr/>
+          <p:nvPr/>
+        </p:nvSpPr>
+        <p:spPr>
+          <a:xfrm>
+            <a:off x="457200" y="1261872"/>
+            <a:ext cx="128016" cy="1051560"/>
           </a:xfrm>
           <a:prstGeom prst="rect">
             <a:avLst/>
@@ -3994,7 +4772,436 @@
           <a:ln>
             <a:noFill/>
           </a:ln>
-          <a:effectLst/>
+        </p:spPr>
+        <p:style>
+          <a:lnRef idx="1">
+            <a:schemeClr val="accent1"/>
+          </a:lnRef>
+          <a:fillRef idx="3">
+            <a:schemeClr val="accent1"/>
+          </a:fillRef>
+          <a:effectRef idx="2">
+            <a:schemeClr val="accent1"/>
+          </a:effectRef>
+          <a:fontRef idx="minor">
+            <a:schemeClr val="lt1"/>
+          </a:fontRef>
+        </p:style>
+        <p:txBody>
+          <a:bodyPr rtlCol="0" anchor="ctr"/>
+          <a:lstStyle/>
+          <a:p>
+            <a:pPr algn="ctr"/>
+          </a:p>
+        </p:txBody>
+      </p:sp>
+      <p:sp>
+        <p:nvSpPr>
+          <p:cNvPr id="7" name="TextBox 6"/>
+          <p:cNvSpPr txBox="1"/>
+          <p:nvPr/>
+        </p:nvSpPr>
+        <p:spPr>
+          <a:xfrm>
+            <a:off x="777240" y="1399031"/>
+            <a:ext cx="10774375" cy="822959"/>
+          </a:xfrm>
+          <a:prstGeom prst="rect">
+            <a:avLst/>
+          </a:prstGeom>
+          <a:noFill/>
+        </p:spPr>
+        <p:txBody>
+          <a:bodyPr wrap="square">
+            <a:spAutoFit/>
+          </a:bodyPr>
+          <a:lstStyle/>
+          <a:p>
+            <a:r>
+              <a:rPr sz="1200" b="1" i="0">
+                <a:solidFill>
+                  <a:srgbClr val="269CCB"/>
+                </a:solidFill>
+                <a:latin typeface="Calibri"/>
+              </a:rPr>
+              <a:t>Info</a:t>
+            </a:r>
+          </a:p>
+          <a:p>
+            <a:pPr>
+              <a:spcBef>
+                <a:spcPts val="400"/>
+              </a:spcBef>
+            </a:pPr>
+            <a:r>
+              <a:rPr sz="1400" b="0" i="0">
+                <a:solidFill>
+                  <a:srgbClr val="333333"/>
+                </a:solidFill>
+                <a:latin typeface="Calibri"/>
+              </a:rPr>
+              <a:t>Hito: Entorno de desarrollo listo y la primera clase del dominio VetCare escrita</a:t>
+            </a:r>
+          </a:p>
+        </p:txBody>
+      </p:sp>
+      <p:sp>
+        <p:nvSpPr>
+          <p:cNvPr id="8" name="Rounded Rectangle 7"/>
+          <p:cNvSpPr/>
+          <p:nvPr/>
+        </p:nvSpPr>
+        <p:spPr>
+          <a:xfrm>
+            <a:off x="457200" y="2478024"/>
+            <a:ext cx="11277295" cy="1051560"/>
+          </a:xfrm>
+          <a:prstGeom prst="roundRect">
+            <a:avLst>
+              <a:gd name="adj" fmla="val 12000"/>
+            </a:avLst>
+          </a:prstGeom>
+          <a:solidFill>
+            <a:srgbClr val="FFF8E1"/>
+          </a:solidFill>
+          <a:ln>
+            <a:noFill/>
+          </a:ln>
+        </p:spPr>
+        <p:style>
+          <a:lnRef idx="1">
+            <a:schemeClr val="accent1"/>
+          </a:lnRef>
+          <a:fillRef idx="3">
+            <a:schemeClr val="accent1"/>
+          </a:fillRef>
+          <a:effectRef idx="2">
+            <a:schemeClr val="accent1"/>
+          </a:effectRef>
+          <a:fontRef idx="minor">
+            <a:schemeClr val="lt1"/>
+          </a:fontRef>
+        </p:style>
+        <p:txBody>
+          <a:bodyPr rtlCol="0" anchor="ctr"/>
+          <a:lstStyle/>
+          <a:p>
+            <a:pPr algn="ctr"/>
+          </a:p>
+        </p:txBody>
+      </p:sp>
+      <p:sp>
+        <p:nvSpPr>
+          <p:cNvPr id="9" name="Rectangle 8"/>
+          <p:cNvSpPr/>
+          <p:nvPr/>
+        </p:nvSpPr>
+        <p:spPr>
+          <a:xfrm>
+            <a:off x="457200" y="2478024"/>
+            <a:ext cx="128016" cy="1051560"/>
+          </a:xfrm>
+          <a:prstGeom prst="rect">
+            <a:avLst/>
+          </a:prstGeom>
+          <a:solidFill>
+            <a:srgbClr val="FFD000"/>
+          </a:solidFill>
+          <a:ln>
+            <a:noFill/>
+          </a:ln>
+        </p:spPr>
+        <p:style>
+          <a:lnRef idx="1">
+            <a:schemeClr val="accent1"/>
+          </a:lnRef>
+          <a:fillRef idx="3">
+            <a:schemeClr val="accent1"/>
+          </a:fillRef>
+          <a:effectRef idx="2">
+            <a:schemeClr val="accent1"/>
+          </a:effectRef>
+          <a:fontRef idx="minor">
+            <a:schemeClr val="lt1"/>
+          </a:fontRef>
+        </p:style>
+        <p:txBody>
+          <a:bodyPr rtlCol="0" anchor="ctr"/>
+          <a:lstStyle/>
+          <a:p>
+            <a:pPr algn="ctr"/>
+          </a:p>
+        </p:txBody>
+      </p:sp>
+      <p:sp>
+        <p:nvSpPr>
+          <p:cNvPr id="10" name="TextBox 9"/>
+          <p:cNvSpPr txBox="1"/>
+          <p:nvPr/>
+        </p:nvSpPr>
+        <p:spPr>
+          <a:xfrm>
+            <a:off x="777240" y="2615184"/>
+            <a:ext cx="10774375" cy="822959"/>
+          </a:xfrm>
+          <a:prstGeom prst="rect">
+            <a:avLst/>
+          </a:prstGeom>
+          <a:noFill/>
+        </p:spPr>
+        <p:txBody>
+          <a:bodyPr wrap="square">
+            <a:spAutoFit/>
+          </a:bodyPr>
+          <a:lstStyle/>
+          <a:p>
+            <a:r>
+              <a:rPr sz="1200" b="1" i="0">
+                <a:solidFill>
+                  <a:srgbClr val="FFD000"/>
+                </a:solidFill>
+                <a:latin typeface="Calibri"/>
+              </a:rPr>
+              <a:t>Aclaración</a:t>
+            </a:r>
+          </a:p>
+          <a:p>
+            <a:pPr>
+              <a:spcBef>
+                <a:spcPts val="400"/>
+              </a:spcBef>
+            </a:pPr>
+            <a:r>
+              <a:rPr sz="1400" b="0" i="0">
+                <a:solidFill>
+                  <a:srgbClr val="333333"/>
+                </a:solidFill>
+                <a:latin typeface="Calibri"/>
+              </a:rPr>
+              <a:t>Enunciado completo: Clases/Proyecto Integrador/ (VetCare).</a:t>
+            </a:r>
+          </a:p>
+        </p:txBody>
+      </p:sp>
+      <p:sp>
+        <p:nvSpPr>
+          <p:cNvPr id="11" name="Rounded Rectangle 10"/>
+          <p:cNvSpPr/>
+          <p:nvPr/>
+        </p:nvSpPr>
+        <p:spPr>
+          <a:xfrm>
+            <a:off x="457200" y="3694176"/>
+            <a:ext cx="11277295" cy="1051560"/>
+          </a:xfrm>
+          <a:prstGeom prst="roundRect">
+            <a:avLst>
+              <a:gd name="adj" fmla="val 12000"/>
+            </a:avLst>
+          </a:prstGeom>
+          <a:solidFill>
+            <a:srgbClr val="FBE4E4"/>
+          </a:solidFill>
+          <a:ln>
+            <a:noFill/>
+          </a:ln>
+        </p:spPr>
+        <p:style>
+          <a:lnRef idx="1">
+            <a:schemeClr val="accent1"/>
+          </a:lnRef>
+          <a:fillRef idx="3">
+            <a:schemeClr val="accent1"/>
+          </a:fillRef>
+          <a:effectRef idx="2">
+            <a:schemeClr val="accent1"/>
+          </a:effectRef>
+          <a:fontRef idx="minor">
+            <a:schemeClr val="lt1"/>
+          </a:fontRef>
+        </p:style>
+        <p:txBody>
+          <a:bodyPr rtlCol="0" anchor="ctr"/>
+          <a:lstStyle/>
+          <a:p>
+            <a:pPr algn="ctr"/>
+          </a:p>
+        </p:txBody>
+      </p:sp>
+      <p:sp>
+        <p:nvSpPr>
+          <p:cNvPr id="12" name="Rectangle 11"/>
+          <p:cNvSpPr/>
+          <p:nvPr/>
+        </p:nvSpPr>
+        <p:spPr>
+          <a:xfrm>
+            <a:off x="457200" y="3694176"/>
+            <a:ext cx="128016" cy="1051560"/>
+          </a:xfrm>
+          <a:prstGeom prst="rect">
+            <a:avLst/>
+          </a:prstGeom>
+          <a:solidFill>
+            <a:srgbClr val="A02030"/>
+          </a:solidFill>
+          <a:ln>
+            <a:noFill/>
+          </a:ln>
+        </p:spPr>
+        <p:style>
+          <a:lnRef idx="1">
+            <a:schemeClr val="accent1"/>
+          </a:lnRef>
+          <a:fillRef idx="3">
+            <a:schemeClr val="accent1"/>
+          </a:fillRef>
+          <a:effectRef idx="2">
+            <a:schemeClr val="accent1"/>
+          </a:effectRef>
+          <a:fontRef idx="minor">
+            <a:schemeClr val="lt1"/>
+          </a:fontRef>
+        </p:style>
+        <p:txBody>
+          <a:bodyPr rtlCol="0" anchor="ctr"/>
+          <a:lstStyle/>
+          <a:p>
+            <a:pPr algn="ctr"/>
+          </a:p>
+        </p:txBody>
+      </p:sp>
+      <p:sp>
+        <p:nvSpPr>
+          <p:cNvPr id="13" name="TextBox 12"/>
+          <p:cNvSpPr txBox="1"/>
+          <p:nvPr/>
+        </p:nvSpPr>
+        <p:spPr>
+          <a:xfrm>
+            <a:off x="777240" y="3831336"/>
+            <a:ext cx="10774375" cy="822959"/>
+          </a:xfrm>
+          <a:prstGeom prst="rect">
+            <a:avLst/>
+          </a:prstGeom>
+          <a:noFill/>
+        </p:spPr>
+        <p:txBody>
+          <a:bodyPr wrap="square">
+            <a:spAutoFit/>
+          </a:bodyPr>
+          <a:lstStyle/>
+          <a:p>
+            <a:r>
+              <a:rPr sz="1200" b="1" i="0">
+                <a:solidFill>
+                  <a:srgbClr val="A02030"/>
+                </a:solidFill>
+                <a:latin typeface="Calibri"/>
+              </a:rPr>
+              <a:t>Atención</a:t>
+            </a:r>
+          </a:p>
+          <a:p>
+            <a:pPr>
+              <a:spcBef>
+                <a:spcPts val="400"/>
+              </a:spcBef>
+            </a:pPr>
+            <a:r>
+              <a:rPr sz="1400" b="0" i="0">
+                <a:solidFill>
+                  <a:srgbClr val="333333"/>
+                </a:solidFill>
+                <a:latin typeface="Calibri"/>
+              </a:rPr>
+              <a:t>Entrega del taller en ExamLab (examlab.lovable.app/app) · domingo 23:59.</a:t>
+            </a:r>
+          </a:p>
+        </p:txBody>
+      </p:sp>
+      <p:sp>
+        <p:nvSpPr>
+          <p:cNvPr id="14" name="TextBox 13"/>
+          <p:cNvSpPr txBox="1"/>
+          <p:nvPr/>
+        </p:nvSpPr>
+        <p:spPr>
+          <a:xfrm>
+            <a:off x="11185855" y="6473952"/>
+            <a:ext cx="640080" cy="274320"/>
+          </a:xfrm>
+          <a:prstGeom prst="rect">
+            <a:avLst/>
+          </a:prstGeom>
+          <a:noFill/>
+        </p:spPr>
+        <p:txBody>
+          <a:bodyPr wrap="square">
+            <a:spAutoFit/>
+          </a:bodyPr>
+          <a:lstStyle/>
+          <a:p>
+            <a:pPr algn="r"/>
+            <a:r>
+              <a:rPr sz="1100" b="0" i="0">
+                <a:solidFill>
+                  <a:srgbClr val="666666"/>
+                </a:solidFill>
+                <a:latin typeface="Calibri"/>
+              </a:rPr>
+              <a:t>12</a:t>
+            </a:r>
+          </a:p>
+        </p:txBody>
+      </p:sp>
+    </p:spTree>
+  </p:cSld>
+  <p:clrMapOvr>
+    <a:masterClrMapping/>
+  </p:clrMapOvr>
+</p:sld>
+</file>
+
+<file path=ppt/slides/slide13.xml><?xml version="1.0" encoding="utf-8"?>
+<p:sld xmlns:a="http://schemas.openxmlformats.org/drawingml/2006/main" xmlns:p="http://schemas.openxmlformats.org/presentationml/2006/main" xmlns:r="http://schemas.openxmlformats.org/officeDocument/2006/relationships">
+  <p:cSld>
+    <p:bg>
+      <p:bgPr>
+        <a:solidFill>
+          <a:srgbClr val="FFFFFF"/>
+        </a:solidFill>
+        <a:effectLst/>
+      </p:bgPr>
+    </p:bg>
+    <p:spTree>
+      <p:nvGrpSpPr>
+        <p:cNvPr id="1" name=""/>
+        <p:cNvGrpSpPr/>
+        <p:nvPr/>
+      </p:nvGrpSpPr>
+      <p:grpSpPr/>
+      <p:sp>
+        <p:nvSpPr>
+          <p:cNvPr id="2" name="Rectangle 1"/>
+          <p:cNvSpPr/>
+          <p:nvPr/>
+        </p:nvSpPr>
+        <p:spPr>
+          <a:xfrm>
+            <a:off x="0" y="0"/>
+            <a:ext cx="12191695" cy="164592"/>
+          </a:xfrm>
+          <a:prstGeom prst="rect">
+            <a:avLst/>
+          </a:prstGeom>
+          <a:solidFill>
+            <a:srgbClr val="269CCB"/>
+          </a:solidFill>
+          <a:ln>
+            <a:noFill/>
+          </a:ln>
         </p:spPr>
         <p:style>
           <a:lnRef idx="1">
@@ -4034,7 +5241,7 @@
         </p:blipFill>
         <p:spPr>
           <a:xfrm>
-            <a:off x="10271455" y="5940447"/>
+            <a:off x="10271455" y="5998464"/>
             <a:ext cx="1463040" cy="643233"/>
           </a:xfrm>
           <a:prstGeom prst="rect">
@@ -4050,8 +5257,8 @@
         </p:nvSpPr>
         <p:spPr>
           <a:xfrm>
-            <a:off x="640080" y="1737360"/>
-            <a:ext cx="10911535" cy="1097280"/>
+            <a:off x="457200" y="1737360"/>
+            <a:ext cx="11277295" cy="1097280"/>
           </a:xfrm>
           <a:prstGeom prst="rect">
             <a:avLst/>
@@ -4059,9 +5266,7 @@
           <a:noFill/>
         </p:spPr>
         <p:txBody>
-          <a:bodyPr wrap="square" anchor="ctr" lIns="0" rIns="0" tIns="0" bIns="0">
-            <a:spAutoFit/>
-          </a:bodyPr>
+          <a:bodyPr wrap="square" anchor="ctr"/>
           <a:lstStyle/>
           <a:p>
             <a:pPr algn="ctr"/>
@@ -4072,7 +5277,7 @@
                 </a:solidFill>
                 <a:latin typeface="Calibri"/>
               </a:rPr>
-              <a:t>Clase 1 lista</a:t>
+              <a:t>Clase 1 · VetCare avanza</a:t>
             </a:r>
           </a:p>
         </p:txBody>
@@ -4085,8 +5290,8 @@
         </p:nvSpPr>
         <p:spPr>
           <a:xfrm>
-            <a:off x="640080" y="3017520"/>
-            <a:ext cx="10911535" cy="1645920"/>
+            <a:off x="457200" y="3017520"/>
+            <a:ext cx="11277295" cy="1645920"/>
           </a:xfrm>
           <a:prstGeom prst="rect">
             <a:avLst/>
@@ -4094,7 +5299,7 @@
           <a:noFill/>
         </p:spPr>
         <p:txBody>
-          <a:bodyPr wrap="square" anchor="t" lIns="0" rIns="0" tIns="0" bIns="0">
+          <a:bodyPr wrap="square">
             <a:spAutoFit/>
           </a:bodyPr>
           <a:lstStyle/>
@@ -4107,11 +5312,11 @@
             <a:r>
               <a:rPr sz="1600" b="0" i="0">
                 <a:solidFill>
-                  <a:srgbClr val="2B2B2B"/>
-                </a:solidFill>
-                <a:latin typeface="Calibri"/>
-              </a:rPr>
-              <a:t>Molde ≠ galleta · Clase ≠ objeto</a:t>
+                  <a:srgbClr val="333333"/>
+                </a:solidFill>
+                <a:latin typeface="Calibri"/>
+              </a:rPr>
+              <a:t>Entorno de desarrollo listo y la primera clase del dominio VetCare escrita</a:t>
             </a:r>
           </a:p>
           <a:p>
@@ -4123,11 +5328,11 @@
             <a:r>
               <a:rPr sz="1600" b="0" i="0">
                 <a:solidFill>
-                  <a:srgbClr val="2B2B2B"/>
-                </a:solidFill>
-                <a:latin typeface="Calibri"/>
-              </a:rPr>
-              <a:t>Entorno arriba · Proyecto Integrador encendido</a:t>
+                  <a:srgbClr val="333333"/>
+                </a:solidFill>
+                <a:latin typeface="Calibri"/>
+              </a:rPr>
+              <a:t>Entregable: Proyecto NetBeans con la clase Mascota (atributos privados, constructor y toString) y un main que crea dos objetos distintos</a:t>
             </a:r>
           </a:p>
           <a:p>
@@ -4139,11 +5344,11 @@
             <a:r>
               <a:rPr sz="1600" b="0" i="0">
                 <a:solidFill>
-                  <a:srgbClr val="2B2B2B"/>
-                </a:solidFill>
-                <a:latin typeface="Calibri"/>
-              </a:rPr>
-              <a:t>Siguiente paso del tema: colecciones dinámicas (ArrayList)</a:t>
+                  <a:srgbClr val="333333"/>
+                </a:solidFill>
+                <a:latin typeface="Calibri"/>
+              </a:rPr>
+              <a:t>Siguiente clase: continuamos el hilo del PI</a:t>
             </a:r>
           </a:p>
         </p:txBody>
@@ -4156,8 +5361,8 @@
         </p:nvSpPr>
         <p:spPr>
           <a:xfrm>
-            <a:off x="640080" y="4754880"/>
-            <a:ext cx="10911535" cy="640080"/>
+            <a:off x="457200" y="4754880"/>
+            <a:ext cx="11277295" cy="640080"/>
           </a:xfrm>
           <a:prstGeom prst="rect">
             <a:avLst/>
@@ -4165,7 +5370,7 @@
           <a:noFill/>
         </p:spPr>
         <p:txBody>
-          <a:bodyPr wrap="square" anchor="t" lIns="0" rIns="0" tIns="0" bIns="0">
+          <a:bodyPr wrap="square">
             <a:spAutoFit/>
           </a:bodyPr>
           <a:lstStyle/>
@@ -4178,7 +5383,7 @@
                 </a:solidFill>
                 <a:latin typeface="Calibri"/>
               </a:rPr>
-              <a:t>Entorno listo · ficha del proyecto escrita</a:t>
+              <a:t>Teoria al servicio del proyecto</a:t>
             </a:r>
           </a:p>
         </p:txBody>
@@ -4218,7 +5423,7 @@
         <p:spPr>
           <a:xfrm>
             <a:off x="0" y="0"/>
-            <a:ext cx="12191695" cy="1188720"/>
+            <a:ext cx="12191695" cy="960120"/>
           </a:xfrm>
           <a:prstGeom prst="rect">
             <a:avLst/>
@@ -4229,7 +5434,6 @@
           <a:ln>
             <a:noFill/>
           </a:ln>
-          <a:effectLst/>
         </p:spPr>
         <p:style>
           <a:lnRef idx="1">
@@ -4261,19 +5465,18 @@
         </p:nvSpPr>
         <p:spPr>
           <a:xfrm>
-            <a:off x="0" y="1188720"/>
-            <a:ext cx="12191695" cy="54864"/>
+            <a:off x="0" y="960120"/>
+            <a:ext cx="12191695" cy="41148"/>
           </a:xfrm>
           <a:prstGeom prst="rect">
             <a:avLst/>
           </a:prstGeom>
           <a:solidFill>
-            <a:srgbClr val="269CCB"/>
+            <a:srgbClr val="FFD000"/>
           </a:solidFill>
           <a:ln>
             <a:noFill/>
           </a:ln>
-          <a:effectLst/>
         </p:spPr>
         <p:style>
           <a:lnRef idx="1">
@@ -4305,8 +5508,8 @@
         </p:nvSpPr>
         <p:spPr>
           <a:xfrm>
-            <a:off x="640080" y="0"/>
-            <a:ext cx="9082735" cy="1188720"/>
+            <a:off x="457200" y="164592"/>
+            <a:ext cx="11277295" cy="502920"/>
           </a:xfrm>
           <a:prstGeom prst="rect">
             <a:avLst/>
@@ -4314,12 +5517,11 @@
           <a:noFill/>
         </p:spPr>
         <p:txBody>
-          <a:bodyPr wrap="square" anchor="ctr" lIns="0" rIns="0" tIns="0" bIns="0">
+          <a:bodyPr wrap="square">
             <a:spAutoFit/>
           </a:bodyPr>
           <a:lstStyle/>
           <a:p>
-            <a:pPr algn="ctr"/>
             <a:r>
               <a:rPr sz="2600" b="1" i="0">
                 <a:solidFill>
@@ -4327,7 +5529,7 @@
                 </a:solidFill>
                 <a:latin typeface="Calibri"/>
               </a:rPr>
-              <a:t>Encuadre de hoy</a:t>
+              <a:t>Encuadre de hoy · Objetivo del PI</a:t>
             </a:r>
           </a:p>
         </p:txBody>
@@ -4340,8 +5542,8 @@
         </p:nvSpPr>
         <p:spPr>
           <a:xfrm>
-            <a:off x="640080" y="1737360"/>
-            <a:ext cx="10911535" cy="4572000"/>
+            <a:off x="457200" y="1170432"/>
+            <a:ext cx="11277295" cy="5230368"/>
           </a:xfrm>
           <a:prstGeom prst="rect">
             <a:avLst/>
@@ -4349,74 +5551,135 @@
           <a:noFill/>
         </p:spPr>
         <p:txBody>
-          <a:bodyPr wrap="square" anchor="t" lIns="0" rIns="0" tIns="0" bIns="0">
+          <a:bodyPr wrap="square">
             <a:spAutoFit/>
           </a:bodyPr>
           <a:lstStyle/>
           <a:p>
             <a:pPr>
               <a:spcAft>
-                <a:spcPts val="1000"/>
+                <a:spcPts val="800"/>
               </a:spcAft>
             </a:pPr>
             <a:r>
               <a:rPr sz="1600" b="0" i="0">
                 <a:solidFill>
-                  <a:srgbClr val="2B2B2B"/>
-                </a:solidFill>
-                <a:latin typeface="Calibri"/>
-              </a:rPr>
-              <a:t>–   Objetivo de hoy: activar el modelo mental de POO y dejar el entorno + el arranque del Proyecto Integrador.</a:t>
+                  <a:srgbClr val="333333"/>
+                </a:solidFill>
+                <a:latin typeface="Calibri"/>
+              </a:rPr>
+              <a:t>–   </a:t>
+            </a:r>
+            <a:r>
+              <a:rPr sz="1600" b="1" i="0">
+                <a:solidFill>
+                  <a:srgbClr val="333333"/>
+                </a:solidFill>
+                <a:latin typeface="Calibri"/>
+              </a:rPr>
+              <a:t>Hoy avanzamos VetCare en:</a:t>
+            </a:r>
+            <a:r>
+              <a:rPr sz="1600" b="0" i="0">
+                <a:solidFill>
+                  <a:srgbClr val="333333"/>
+                </a:solidFill>
+                <a:latin typeface="Calibri"/>
+              </a:rPr>
+              <a:t> Entorno de desarrollo listo y la primera clase del dominio VetCare escrita</a:t>
             </a:r>
           </a:p>
           <a:p>
             <a:pPr>
               <a:spcAft>
-                <a:spcPts val="1000"/>
+                <a:spcPts val="800"/>
               </a:spcAft>
             </a:pPr>
             <a:r>
               <a:rPr sz="1600" b="0" i="0">
                 <a:solidFill>
-                  <a:srgbClr val="2B2B2B"/>
-                </a:solidFill>
-                <a:latin typeface="Calibri"/>
-              </a:rPr>
-              <a:t>–   Bloque: </a:t>
+                  <a:srgbClr val="333333"/>
+                </a:solidFill>
+                <a:latin typeface="Calibri"/>
+              </a:rPr>
+              <a:t>–   Herramienta: </a:t>
             </a:r>
             <a:r>
               <a:rPr sz="1600" b="1" i="0">
                 <a:solidFill>
-                  <a:srgbClr val="2B2B2B"/>
+                  <a:srgbClr val="333333"/>
+                </a:solidFill>
+                <a:latin typeface="Calibri"/>
+              </a:rPr>
+              <a:t>Apache NetBeans</a:t>
+            </a:r>
+            <a:r>
+              <a:rPr sz="1600" b="0" i="0">
+                <a:solidFill>
+                  <a:srgbClr val="333333"/>
+                </a:solidFill>
+                <a:latin typeface="Calibri"/>
+              </a:rPr>
+              <a:t> · Bloque </a:t>
+            </a:r>
+            <a:r>
+              <a:rPr sz="1600" b="1" i="0">
+                <a:solidFill>
+                  <a:srgbClr val="333333"/>
                 </a:solidFill>
                 <a:latin typeface="Calibri"/>
               </a:rPr>
               <a:t>120 min</a:t>
-            </a:r>
-            <a:r>
-              <a:rPr sz="1600" b="0" i="0">
-                <a:solidFill>
-                  <a:srgbClr val="2B2B2B"/>
-                </a:solidFill>
-                <a:latin typeface="Calibri"/>
-              </a:rPr>
-              <a:t> · Diagnóstico · Teoría Core · Laboratorio · Primer avance del proyecto.</a:t>
             </a:r>
           </a:p>
           <a:p>
             <a:pPr>
               <a:spcAft>
-                <a:spcPts val="1000"/>
+                <a:spcPts val="800"/>
               </a:spcAft>
             </a:pPr>
             <a:r>
               <a:rPr sz="1600" b="0" i="0">
                 <a:solidFill>
-                  <a:srgbClr val="2B2B2B"/>
-                </a:solidFill>
-                <a:latin typeface="Calibri"/>
-              </a:rPr>
-              <a:t>–   Entorno local: JDK + IDE · sin software de pago obligatorio.</a:t>
+                  <a:srgbClr val="333333"/>
+                </a:solidFill>
+                <a:latin typeface="Calibri"/>
+              </a:rPr>
+              <a:t>–   </a:t>
+            </a:r>
+            <a:r>
+              <a:rPr sz="1600" b="1" i="0">
+                <a:solidFill>
+                  <a:srgbClr val="333333"/>
+                </a:solidFill>
+                <a:latin typeface="Calibri"/>
+              </a:rPr>
+              <a:t>Entregable de hoy:</a:t>
+            </a:r>
+            <a:r>
+              <a:rPr sz="1600" b="0" i="0">
+                <a:solidFill>
+                  <a:srgbClr val="333333"/>
+                </a:solidFill>
+                <a:latin typeface="Calibri"/>
+              </a:rPr>
+              <a:t> Proyecto NetBeans con la clase Mascota (atributos privados, constructor y toString) y un main que crea dos objetos distintos</a:t>
+            </a:r>
+          </a:p>
+          <a:p>
+            <a:pPr>
+              <a:spcAft>
+                <a:spcPts val="800"/>
+              </a:spcAft>
+            </a:pPr>
+            <a:r>
+              <a:rPr sz="1600" b="0" i="0">
+                <a:solidFill>
+                  <a:srgbClr val="333333"/>
+                </a:solidFill>
+                <a:latin typeface="Calibri"/>
+              </a:rPr>
+              <a:t>–   La teoria esta al servicio del producto: al salir, VetCare avanzo.</a:t>
             </a:r>
           </a:p>
         </p:txBody>
@@ -4429,8 +5692,8 @@
         </p:nvSpPr>
         <p:spPr>
           <a:xfrm>
-            <a:off x="11094415" y="6446520"/>
-            <a:ext cx="548640" cy="274320"/>
+            <a:off x="11185855" y="6473952"/>
+            <a:ext cx="640080" cy="274320"/>
           </a:xfrm>
           <a:prstGeom prst="rect">
             <a:avLst/>
@@ -4438,16 +5701,16 @@
           <a:noFill/>
         </p:spPr>
         <p:txBody>
-          <a:bodyPr wrap="square" anchor="t" lIns="0" rIns="0" tIns="0" bIns="0">
+          <a:bodyPr wrap="square">
             <a:spAutoFit/>
           </a:bodyPr>
           <a:lstStyle/>
           <a:p>
             <a:pPr algn="r"/>
             <a:r>
-              <a:rPr sz="1000" b="1" i="0">
-                <a:solidFill>
-                  <a:srgbClr val="8F989D"/>
+              <a:rPr sz="1100" b="0" i="0">
+                <a:solidFill>
+                  <a:srgbClr val="666666"/>
                 </a:solidFill>
                 <a:latin typeface="Calibri"/>
               </a:rPr>
@@ -4491,7 +5754,7 @@
         <p:spPr>
           <a:xfrm>
             <a:off x="0" y="0"/>
-            <a:ext cx="12191695" cy="1188720"/>
+            <a:ext cx="12191695" cy="960120"/>
           </a:xfrm>
           <a:prstGeom prst="rect">
             <a:avLst/>
@@ -4502,7 +5765,6 @@
           <a:ln>
             <a:noFill/>
           </a:ln>
-          <a:effectLst/>
         </p:spPr>
         <p:style>
           <a:lnRef idx="1">
@@ -4534,8 +5796,85 @@
         </p:nvSpPr>
         <p:spPr>
           <a:xfrm>
-            <a:off x="0" y="1188720"/>
-            <a:ext cx="12191695" cy="54864"/>
+            <a:off x="0" y="960120"/>
+            <a:ext cx="12191695" cy="41148"/>
+          </a:xfrm>
+          <a:prstGeom prst="rect">
+            <a:avLst/>
+          </a:prstGeom>
+          <a:solidFill>
+            <a:srgbClr val="FFD000"/>
+          </a:solidFill>
+          <a:ln>
+            <a:noFill/>
+          </a:ln>
+        </p:spPr>
+        <p:style>
+          <a:lnRef idx="1">
+            <a:schemeClr val="accent1"/>
+          </a:lnRef>
+          <a:fillRef idx="3">
+            <a:schemeClr val="accent1"/>
+          </a:fillRef>
+          <a:effectRef idx="2">
+            <a:schemeClr val="accent1"/>
+          </a:effectRef>
+          <a:fontRef idx="minor">
+            <a:schemeClr val="lt1"/>
+          </a:fontRef>
+        </p:style>
+        <p:txBody>
+          <a:bodyPr rtlCol="0" anchor="ctr"/>
+          <a:lstStyle/>
+          <a:p>
+            <a:pPr algn="ctr"/>
+          </a:p>
+        </p:txBody>
+      </p:sp>
+      <p:sp>
+        <p:nvSpPr>
+          <p:cNvPr id="4" name="TextBox 3"/>
+          <p:cNvSpPr txBox="1"/>
+          <p:nvPr/>
+        </p:nvSpPr>
+        <p:spPr>
+          <a:xfrm>
+            <a:off x="457200" y="164592"/>
+            <a:ext cx="11277295" cy="502920"/>
+          </a:xfrm>
+          <a:prstGeom prst="rect">
+            <a:avLst/>
+          </a:prstGeom>
+          <a:noFill/>
+        </p:spPr>
+        <p:txBody>
+          <a:bodyPr wrap="square">
+            <a:spAutoFit/>
+          </a:bodyPr>
+          <a:lstStyle/>
+          <a:p>
+            <a:r>
+              <a:rPr sz="2600" b="1" i="0">
+                <a:solidFill>
+                  <a:srgbClr val="FFFFFF"/>
+                </a:solidFill>
+                <a:latin typeface="Calibri"/>
+              </a:rPr>
+              <a:t>Mapa del bloque de hoy (120 min)</a:t>
+            </a:r>
+          </a:p>
+        </p:txBody>
+      </p:sp>
+      <p:sp>
+        <p:nvSpPr>
+          <p:cNvPr id="5" name="Rectangle 4"/>
+          <p:cNvSpPr/>
+          <p:nvPr/>
+        </p:nvSpPr>
+        <p:spPr>
+          <a:xfrm>
+            <a:off x="457200" y="2176272"/>
+            <a:ext cx="11277295" cy="73152"/>
           </a:xfrm>
           <a:prstGeom prst="rect">
             <a:avLst/>
@@ -4546,7 +5885,6 @@
           <a:ln>
             <a:noFill/>
           </a:ln>
-          <a:effectLst/>
         </p:spPr>
         <p:style>
           <a:lnRef idx="1">
@@ -4572,52 +5910,19 @@
       </p:sp>
       <p:sp>
         <p:nvSpPr>
-          <p:cNvPr id="4" name="TextBox 3"/>
-          <p:cNvSpPr txBox="1"/>
-          <p:nvPr/>
-        </p:nvSpPr>
-        <p:spPr>
-          <a:xfrm>
-            <a:off x="640080" y="0"/>
-            <a:ext cx="9082735" cy="1188720"/>
-          </a:xfrm>
-          <a:prstGeom prst="rect">
-            <a:avLst/>
-          </a:prstGeom>
-          <a:noFill/>
-        </p:spPr>
-        <p:txBody>
-          <a:bodyPr wrap="square" anchor="ctr" lIns="0" rIns="0" tIns="0" bIns="0">
-            <a:spAutoFit/>
-          </a:bodyPr>
-          <a:lstStyle/>
-          <a:p>
-            <a:pPr algn="ctr"/>
-            <a:r>
-              <a:rPr sz="2600" b="1" i="0">
-                <a:solidFill>
-                  <a:srgbClr val="FFFFFF"/>
-                </a:solidFill>
-                <a:latin typeface="Calibri"/>
-              </a:rPr>
-              <a:t>Mapa del bloque de hoy (120 min)</a:t>
-            </a:r>
-          </a:p>
-        </p:txBody>
-      </p:sp>
-      <p:sp>
-        <p:nvSpPr>
-          <p:cNvPr id="5" name="Rounded Rectangle 4"/>
+          <p:cNvPr id="6" name="Rounded Rectangle 5"/>
           <p:cNvSpPr/>
           <p:nvPr/>
         </p:nvSpPr>
         <p:spPr>
           <a:xfrm>
-            <a:off x="640080" y="1764792"/>
-            <a:ext cx="891006" cy="384048"/>
+            <a:off x="1438625" y="2066543"/>
+            <a:ext cx="292608" cy="292608"/>
           </a:xfrm>
           <a:prstGeom prst="roundRect">
-            <a:avLst/>
+            <a:avLst>
+              <a:gd name="adj" fmla="val 12000"/>
+            </a:avLst>
           </a:prstGeom>
           <a:solidFill>
             <a:srgbClr val="095292"/>
@@ -4625,7 +5930,6 @@
           <a:ln>
             <a:noFill/>
           </a:ln>
-          <a:effectLst/>
         </p:spPr>
         <p:style>
           <a:lnRef idx="1">
@@ -4651,14 +5955,14 @@
       </p:sp>
       <p:sp>
         <p:nvSpPr>
-          <p:cNvPr id="6" name="TextBox 5"/>
+          <p:cNvPr id="7" name="TextBox 6"/>
           <p:cNvSpPr txBox="1"/>
           <p:nvPr/>
         </p:nvSpPr>
         <p:spPr>
           <a:xfrm>
-            <a:off x="676656" y="1764792"/>
-            <a:ext cx="817854" cy="384048"/>
+            <a:off x="457200" y="1353312"/>
+            <a:ext cx="2255459" cy="502920"/>
           </a:xfrm>
           <a:prstGeom prst="rect">
             <a:avLst/>
@@ -4666,16 +5970,16 @@
           <a:noFill/>
         </p:spPr>
         <p:txBody>
-          <a:bodyPr wrap="square" anchor="ctr" lIns="0" rIns="0" tIns="0" bIns="0">
+          <a:bodyPr wrap="square">
             <a:spAutoFit/>
           </a:bodyPr>
           <a:lstStyle/>
           <a:p>
             <a:pPr algn="ctr"/>
             <a:r>
-              <a:rPr sz="1100" b="1" i="0">
-                <a:solidFill>
-                  <a:srgbClr val="FFFFFF"/>
+              <a:rPr sz="1300" b="1" i="0">
+                <a:solidFill>
+                  <a:srgbClr val="095292"/>
                 </a:solidFill>
                 <a:latin typeface="Calibri"/>
               </a:rPr>
@@ -4686,17 +5990,54 @@
       </p:sp>
       <p:sp>
         <p:nvSpPr>
-          <p:cNvPr id="7" name="Rounded Rectangle 6"/>
+          <p:cNvPr id="8" name="TextBox 7"/>
+          <p:cNvSpPr txBox="1"/>
+          <p:nvPr/>
+        </p:nvSpPr>
+        <p:spPr>
+          <a:xfrm>
+            <a:off x="502920" y="2587752"/>
+            <a:ext cx="2164019" cy="2560320"/>
+          </a:xfrm>
+          <a:prstGeom prst="rect">
+            <a:avLst/>
+          </a:prstGeom>
+          <a:noFill/>
+        </p:spPr>
+        <p:txBody>
+          <a:bodyPr wrap="square">
+            <a:spAutoFit/>
+          </a:bodyPr>
+          <a:lstStyle/>
+          <a:p>
+            <a:pPr algn="ctr"/>
+            <a:r>
+              <a:rPr sz="1300" b="0" i="0">
+                <a:solidFill>
+                  <a:srgbClr val="333333"/>
+                </a:solidFill>
+                <a:latin typeface="Calibri"/>
+              </a:rPr>
+              <a:t>Encuadre y repaso del avance</a:t>
+            </a:r>
+          </a:p>
+        </p:txBody>
+      </p:sp>
+      <p:sp>
+        <p:nvSpPr>
+          <p:cNvPr id="9" name="Rounded Rectangle 8"/>
           <p:cNvSpPr/>
           <p:nvPr/>
         </p:nvSpPr>
         <p:spPr>
           <a:xfrm>
-            <a:off x="1585950" y="1764792"/>
-            <a:ext cx="2227516" cy="384048"/>
+            <a:off x="3694084" y="2066543"/>
+            <a:ext cx="292608" cy="292608"/>
           </a:xfrm>
           <a:prstGeom prst="roundRect">
-            <a:avLst/>
+            <a:avLst>
+              <a:gd name="adj" fmla="val 12000"/>
+            </a:avLst>
           </a:prstGeom>
           <a:solidFill>
             <a:srgbClr val="269CCB"/>
@@ -4704,7 +6045,6 @@
           <a:ln>
             <a:noFill/>
           </a:ln>
-          <a:effectLst/>
         </p:spPr>
         <p:style>
           <a:lnRef idx="1">
@@ -4730,14 +6070,14 @@
       </p:sp>
       <p:sp>
         <p:nvSpPr>
-          <p:cNvPr id="8" name="TextBox 7"/>
+          <p:cNvPr id="10" name="TextBox 9"/>
           <p:cNvSpPr txBox="1"/>
           <p:nvPr/>
         </p:nvSpPr>
         <p:spPr>
           <a:xfrm>
-            <a:off x="1622526" y="1764792"/>
-            <a:ext cx="2154364" cy="384048"/>
+            <a:off x="2712659" y="1353312"/>
+            <a:ext cx="2255459" cy="502920"/>
           </a:xfrm>
           <a:prstGeom prst="rect">
             <a:avLst/>
@@ -4745,45 +6085,81 @@
           <a:noFill/>
         </p:spPr>
         <p:txBody>
-          <a:bodyPr wrap="square" anchor="ctr" lIns="0" rIns="0" tIns="0" bIns="0">
+          <a:bodyPr wrap="square">
             <a:spAutoFit/>
           </a:bodyPr>
           <a:lstStyle/>
           <a:p>
             <a:pPr algn="ctr"/>
             <a:r>
-              <a:rPr sz="1100" b="1" i="0">
-                <a:solidFill>
-                  <a:srgbClr val="FFFFFF"/>
-                </a:solidFill>
-                <a:latin typeface="Calibri"/>
-              </a:rPr>
-              <a:t>10-35</a:t>
-            </a:r>
-          </a:p>
-        </p:txBody>
-      </p:sp>
-      <p:sp>
-        <p:nvSpPr>
-          <p:cNvPr id="9" name="Rounded Rectangle 8"/>
+              <a:rPr sz="1300" b="1" i="0">
+                <a:solidFill>
+                  <a:srgbClr val="095292"/>
+                </a:solidFill>
+                <a:latin typeface="Calibri"/>
+              </a:rPr>
+              <a:t>10-40</a:t>
+            </a:r>
+          </a:p>
+        </p:txBody>
+      </p:sp>
+      <p:sp>
+        <p:nvSpPr>
+          <p:cNvPr id="11" name="TextBox 10"/>
+          <p:cNvSpPr txBox="1"/>
+          <p:nvPr/>
+        </p:nvSpPr>
+        <p:spPr>
+          <a:xfrm>
+            <a:off x="2758379" y="2587752"/>
+            <a:ext cx="2164019" cy="2560320"/>
+          </a:xfrm>
+          <a:prstGeom prst="rect">
+            <a:avLst/>
+          </a:prstGeom>
+          <a:noFill/>
+        </p:spPr>
+        <p:txBody>
+          <a:bodyPr wrap="square">
+            <a:spAutoFit/>
+          </a:bodyPr>
+          <a:lstStyle/>
+          <a:p>
+            <a:pPr algn="ctr"/>
+            <a:r>
+              <a:rPr sz="1300" b="0" i="0">
+                <a:solidFill>
+                  <a:srgbClr val="333333"/>
+                </a:solidFill>
+                <a:latin typeface="Calibri"/>
+              </a:rPr>
+              <a:t>Teoria Core del tema de hoy</a:t>
+            </a:r>
+          </a:p>
+        </p:txBody>
+      </p:sp>
+      <p:sp>
+        <p:nvSpPr>
+          <p:cNvPr id="12" name="Rounded Rectangle 11"/>
           <p:cNvSpPr/>
           <p:nvPr/>
         </p:nvSpPr>
         <p:spPr>
           <a:xfrm>
-            <a:off x="3868331" y="1764792"/>
-            <a:ext cx="3118523" cy="384048"/>
+            <a:off x="5949543" y="2066543"/>
+            <a:ext cx="292608" cy="292608"/>
           </a:xfrm>
           <a:prstGeom prst="roundRect">
-            <a:avLst/>
+            <a:avLst>
+              <a:gd name="adj" fmla="val 12000"/>
+            </a:avLst>
           </a:prstGeom>
           <a:solidFill>
-            <a:srgbClr val="054F90"/>
+            <a:srgbClr val="095292"/>
           </a:solidFill>
           <a:ln>
             <a:noFill/>
           </a:ln>
-          <a:effectLst/>
         </p:spPr>
         <p:style>
           <a:lnRef idx="1">
@@ -4809,14 +6185,14 @@
       </p:sp>
       <p:sp>
         <p:nvSpPr>
-          <p:cNvPr id="10" name="TextBox 9"/>
+          <p:cNvPr id="13" name="TextBox 12"/>
           <p:cNvSpPr txBox="1"/>
           <p:nvPr/>
         </p:nvSpPr>
         <p:spPr>
           <a:xfrm>
-            <a:off x="3904907" y="1764792"/>
-            <a:ext cx="3045371" cy="384048"/>
+            <a:off x="4968118" y="1353312"/>
+            <a:ext cx="2255459" cy="502920"/>
           </a:xfrm>
           <a:prstGeom prst="rect">
             <a:avLst/>
@@ -4824,37 +6200,74 @@
           <a:noFill/>
         </p:spPr>
         <p:txBody>
-          <a:bodyPr wrap="square" anchor="ctr" lIns="0" rIns="0" tIns="0" bIns="0">
+          <a:bodyPr wrap="square">
             <a:spAutoFit/>
           </a:bodyPr>
           <a:lstStyle/>
           <a:p>
             <a:pPr algn="ctr"/>
             <a:r>
-              <a:rPr sz="1100" b="1" i="0">
-                <a:solidFill>
-                  <a:srgbClr val="FFFFFF"/>
-                </a:solidFill>
-                <a:latin typeface="Calibri"/>
-              </a:rPr>
-              <a:t>35-70</a:t>
-            </a:r>
-          </a:p>
-        </p:txBody>
-      </p:sp>
-      <p:sp>
-        <p:nvSpPr>
-          <p:cNvPr id="11" name="Rounded Rectangle 10"/>
+              <a:rPr sz="1300" b="1" i="0">
+                <a:solidFill>
+                  <a:srgbClr val="095292"/>
+                </a:solidFill>
+                <a:latin typeface="Calibri"/>
+              </a:rPr>
+              <a:t>40-60</a:t>
+            </a:r>
+          </a:p>
+        </p:txBody>
+      </p:sp>
+      <p:sp>
+        <p:nvSpPr>
+          <p:cNvPr id="14" name="TextBox 13"/>
+          <p:cNvSpPr txBox="1"/>
+          <p:nvPr/>
+        </p:nvSpPr>
+        <p:spPr>
+          <a:xfrm>
+            <a:off x="5013838" y="2587752"/>
+            <a:ext cx="2164019" cy="2560320"/>
+          </a:xfrm>
+          <a:prstGeom prst="rect">
+            <a:avLst/>
+          </a:prstGeom>
+          <a:noFill/>
+        </p:spPr>
+        <p:txBody>
+          <a:bodyPr wrap="square">
+            <a:spAutoFit/>
+          </a:bodyPr>
+          <a:lstStyle/>
+          <a:p>
+            <a:pPr algn="ctr"/>
+            <a:r>
+              <a:rPr sz="1300" b="0" i="0">
+                <a:solidFill>
+                  <a:srgbClr val="333333"/>
+                </a:solidFill>
+                <a:latin typeface="Calibri"/>
+              </a:rPr>
+              <a:t>Demo en vivo sobre VetCare</a:t>
+            </a:r>
+          </a:p>
+        </p:txBody>
+      </p:sp>
+      <p:sp>
+        <p:nvSpPr>
+          <p:cNvPr id="15" name="Rounded Rectangle 14"/>
           <p:cNvSpPr/>
           <p:nvPr/>
         </p:nvSpPr>
         <p:spPr>
           <a:xfrm>
-            <a:off x="7041718" y="1764792"/>
-            <a:ext cx="2673019" cy="384048"/>
+            <a:off x="8205002" y="2066543"/>
+            <a:ext cx="292608" cy="292608"/>
           </a:xfrm>
           <a:prstGeom prst="roundRect">
-            <a:avLst/>
+            <a:avLst>
+              <a:gd name="adj" fmla="val 12000"/>
+            </a:avLst>
           </a:prstGeom>
           <a:solidFill>
             <a:srgbClr val="269CCB"/>
@@ -4862,7 +6275,6 @@
           <a:ln>
             <a:noFill/>
           </a:ln>
-          <a:effectLst/>
         </p:spPr>
         <p:style>
           <a:lnRef idx="1">
@@ -4888,14 +6300,14 @@
       </p:sp>
       <p:sp>
         <p:nvSpPr>
-          <p:cNvPr id="12" name="TextBox 11"/>
+          <p:cNvPr id="16" name="TextBox 15"/>
           <p:cNvSpPr txBox="1"/>
           <p:nvPr/>
         </p:nvSpPr>
         <p:spPr>
           <a:xfrm>
-            <a:off x="7078294" y="1764792"/>
-            <a:ext cx="2599867" cy="384048"/>
+            <a:off x="7223577" y="1353312"/>
+            <a:ext cx="2255459" cy="502920"/>
           </a:xfrm>
           <a:prstGeom prst="rect">
             <a:avLst/>
@@ -4903,37 +6315,74 @@
           <a:noFill/>
         </p:spPr>
         <p:txBody>
-          <a:bodyPr wrap="square" anchor="ctr" lIns="0" rIns="0" tIns="0" bIns="0">
+          <a:bodyPr wrap="square">
             <a:spAutoFit/>
           </a:bodyPr>
           <a:lstStyle/>
           <a:p>
             <a:pPr algn="ctr"/>
             <a:r>
-              <a:rPr sz="1100" b="1" i="0">
-                <a:solidFill>
-                  <a:srgbClr val="FFFFFF"/>
-                </a:solidFill>
-                <a:latin typeface="Calibri"/>
-              </a:rPr>
-              <a:t>70-100</a:t>
-            </a:r>
-          </a:p>
-        </p:txBody>
-      </p:sp>
-      <p:sp>
-        <p:nvSpPr>
-          <p:cNvPr id="13" name="Rounded Rectangle 12"/>
+              <a:rPr sz="1300" b="1" i="0">
+                <a:solidFill>
+                  <a:srgbClr val="095292"/>
+                </a:solidFill>
+                <a:latin typeface="Calibri"/>
+              </a:rPr>
+              <a:t>60-105</a:t>
+            </a:r>
+          </a:p>
+        </p:txBody>
+      </p:sp>
+      <p:sp>
+        <p:nvSpPr>
+          <p:cNvPr id="17" name="TextBox 16"/>
+          <p:cNvSpPr txBox="1"/>
+          <p:nvPr/>
+        </p:nvSpPr>
+        <p:spPr>
+          <a:xfrm>
+            <a:off x="7269297" y="2587752"/>
+            <a:ext cx="2164019" cy="2560320"/>
+          </a:xfrm>
+          <a:prstGeom prst="rect">
+            <a:avLst/>
+          </a:prstGeom>
+          <a:noFill/>
+        </p:spPr>
+        <p:txBody>
+          <a:bodyPr wrap="square">
+            <a:spAutoFit/>
+          </a:bodyPr>
+          <a:lstStyle/>
+          <a:p>
+            <a:pPr algn="ctr"/>
+            <a:r>
+              <a:rPr sz="1300" b="0" i="0">
+                <a:solidFill>
+                  <a:srgbClr val="333333"/>
+                </a:solidFill>
+                <a:latin typeface="Calibri"/>
+              </a:rPr>
+              <a:t>Taller guiado = avance del PI</a:t>
+            </a:r>
+          </a:p>
+        </p:txBody>
+      </p:sp>
+      <p:sp>
+        <p:nvSpPr>
+          <p:cNvPr id="18" name="Rounded Rectangle 17"/>
           <p:cNvSpPr/>
           <p:nvPr/>
         </p:nvSpPr>
         <p:spPr>
           <a:xfrm>
-            <a:off x="9769602" y="1764792"/>
-            <a:ext cx="1782013" cy="384048"/>
+            <a:off x="10460461" y="2066543"/>
+            <a:ext cx="292608" cy="292608"/>
           </a:xfrm>
           <a:prstGeom prst="roundRect">
-            <a:avLst/>
+            <a:avLst>
+              <a:gd name="adj" fmla="val 12000"/>
+            </a:avLst>
           </a:prstGeom>
           <a:solidFill>
             <a:srgbClr val="095292"/>
@@ -4941,7 +6390,6 @@
           <a:ln>
             <a:noFill/>
           </a:ln>
-          <a:effectLst/>
         </p:spPr>
         <p:style>
           <a:lnRef idx="1">
@@ -4967,14 +6415,14 @@
       </p:sp>
       <p:sp>
         <p:nvSpPr>
-          <p:cNvPr id="14" name="TextBox 13"/>
+          <p:cNvPr id="19" name="TextBox 18"/>
           <p:cNvSpPr txBox="1"/>
           <p:nvPr/>
         </p:nvSpPr>
         <p:spPr>
           <a:xfrm>
-            <a:off x="9806177" y="1764792"/>
-            <a:ext cx="1708861" cy="384048"/>
+            <a:off x="9479036" y="1353312"/>
+            <a:ext cx="2255459" cy="502920"/>
           </a:xfrm>
           <a:prstGeom prst="rect">
             <a:avLst/>
@@ -4982,122 +6430,34 @@
           <a:noFill/>
         </p:spPr>
         <p:txBody>
-          <a:bodyPr wrap="square" anchor="ctr" lIns="0" rIns="0" tIns="0" bIns="0">
+          <a:bodyPr wrap="square">
             <a:spAutoFit/>
           </a:bodyPr>
           <a:lstStyle/>
           <a:p>
             <a:pPr algn="ctr"/>
             <a:r>
-              <a:rPr sz="1100" b="1" i="0">
-                <a:solidFill>
-                  <a:srgbClr val="FFFFFF"/>
-                </a:solidFill>
-                <a:latin typeface="Calibri"/>
-              </a:rPr>
-              <a:t>100-120</a:t>
-            </a:r>
-          </a:p>
-        </p:txBody>
-      </p:sp>
-      <p:sp>
-        <p:nvSpPr>
-          <p:cNvPr id="15" name="Rectangle 14"/>
-          <p:cNvSpPr/>
-          <p:nvPr/>
-        </p:nvSpPr>
-        <p:spPr>
-          <a:xfrm>
-            <a:off x="2221992" y="2478024"/>
-            <a:ext cx="54864" cy="3529584"/>
-          </a:xfrm>
-          <a:prstGeom prst="rect">
-            <a:avLst/>
-          </a:prstGeom>
-          <a:solidFill>
-            <a:srgbClr val="269CCB"/>
-          </a:solidFill>
-          <a:ln>
-            <a:noFill/>
-          </a:ln>
-          <a:effectLst/>
-        </p:spPr>
-        <p:style>
-          <a:lnRef idx="1">
-            <a:schemeClr val="accent1"/>
-          </a:lnRef>
-          <a:fillRef idx="3">
-            <a:schemeClr val="accent1"/>
-          </a:fillRef>
-          <a:effectRef idx="2">
-            <a:schemeClr val="accent1"/>
-          </a:effectRef>
-          <a:fontRef idx="minor">
-            <a:schemeClr val="lt1"/>
-          </a:fontRef>
-        </p:style>
-        <p:txBody>
-          <a:bodyPr rtlCol="0" anchor="ctr"/>
-          <a:lstStyle/>
-          <a:p>
-            <a:pPr algn="ctr"/>
-          </a:p>
-        </p:txBody>
-      </p:sp>
-      <p:sp>
-        <p:nvSpPr>
-          <p:cNvPr id="16" name="Rounded Rectangle 15"/>
-          <p:cNvSpPr/>
-          <p:nvPr/>
-        </p:nvSpPr>
-        <p:spPr>
-          <a:xfrm>
-            <a:off x="640080" y="2516428"/>
-            <a:ext cx="1417320" cy="438912"/>
-          </a:xfrm>
-          <a:prstGeom prst="roundRect">
-            <a:avLst/>
-          </a:prstGeom>
-          <a:solidFill>
-            <a:srgbClr val="095292"/>
-          </a:solidFill>
-          <a:ln>
-            <a:noFill/>
-          </a:ln>
-          <a:effectLst/>
-        </p:spPr>
-        <p:style>
-          <a:lnRef idx="1">
-            <a:schemeClr val="accent1"/>
-          </a:lnRef>
-          <a:fillRef idx="3">
-            <a:schemeClr val="accent1"/>
-          </a:fillRef>
-          <a:effectRef idx="2">
-            <a:schemeClr val="accent1"/>
-          </a:effectRef>
-          <a:fontRef idx="minor">
-            <a:schemeClr val="lt1"/>
-          </a:fontRef>
-        </p:style>
-        <p:txBody>
-          <a:bodyPr rtlCol="0" anchor="ctr"/>
-          <a:lstStyle/>
-          <a:p>
-            <a:pPr algn="ctr"/>
-          </a:p>
-        </p:txBody>
-      </p:sp>
-      <p:sp>
-        <p:nvSpPr>
-          <p:cNvPr id="17" name="TextBox 16"/>
+              <a:rPr sz="1300" b="1" i="0">
+                <a:solidFill>
+                  <a:srgbClr val="095292"/>
+                </a:solidFill>
+                <a:latin typeface="Calibri"/>
+              </a:rPr>
+              <a:t>105-120</a:t>
+            </a:r>
+          </a:p>
+        </p:txBody>
+      </p:sp>
+      <p:sp>
+        <p:nvSpPr>
+          <p:cNvPr id="20" name="TextBox 19"/>
           <p:cNvSpPr txBox="1"/>
           <p:nvPr/>
         </p:nvSpPr>
         <p:spPr>
           <a:xfrm>
-            <a:off x="640080" y="2516428"/>
-            <a:ext cx="1417320" cy="438912"/>
+            <a:off x="9524756" y="2587752"/>
+            <a:ext cx="2164019" cy="2560320"/>
           </a:xfrm>
           <a:prstGeom prst="rect">
             <a:avLst/>
@@ -5105,153 +6465,21 @@
           <a:noFill/>
         </p:spPr>
         <p:txBody>
-          <a:bodyPr wrap="square" anchor="ctr" lIns="0" rIns="0" tIns="0" bIns="0">
+          <a:bodyPr wrap="square">
             <a:spAutoFit/>
           </a:bodyPr>
           <a:lstStyle/>
           <a:p>
             <a:pPr algn="ctr"/>
             <a:r>
-              <a:rPr sz="1200" b="1" i="0">
-                <a:solidFill>
-                  <a:srgbClr val="FFFFFF"/>
-                </a:solidFill>
-                <a:latin typeface="Calibri"/>
-              </a:rPr>
-              <a:t>0-10</a:t>
-            </a:r>
-          </a:p>
-        </p:txBody>
-      </p:sp>
-      <p:sp>
-        <p:nvSpPr>
-          <p:cNvPr id="18" name="Rounded Rectangle 17"/>
-          <p:cNvSpPr/>
-          <p:nvPr/>
-        </p:nvSpPr>
-        <p:spPr>
-          <a:xfrm>
-            <a:off x="2167128" y="2653588"/>
-            <a:ext cx="164592" cy="164592"/>
-          </a:xfrm>
-          <a:prstGeom prst="roundRect">
-            <a:avLst/>
-          </a:prstGeom>
-          <a:solidFill>
-            <a:srgbClr val="095292"/>
-          </a:solidFill>
-          <a:ln>
-            <a:noFill/>
-          </a:ln>
-          <a:effectLst/>
-        </p:spPr>
-        <p:style>
-          <a:lnRef idx="1">
-            <a:schemeClr val="accent1"/>
-          </a:lnRef>
-          <a:fillRef idx="3">
-            <a:schemeClr val="accent1"/>
-          </a:fillRef>
-          <a:effectRef idx="2">
-            <a:schemeClr val="accent1"/>
-          </a:effectRef>
-          <a:fontRef idx="minor">
-            <a:schemeClr val="lt1"/>
-          </a:fontRef>
-        </p:style>
-        <p:txBody>
-          <a:bodyPr rtlCol="0" anchor="ctr"/>
-          <a:lstStyle/>
-          <a:p>
-            <a:pPr algn="ctr"/>
-          </a:p>
-        </p:txBody>
-      </p:sp>
-      <p:sp>
-        <p:nvSpPr>
-          <p:cNvPr id="19" name="Rounded Rectangle 18"/>
-          <p:cNvSpPr/>
-          <p:nvPr/>
-        </p:nvSpPr>
-        <p:spPr>
-          <a:xfrm>
-            <a:off x="2423160" y="2404872"/>
-            <a:ext cx="9128455" cy="662025"/>
-          </a:xfrm>
-          <a:prstGeom prst="roundRect">
-            <a:avLst/>
-          </a:prstGeom>
-          <a:solidFill>
-            <a:srgbClr val="F2F2F2"/>
-          </a:solidFill>
-          <a:ln>
-            <a:noFill/>
-          </a:ln>
-          <a:effectLst/>
-        </p:spPr>
-        <p:style>
-          <a:lnRef idx="1">
-            <a:schemeClr val="accent1"/>
-          </a:lnRef>
-          <a:fillRef idx="3">
-            <a:schemeClr val="accent1"/>
-          </a:fillRef>
-          <a:effectRef idx="2">
-            <a:schemeClr val="accent1"/>
-          </a:effectRef>
-          <a:fontRef idx="minor">
-            <a:schemeClr val="lt1"/>
-          </a:fontRef>
-        </p:style>
-        <p:txBody>
-          <a:bodyPr rtlCol="0" anchor="ctr"/>
-          <a:lstStyle/>
-          <a:p>
-            <a:pPr algn="ctr"/>
-          </a:p>
-        </p:txBody>
-      </p:sp>
-      <p:sp>
-        <p:nvSpPr>
-          <p:cNvPr id="20" name="Rectangle 19"/>
-          <p:cNvSpPr/>
-          <p:nvPr/>
-        </p:nvSpPr>
-        <p:spPr>
-          <a:xfrm>
-            <a:off x="2423160" y="2404872"/>
-            <a:ext cx="91440" cy="662025"/>
-          </a:xfrm>
-          <a:prstGeom prst="rect">
-            <a:avLst/>
-          </a:prstGeom>
-          <a:solidFill>
-            <a:srgbClr val="095292"/>
-          </a:solidFill>
-          <a:ln>
-            <a:noFill/>
-          </a:ln>
-          <a:effectLst/>
-        </p:spPr>
-        <p:style>
-          <a:lnRef idx="1">
-            <a:schemeClr val="accent1"/>
-          </a:lnRef>
-          <a:fillRef idx="3">
-            <a:schemeClr val="accent1"/>
-          </a:fillRef>
-          <a:effectRef idx="2">
-            <a:schemeClr val="accent1"/>
-          </a:effectRef>
-          <a:fontRef idx="minor">
-            <a:schemeClr val="lt1"/>
-          </a:fontRef>
-        </p:style>
-        <p:txBody>
-          <a:bodyPr rtlCol="0" anchor="ctr"/>
-          <a:lstStyle/>
-          <a:p>
-            <a:pPr algn="ctr"/>
+              <a:rPr sz="1300" b="0" i="0">
+                <a:solidFill>
+                  <a:srgbClr val="333333"/>
+                </a:solidFill>
+                <a:latin typeface="Calibri"/>
+              </a:rPr>
+              <a:t>Criterios de exito y cierre</a:t>
+            </a:r>
           </a:p>
         </p:txBody>
       </p:sp>
@@ -5263,8 +6491,8 @@
         </p:nvSpPr>
         <p:spPr>
           <a:xfrm>
-            <a:off x="2679192" y="2478024"/>
-            <a:ext cx="8744407" cy="515721"/>
+            <a:off x="457200" y="5943600"/>
+            <a:ext cx="11277295" cy="365760"/>
           </a:xfrm>
           <a:prstGeom prst="rect">
             <a:avLst/>
@@ -5272,77 +6500,52 @@
           <a:noFill/>
         </p:spPr>
         <p:txBody>
-          <a:bodyPr wrap="square" anchor="ctr" lIns="0" rIns="0" tIns="0" bIns="0">
+          <a:bodyPr wrap="square">
             <a:spAutoFit/>
           </a:bodyPr>
           <a:lstStyle/>
           <a:p>
-            <a:r>
-              <a:rPr sz="1500" b="0" i="0">
-                <a:solidFill>
-                  <a:srgbClr val="2B2B2B"/>
-                </a:solidFill>
-                <a:latin typeface="Calibri"/>
-              </a:rPr>
-              <a:t>Encuadre temático (Sesión 0 ya quedó atrás)</a:t>
-            </a:r>
-          </a:p>
-        </p:txBody>
-      </p:sp>
-      <p:sp>
-        <p:nvSpPr>
-          <p:cNvPr id="22" name="Rounded Rectangle 21"/>
-          <p:cNvSpPr/>
-          <p:nvPr/>
-        </p:nvSpPr>
-        <p:spPr>
-          <a:xfrm>
-            <a:off x="640080" y="3269894"/>
-            <a:ext cx="1417320" cy="438912"/>
-          </a:xfrm>
-          <a:prstGeom prst="roundRect">
-            <a:avLst/>
-          </a:prstGeom>
-          <a:solidFill>
-            <a:srgbClr val="269CCB"/>
-          </a:solidFill>
-          <a:ln>
-            <a:noFill/>
-          </a:ln>
-          <a:effectLst/>
-        </p:spPr>
-        <p:style>
-          <a:lnRef idx="1">
-            <a:schemeClr val="accent1"/>
-          </a:lnRef>
-          <a:fillRef idx="3">
-            <a:schemeClr val="accent1"/>
-          </a:fillRef>
-          <a:effectRef idx="2">
-            <a:schemeClr val="accent1"/>
-          </a:effectRef>
-          <a:fontRef idx="minor">
-            <a:schemeClr val="lt1"/>
-          </a:fontRef>
-        </p:style>
-        <p:txBody>
-          <a:bodyPr rtlCol="0" anchor="ctr"/>
-          <a:lstStyle/>
-          <a:p>
             <a:pPr algn="ctr"/>
-          </a:p>
-        </p:txBody>
-      </p:sp>
-      <p:sp>
-        <p:nvSpPr>
-          <p:cNvPr id="23" name="TextBox 22"/>
+            <a:r>
+              <a:rPr sz="1200" b="0" i="1">
+                <a:solidFill>
+                  <a:srgbClr val="666666"/>
+                </a:solidFill>
+                <a:latin typeface="Calibri"/>
+              </a:rPr>
+              <a:t>Solo el bloque de </a:t>
+            </a:r>
+            <a:r>
+              <a:rPr sz="1200" b="1" i="1">
+                <a:solidFill>
+                  <a:srgbClr val="666666"/>
+                </a:solidFill>
+                <a:latin typeface="Calibri"/>
+              </a:rPr>
+              <a:t>esta</a:t>
+            </a:r>
+            <a:r>
+              <a:rPr sz="1200" b="0" i="1">
+                <a:solidFill>
+                  <a:srgbClr val="666666"/>
+                </a:solidFill>
+                <a:latin typeface="Calibri"/>
+              </a:rPr>
+              <a:t> clase · 120 min</a:t>
+            </a:r>
+          </a:p>
+        </p:txBody>
+      </p:sp>
+      <p:sp>
+        <p:nvSpPr>
+          <p:cNvPr id="22" name="TextBox 21"/>
           <p:cNvSpPr txBox="1"/>
           <p:nvPr/>
         </p:nvSpPr>
         <p:spPr>
           <a:xfrm>
-            <a:off x="640080" y="3269894"/>
-            <a:ext cx="1417320" cy="438912"/>
+            <a:off x="11185855" y="6473952"/>
+            <a:ext cx="640080" cy="274320"/>
           </a:xfrm>
           <a:prstGeom prst="rect">
             <a:avLst/>
@@ -5350,1005 +6553,16 @@
           <a:noFill/>
         </p:spPr>
         <p:txBody>
-          <a:bodyPr wrap="square" anchor="ctr" lIns="0" rIns="0" tIns="0" bIns="0">
+          <a:bodyPr wrap="square">
             <a:spAutoFit/>
           </a:bodyPr>
           <a:lstStyle/>
           <a:p>
-            <a:pPr algn="ctr"/>
-            <a:r>
-              <a:rPr sz="1200" b="1" i="0">
-                <a:solidFill>
-                  <a:srgbClr val="FFFFFF"/>
-                </a:solidFill>
-                <a:latin typeface="Calibri"/>
-              </a:rPr>
-              <a:t>10-35</a:t>
-            </a:r>
-          </a:p>
-        </p:txBody>
-      </p:sp>
-      <p:sp>
-        <p:nvSpPr>
-          <p:cNvPr id="24" name="Rounded Rectangle 23"/>
-          <p:cNvSpPr/>
-          <p:nvPr/>
-        </p:nvSpPr>
-        <p:spPr>
-          <a:xfrm>
-            <a:off x="2167128" y="3407054"/>
-            <a:ext cx="164592" cy="164592"/>
-          </a:xfrm>
-          <a:prstGeom prst="roundRect">
-            <a:avLst/>
-          </a:prstGeom>
-          <a:solidFill>
-            <a:srgbClr val="269CCB"/>
-          </a:solidFill>
-          <a:ln>
-            <a:noFill/>
-          </a:ln>
-          <a:effectLst/>
-        </p:spPr>
-        <p:style>
-          <a:lnRef idx="1">
-            <a:schemeClr val="accent1"/>
-          </a:lnRef>
-          <a:fillRef idx="3">
-            <a:schemeClr val="accent1"/>
-          </a:fillRef>
-          <a:effectRef idx="2">
-            <a:schemeClr val="accent1"/>
-          </a:effectRef>
-          <a:fontRef idx="minor">
-            <a:schemeClr val="lt1"/>
-          </a:fontRef>
-        </p:style>
-        <p:txBody>
-          <a:bodyPr rtlCol="0" anchor="ctr"/>
-          <a:lstStyle/>
-          <a:p>
-            <a:pPr algn="ctr"/>
-          </a:p>
-        </p:txBody>
-      </p:sp>
-      <p:sp>
-        <p:nvSpPr>
-          <p:cNvPr id="25" name="Rounded Rectangle 24"/>
-          <p:cNvSpPr/>
-          <p:nvPr/>
-        </p:nvSpPr>
-        <p:spPr>
-          <a:xfrm>
-            <a:off x="2423160" y="3158337"/>
-            <a:ext cx="9128455" cy="662025"/>
-          </a:xfrm>
-          <a:prstGeom prst="roundRect">
-            <a:avLst/>
-          </a:prstGeom>
-          <a:solidFill>
-            <a:srgbClr val="E8F4FA"/>
-          </a:solidFill>
-          <a:ln>
-            <a:noFill/>
-          </a:ln>
-          <a:effectLst/>
-        </p:spPr>
-        <p:style>
-          <a:lnRef idx="1">
-            <a:schemeClr val="accent1"/>
-          </a:lnRef>
-          <a:fillRef idx="3">
-            <a:schemeClr val="accent1"/>
-          </a:fillRef>
-          <a:effectRef idx="2">
-            <a:schemeClr val="accent1"/>
-          </a:effectRef>
-          <a:fontRef idx="minor">
-            <a:schemeClr val="lt1"/>
-          </a:fontRef>
-        </p:style>
-        <p:txBody>
-          <a:bodyPr rtlCol="0" anchor="ctr"/>
-          <a:lstStyle/>
-          <a:p>
-            <a:pPr algn="ctr"/>
-          </a:p>
-        </p:txBody>
-      </p:sp>
-      <p:sp>
-        <p:nvSpPr>
-          <p:cNvPr id="26" name="Rectangle 25"/>
-          <p:cNvSpPr/>
-          <p:nvPr/>
-        </p:nvSpPr>
-        <p:spPr>
-          <a:xfrm>
-            <a:off x="2423160" y="3158337"/>
-            <a:ext cx="91440" cy="662025"/>
-          </a:xfrm>
-          <a:prstGeom prst="rect">
-            <a:avLst/>
-          </a:prstGeom>
-          <a:solidFill>
-            <a:srgbClr val="269CCB"/>
-          </a:solidFill>
-          <a:ln>
-            <a:noFill/>
-          </a:ln>
-          <a:effectLst/>
-        </p:spPr>
-        <p:style>
-          <a:lnRef idx="1">
-            <a:schemeClr val="accent1"/>
-          </a:lnRef>
-          <a:fillRef idx="3">
-            <a:schemeClr val="accent1"/>
-          </a:fillRef>
-          <a:effectRef idx="2">
-            <a:schemeClr val="accent1"/>
-          </a:effectRef>
-          <a:fontRef idx="minor">
-            <a:schemeClr val="lt1"/>
-          </a:fontRef>
-        </p:style>
-        <p:txBody>
-          <a:bodyPr rtlCol="0" anchor="ctr"/>
-          <a:lstStyle/>
-          <a:p>
-            <a:pPr algn="ctr"/>
-          </a:p>
-        </p:txBody>
-      </p:sp>
-      <p:sp>
-        <p:nvSpPr>
-          <p:cNvPr id="27" name="TextBox 26"/>
-          <p:cNvSpPr txBox="1"/>
-          <p:nvPr/>
-        </p:nvSpPr>
-        <p:spPr>
-          <a:xfrm>
-            <a:off x="2679192" y="3231489"/>
-            <a:ext cx="8744407" cy="515721"/>
-          </a:xfrm>
-          <a:prstGeom prst="rect">
-            <a:avLst/>
-          </a:prstGeom>
-          <a:noFill/>
-        </p:spPr>
-        <p:txBody>
-          <a:bodyPr wrap="square" anchor="ctr" lIns="0" rIns="0" tIns="0" bIns="0">
-            <a:spAutoFit/>
-          </a:bodyPr>
-          <a:lstStyle/>
-          <a:p>
-            <a:r>
-              <a:rPr sz="1500" b="0" i="0">
-                <a:solidFill>
-                  <a:srgbClr val="2B2B2B"/>
-                </a:solidFill>
-                <a:latin typeface="Calibri"/>
-              </a:rPr>
-              <a:t>Diagnóstico de previos</a:t>
-            </a:r>
-          </a:p>
-        </p:txBody>
-      </p:sp>
-      <p:sp>
-        <p:nvSpPr>
-          <p:cNvPr id="28" name="Rounded Rectangle 27"/>
-          <p:cNvSpPr/>
-          <p:nvPr/>
-        </p:nvSpPr>
-        <p:spPr>
-          <a:xfrm>
-            <a:off x="640080" y="4023360"/>
-            <a:ext cx="1417320" cy="438912"/>
-          </a:xfrm>
-          <a:prstGeom prst="roundRect">
-            <a:avLst/>
-          </a:prstGeom>
-          <a:solidFill>
-            <a:srgbClr val="095292"/>
-          </a:solidFill>
-          <a:ln>
-            <a:noFill/>
-          </a:ln>
-          <a:effectLst/>
-        </p:spPr>
-        <p:style>
-          <a:lnRef idx="1">
-            <a:schemeClr val="accent1"/>
-          </a:lnRef>
-          <a:fillRef idx="3">
-            <a:schemeClr val="accent1"/>
-          </a:fillRef>
-          <a:effectRef idx="2">
-            <a:schemeClr val="accent1"/>
-          </a:effectRef>
-          <a:fontRef idx="minor">
-            <a:schemeClr val="lt1"/>
-          </a:fontRef>
-        </p:style>
-        <p:txBody>
-          <a:bodyPr rtlCol="0" anchor="ctr"/>
-          <a:lstStyle/>
-          <a:p>
-            <a:pPr algn="ctr"/>
-          </a:p>
-        </p:txBody>
-      </p:sp>
-      <p:sp>
-        <p:nvSpPr>
-          <p:cNvPr id="29" name="TextBox 28"/>
-          <p:cNvSpPr txBox="1"/>
-          <p:nvPr/>
-        </p:nvSpPr>
-        <p:spPr>
-          <a:xfrm>
-            <a:off x="640080" y="4023360"/>
-            <a:ext cx="1417320" cy="438912"/>
-          </a:xfrm>
-          <a:prstGeom prst="rect">
-            <a:avLst/>
-          </a:prstGeom>
-          <a:noFill/>
-        </p:spPr>
-        <p:txBody>
-          <a:bodyPr wrap="square" anchor="ctr" lIns="0" rIns="0" tIns="0" bIns="0">
-            <a:spAutoFit/>
-          </a:bodyPr>
-          <a:lstStyle/>
-          <a:p>
-            <a:pPr algn="ctr"/>
-            <a:r>
-              <a:rPr sz="1200" b="1" i="0">
-                <a:solidFill>
-                  <a:srgbClr val="FFFFFF"/>
-                </a:solidFill>
-                <a:latin typeface="Calibri"/>
-              </a:rPr>
-              <a:t>35-70</a:t>
-            </a:r>
-          </a:p>
-        </p:txBody>
-      </p:sp>
-      <p:sp>
-        <p:nvSpPr>
-          <p:cNvPr id="30" name="Rounded Rectangle 29"/>
-          <p:cNvSpPr/>
-          <p:nvPr/>
-        </p:nvSpPr>
-        <p:spPr>
-          <a:xfrm>
-            <a:off x="2167128" y="4160520"/>
-            <a:ext cx="164592" cy="164592"/>
-          </a:xfrm>
-          <a:prstGeom prst="roundRect">
-            <a:avLst/>
-          </a:prstGeom>
-          <a:solidFill>
-            <a:srgbClr val="095292"/>
-          </a:solidFill>
-          <a:ln>
-            <a:noFill/>
-          </a:ln>
-          <a:effectLst/>
-        </p:spPr>
-        <p:style>
-          <a:lnRef idx="1">
-            <a:schemeClr val="accent1"/>
-          </a:lnRef>
-          <a:fillRef idx="3">
-            <a:schemeClr val="accent1"/>
-          </a:fillRef>
-          <a:effectRef idx="2">
-            <a:schemeClr val="accent1"/>
-          </a:effectRef>
-          <a:fontRef idx="minor">
-            <a:schemeClr val="lt1"/>
-          </a:fontRef>
-        </p:style>
-        <p:txBody>
-          <a:bodyPr rtlCol="0" anchor="ctr"/>
-          <a:lstStyle/>
-          <a:p>
-            <a:pPr algn="ctr"/>
-          </a:p>
-        </p:txBody>
-      </p:sp>
-      <p:sp>
-        <p:nvSpPr>
-          <p:cNvPr id="31" name="Rounded Rectangle 30"/>
-          <p:cNvSpPr/>
-          <p:nvPr/>
-        </p:nvSpPr>
-        <p:spPr>
-          <a:xfrm>
-            <a:off x="2423160" y="3911803"/>
-            <a:ext cx="9128455" cy="662025"/>
-          </a:xfrm>
-          <a:prstGeom prst="roundRect">
-            <a:avLst/>
-          </a:prstGeom>
-          <a:solidFill>
-            <a:srgbClr val="F2F2F2"/>
-          </a:solidFill>
-          <a:ln>
-            <a:noFill/>
-          </a:ln>
-          <a:effectLst/>
-        </p:spPr>
-        <p:style>
-          <a:lnRef idx="1">
-            <a:schemeClr val="accent1"/>
-          </a:lnRef>
-          <a:fillRef idx="3">
-            <a:schemeClr val="accent1"/>
-          </a:fillRef>
-          <a:effectRef idx="2">
-            <a:schemeClr val="accent1"/>
-          </a:effectRef>
-          <a:fontRef idx="minor">
-            <a:schemeClr val="lt1"/>
-          </a:fontRef>
-        </p:style>
-        <p:txBody>
-          <a:bodyPr rtlCol="0" anchor="ctr"/>
-          <a:lstStyle/>
-          <a:p>
-            <a:pPr algn="ctr"/>
-          </a:p>
-        </p:txBody>
-      </p:sp>
-      <p:sp>
-        <p:nvSpPr>
-          <p:cNvPr id="32" name="Rectangle 31"/>
-          <p:cNvSpPr/>
-          <p:nvPr/>
-        </p:nvSpPr>
-        <p:spPr>
-          <a:xfrm>
-            <a:off x="2423160" y="3911803"/>
-            <a:ext cx="91440" cy="662025"/>
-          </a:xfrm>
-          <a:prstGeom prst="rect">
-            <a:avLst/>
-          </a:prstGeom>
-          <a:solidFill>
-            <a:srgbClr val="095292"/>
-          </a:solidFill>
-          <a:ln>
-            <a:noFill/>
-          </a:ln>
-          <a:effectLst/>
-        </p:spPr>
-        <p:style>
-          <a:lnRef idx="1">
-            <a:schemeClr val="accent1"/>
-          </a:lnRef>
-          <a:fillRef idx="3">
-            <a:schemeClr val="accent1"/>
-          </a:fillRef>
-          <a:effectRef idx="2">
-            <a:schemeClr val="accent1"/>
-          </a:effectRef>
-          <a:fontRef idx="minor">
-            <a:schemeClr val="lt1"/>
-          </a:fontRef>
-        </p:style>
-        <p:txBody>
-          <a:bodyPr rtlCol="0" anchor="ctr"/>
-          <a:lstStyle/>
-          <a:p>
-            <a:pPr algn="ctr"/>
-          </a:p>
-        </p:txBody>
-      </p:sp>
-      <p:sp>
-        <p:nvSpPr>
-          <p:cNvPr id="33" name="TextBox 32"/>
-          <p:cNvSpPr txBox="1"/>
-          <p:nvPr/>
-        </p:nvSpPr>
-        <p:spPr>
-          <a:xfrm>
-            <a:off x="2679192" y="3984955"/>
-            <a:ext cx="8744407" cy="515721"/>
-          </a:xfrm>
-          <a:prstGeom prst="rect">
-            <a:avLst/>
-          </a:prstGeom>
-          <a:noFill/>
-        </p:spPr>
-        <p:txBody>
-          <a:bodyPr wrap="square" anchor="ctr" lIns="0" rIns="0" tIns="0" bIns="0">
-            <a:spAutoFit/>
-          </a:bodyPr>
-          <a:lstStyle/>
-          <a:p>
-            <a:r>
-              <a:rPr sz="1500" b="0" i="0">
-                <a:solidFill>
-                  <a:srgbClr val="2B2B2B"/>
-                </a:solidFill>
-                <a:latin typeface="Calibri"/>
-              </a:rPr>
-              <a:t>Teoría Core: clase vs objeto</a:t>
-            </a:r>
-          </a:p>
-        </p:txBody>
-      </p:sp>
-      <p:sp>
-        <p:nvSpPr>
-          <p:cNvPr id="34" name="Rounded Rectangle 33"/>
-          <p:cNvSpPr/>
-          <p:nvPr/>
-        </p:nvSpPr>
-        <p:spPr>
-          <a:xfrm>
-            <a:off x="640080" y="4776825"/>
-            <a:ext cx="1417320" cy="438912"/>
-          </a:xfrm>
-          <a:prstGeom prst="roundRect">
-            <a:avLst/>
-          </a:prstGeom>
-          <a:solidFill>
-            <a:srgbClr val="269CCB"/>
-          </a:solidFill>
-          <a:ln>
-            <a:noFill/>
-          </a:ln>
-          <a:effectLst/>
-        </p:spPr>
-        <p:style>
-          <a:lnRef idx="1">
-            <a:schemeClr val="accent1"/>
-          </a:lnRef>
-          <a:fillRef idx="3">
-            <a:schemeClr val="accent1"/>
-          </a:fillRef>
-          <a:effectRef idx="2">
-            <a:schemeClr val="accent1"/>
-          </a:effectRef>
-          <a:fontRef idx="minor">
-            <a:schemeClr val="lt1"/>
-          </a:fontRef>
-        </p:style>
-        <p:txBody>
-          <a:bodyPr rtlCol="0" anchor="ctr"/>
-          <a:lstStyle/>
-          <a:p>
-            <a:pPr algn="ctr"/>
-          </a:p>
-        </p:txBody>
-      </p:sp>
-      <p:sp>
-        <p:nvSpPr>
-          <p:cNvPr id="35" name="TextBox 34"/>
-          <p:cNvSpPr txBox="1"/>
-          <p:nvPr/>
-        </p:nvSpPr>
-        <p:spPr>
-          <a:xfrm>
-            <a:off x="640080" y="4776825"/>
-            <a:ext cx="1417320" cy="438912"/>
-          </a:xfrm>
-          <a:prstGeom prst="rect">
-            <a:avLst/>
-          </a:prstGeom>
-          <a:noFill/>
-        </p:spPr>
-        <p:txBody>
-          <a:bodyPr wrap="square" anchor="ctr" lIns="0" rIns="0" tIns="0" bIns="0">
-            <a:spAutoFit/>
-          </a:bodyPr>
-          <a:lstStyle/>
-          <a:p>
-            <a:pPr algn="ctr"/>
-            <a:r>
-              <a:rPr sz="1200" b="1" i="0">
-                <a:solidFill>
-                  <a:srgbClr val="FFFFFF"/>
-                </a:solidFill>
-                <a:latin typeface="Calibri"/>
-              </a:rPr>
-              <a:t>70-100</a:t>
-            </a:r>
-          </a:p>
-        </p:txBody>
-      </p:sp>
-      <p:sp>
-        <p:nvSpPr>
-          <p:cNvPr id="36" name="Rounded Rectangle 35"/>
-          <p:cNvSpPr/>
-          <p:nvPr/>
-        </p:nvSpPr>
-        <p:spPr>
-          <a:xfrm>
-            <a:off x="2167128" y="4913985"/>
-            <a:ext cx="164592" cy="164592"/>
-          </a:xfrm>
-          <a:prstGeom prst="roundRect">
-            <a:avLst/>
-          </a:prstGeom>
-          <a:solidFill>
-            <a:srgbClr val="269CCB"/>
-          </a:solidFill>
-          <a:ln>
-            <a:noFill/>
-          </a:ln>
-          <a:effectLst/>
-        </p:spPr>
-        <p:style>
-          <a:lnRef idx="1">
-            <a:schemeClr val="accent1"/>
-          </a:lnRef>
-          <a:fillRef idx="3">
-            <a:schemeClr val="accent1"/>
-          </a:fillRef>
-          <a:effectRef idx="2">
-            <a:schemeClr val="accent1"/>
-          </a:effectRef>
-          <a:fontRef idx="minor">
-            <a:schemeClr val="lt1"/>
-          </a:fontRef>
-        </p:style>
-        <p:txBody>
-          <a:bodyPr rtlCol="0" anchor="ctr"/>
-          <a:lstStyle/>
-          <a:p>
-            <a:pPr algn="ctr"/>
-          </a:p>
-        </p:txBody>
-      </p:sp>
-      <p:sp>
-        <p:nvSpPr>
-          <p:cNvPr id="37" name="Rounded Rectangle 36"/>
-          <p:cNvSpPr/>
-          <p:nvPr/>
-        </p:nvSpPr>
-        <p:spPr>
-          <a:xfrm>
-            <a:off x="2423160" y="4665268"/>
-            <a:ext cx="9128455" cy="662025"/>
-          </a:xfrm>
-          <a:prstGeom prst="roundRect">
-            <a:avLst/>
-          </a:prstGeom>
-          <a:solidFill>
-            <a:srgbClr val="E8F4FA"/>
-          </a:solidFill>
-          <a:ln>
-            <a:noFill/>
-          </a:ln>
-          <a:effectLst/>
-        </p:spPr>
-        <p:style>
-          <a:lnRef idx="1">
-            <a:schemeClr val="accent1"/>
-          </a:lnRef>
-          <a:fillRef idx="3">
-            <a:schemeClr val="accent1"/>
-          </a:fillRef>
-          <a:effectRef idx="2">
-            <a:schemeClr val="accent1"/>
-          </a:effectRef>
-          <a:fontRef idx="minor">
-            <a:schemeClr val="lt1"/>
-          </a:fontRef>
-        </p:style>
-        <p:txBody>
-          <a:bodyPr rtlCol="0" anchor="ctr"/>
-          <a:lstStyle/>
-          <a:p>
-            <a:pPr algn="ctr"/>
-          </a:p>
-        </p:txBody>
-      </p:sp>
-      <p:sp>
-        <p:nvSpPr>
-          <p:cNvPr id="38" name="Rectangle 37"/>
-          <p:cNvSpPr/>
-          <p:nvPr/>
-        </p:nvSpPr>
-        <p:spPr>
-          <a:xfrm>
-            <a:off x="2423160" y="4665268"/>
-            <a:ext cx="91440" cy="662025"/>
-          </a:xfrm>
-          <a:prstGeom prst="rect">
-            <a:avLst/>
-          </a:prstGeom>
-          <a:solidFill>
-            <a:srgbClr val="269CCB"/>
-          </a:solidFill>
-          <a:ln>
-            <a:noFill/>
-          </a:ln>
-          <a:effectLst/>
-        </p:spPr>
-        <p:style>
-          <a:lnRef idx="1">
-            <a:schemeClr val="accent1"/>
-          </a:lnRef>
-          <a:fillRef idx="3">
-            <a:schemeClr val="accent1"/>
-          </a:fillRef>
-          <a:effectRef idx="2">
-            <a:schemeClr val="accent1"/>
-          </a:effectRef>
-          <a:fontRef idx="minor">
-            <a:schemeClr val="lt1"/>
-          </a:fontRef>
-        </p:style>
-        <p:txBody>
-          <a:bodyPr rtlCol="0" anchor="ctr"/>
-          <a:lstStyle/>
-          <a:p>
-            <a:pPr algn="ctr"/>
-          </a:p>
-        </p:txBody>
-      </p:sp>
-      <p:sp>
-        <p:nvSpPr>
-          <p:cNvPr id="39" name="TextBox 38"/>
-          <p:cNvSpPr txBox="1"/>
-          <p:nvPr/>
-        </p:nvSpPr>
-        <p:spPr>
-          <a:xfrm>
-            <a:off x="2679192" y="4738420"/>
-            <a:ext cx="8744407" cy="515721"/>
-          </a:xfrm>
-          <a:prstGeom prst="rect">
-            <a:avLst/>
-          </a:prstGeom>
-          <a:noFill/>
-        </p:spPr>
-        <p:txBody>
-          <a:bodyPr wrap="square" anchor="ctr" lIns="0" rIns="0" tIns="0" bIns="0">
-            <a:spAutoFit/>
-          </a:bodyPr>
-          <a:lstStyle/>
-          <a:p>
-            <a:r>
-              <a:rPr sz="1500" b="0" i="0">
-                <a:solidFill>
-                  <a:srgbClr val="2B2B2B"/>
-                </a:solidFill>
-                <a:latin typeface="Calibri"/>
-              </a:rPr>
-              <a:t>Laboratorio: JDK + IDE + HolaPOO</a:t>
-            </a:r>
-          </a:p>
-        </p:txBody>
-      </p:sp>
-      <p:sp>
-        <p:nvSpPr>
-          <p:cNvPr id="40" name="Rounded Rectangle 39"/>
-          <p:cNvSpPr/>
-          <p:nvPr/>
-        </p:nvSpPr>
-        <p:spPr>
-          <a:xfrm>
-            <a:off x="640080" y="5530291"/>
-            <a:ext cx="1417320" cy="438912"/>
-          </a:xfrm>
-          <a:prstGeom prst="roundRect">
-            <a:avLst/>
-          </a:prstGeom>
-          <a:solidFill>
-            <a:srgbClr val="095292"/>
-          </a:solidFill>
-          <a:ln>
-            <a:noFill/>
-          </a:ln>
-          <a:effectLst/>
-        </p:spPr>
-        <p:style>
-          <a:lnRef idx="1">
-            <a:schemeClr val="accent1"/>
-          </a:lnRef>
-          <a:fillRef idx="3">
-            <a:schemeClr val="accent1"/>
-          </a:fillRef>
-          <a:effectRef idx="2">
-            <a:schemeClr val="accent1"/>
-          </a:effectRef>
-          <a:fontRef idx="minor">
-            <a:schemeClr val="lt1"/>
-          </a:fontRef>
-        </p:style>
-        <p:txBody>
-          <a:bodyPr rtlCol="0" anchor="ctr"/>
-          <a:lstStyle/>
-          <a:p>
-            <a:pPr algn="ctr"/>
-          </a:p>
-        </p:txBody>
-      </p:sp>
-      <p:sp>
-        <p:nvSpPr>
-          <p:cNvPr id="41" name="TextBox 40"/>
-          <p:cNvSpPr txBox="1"/>
-          <p:nvPr/>
-        </p:nvSpPr>
-        <p:spPr>
-          <a:xfrm>
-            <a:off x="640080" y="5530291"/>
-            <a:ext cx="1417320" cy="438912"/>
-          </a:xfrm>
-          <a:prstGeom prst="rect">
-            <a:avLst/>
-          </a:prstGeom>
-          <a:noFill/>
-        </p:spPr>
-        <p:txBody>
-          <a:bodyPr wrap="square" anchor="ctr" lIns="0" rIns="0" tIns="0" bIns="0">
-            <a:spAutoFit/>
-          </a:bodyPr>
-          <a:lstStyle/>
-          <a:p>
-            <a:pPr algn="ctr"/>
-            <a:r>
-              <a:rPr sz="1200" b="1" i="0">
-                <a:solidFill>
-                  <a:srgbClr val="FFFFFF"/>
-                </a:solidFill>
-                <a:latin typeface="Calibri"/>
-              </a:rPr>
-              <a:t>100-120</a:t>
-            </a:r>
-          </a:p>
-        </p:txBody>
-      </p:sp>
-      <p:sp>
-        <p:nvSpPr>
-          <p:cNvPr id="42" name="Rounded Rectangle 41"/>
-          <p:cNvSpPr/>
-          <p:nvPr/>
-        </p:nvSpPr>
-        <p:spPr>
-          <a:xfrm>
-            <a:off x="2167128" y="5667451"/>
-            <a:ext cx="164592" cy="164592"/>
-          </a:xfrm>
-          <a:prstGeom prst="roundRect">
-            <a:avLst/>
-          </a:prstGeom>
-          <a:solidFill>
-            <a:srgbClr val="FFD000"/>
-          </a:solidFill>
-          <a:ln>
-            <a:noFill/>
-          </a:ln>
-          <a:effectLst/>
-        </p:spPr>
-        <p:style>
-          <a:lnRef idx="1">
-            <a:schemeClr val="accent1"/>
-          </a:lnRef>
-          <a:fillRef idx="3">
-            <a:schemeClr val="accent1"/>
-          </a:fillRef>
-          <a:effectRef idx="2">
-            <a:schemeClr val="accent1"/>
-          </a:effectRef>
-          <a:fontRef idx="minor">
-            <a:schemeClr val="lt1"/>
-          </a:fontRef>
-        </p:style>
-        <p:txBody>
-          <a:bodyPr rtlCol="0" anchor="ctr"/>
-          <a:lstStyle/>
-          <a:p>
-            <a:pPr algn="ctr"/>
-          </a:p>
-        </p:txBody>
-      </p:sp>
-      <p:sp>
-        <p:nvSpPr>
-          <p:cNvPr id="43" name="Rounded Rectangle 42"/>
-          <p:cNvSpPr/>
-          <p:nvPr/>
-        </p:nvSpPr>
-        <p:spPr>
-          <a:xfrm>
-            <a:off x="2423160" y="5418734"/>
-            <a:ext cx="9128455" cy="662025"/>
-          </a:xfrm>
-          <a:prstGeom prst="roundRect">
-            <a:avLst/>
-          </a:prstGeom>
-          <a:solidFill>
-            <a:srgbClr val="F2F2F2"/>
-          </a:solidFill>
-          <a:ln>
-            <a:noFill/>
-          </a:ln>
-          <a:effectLst/>
-        </p:spPr>
-        <p:style>
-          <a:lnRef idx="1">
-            <a:schemeClr val="accent1"/>
-          </a:lnRef>
-          <a:fillRef idx="3">
-            <a:schemeClr val="accent1"/>
-          </a:fillRef>
-          <a:effectRef idx="2">
-            <a:schemeClr val="accent1"/>
-          </a:effectRef>
-          <a:fontRef idx="minor">
-            <a:schemeClr val="lt1"/>
-          </a:fontRef>
-        </p:style>
-        <p:txBody>
-          <a:bodyPr rtlCol="0" anchor="ctr"/>
-          <a:lstStyle/>
-          <a:p>
-            <a:pPr algn="ctr"/>
-          </a:p>
-        </p:txBody>
-      </p:sp>
-      <p:sp>
-        <p:nvSpPr>
-          <p:cNvPr id="44" name="Rectangle 43"/>
-          <p:cNvSpPr/>
-          <p:nvPr/>
-        </p:nvSpPr>
-        <p:spPr>
-          <a:xfrm>
-            <a:off x="2423160" y="5418734"/>
-            <a:ext cx="91440" cy="662025"/>
-          </a:xfrm>
-          <a:prstGeom prst="rect">
-            <a:avLst/>
-          </a:prstGeom>
-          <a:solidFill>
-            <a:srgbClr val="FFD000"/>
-          </a:solidFill>
-          <a:ln>
-            <a:noFill/>
-          </a:ln>
-          <a:effectLst/>
-        </p:spPr>
-        <p:style>
-          <a:lnRef idx="1">
-            <a:schemeClr val="accent1"/>
-          </a:lnRef>
-          <a:fillRef idx="3">
-            <a:schemeClr val="accent1"/>
-          </a:fillRef>
-          <a:effectRef idx="2">
-            <a:schemeClr val="accent1"/>
-          </a:effectRef>
-          <a:fontRef idx="minor">
-            <a:schemeClr val="lt1"/>
-          </a:fontRef>
-        </p:style>
-        <p:txBody>
-          <a:bodyPr rtlCol="0" anchor="ctr"/>
-          <a:lstStyle/>
-          <a:p>
-            <a:pPr algn="ctr"/>
-          </a:p>
-        </p:txBody>
-      </p:sp>
-      <p:sp>
-        <p:nvSpPr>
-          <p:cNvPr id="45" name="TextBox 44"/>
-          <p:cNvSpPr txBox="1"/>
-          <p:nvPr/>
-        </p:nvSpPr>
-        <p:spPr>
-          <a:xfrm>
-            <a:off x="2679192" y="5491886"/>
-            <a:ext cx="8744407" cy="515721"/>
-          </a:xfrm>
-          <a:prstGeom prst="rect">
-            <a:avLst/>
-          </a:prstGeom>
-          <a:noFill/>
-        </p:spPr>
-        <p:txBody>
-          <a:bodyPr wrap="square" anchor="ctr" lIns="0" rIns="0" tIns="0" bIns="0">
-            <a:spAutoFit/>
-          </a:bodyPr>
-          <a:lstStyle/>
-          <a:p>
-            <a:r>
-              <a:rPr sz="1500" b="0" i="0">
-                <a:solidFill>
-                  <a:srgbClr val="2B2B2B"/>
-                </a:solidFill>
-                <a:latin typeface="Calibri"/>
-              </a:rPr>
-              <a:t>PI: primer avance · cierre</a:t>
-            </a:r>
-          </a:p>
-        </p:txBody>
-      </p:sp>
-      <p:sp>
-        <p:nvSpPr>
-          <p:cNvPr id="46" name="TextBox 45"/>
-          <p:cNvSpPr txBox="1"/>
-          <p:nvPr/>
-        </p:nvSpPr>
-        <p:spPr>
-          <a:xfrm>
-            <a:off x="640080" y="6199632"/>
-            <a:ext cx="10911535" cy="320040"/>
-          </a:xfrm>
-          <a:prstGeom prst="rect">
-            <a:avLst/>
-          </a:prstGeom>
-          <a:noFill/>
-        </p:spPr>
-        <p:txBody>
-          <a:bodyPr wrap="square" anchor="t" lIns="0" rIns="0" tIns="0" bIns="0">
-            <a:spAutoFit/>
-          </a:bodyPr>
-          <a:lstStyle/>
-          <a:p>
-            <a:pPr algn="ctr"/>
-            <a:r>
-              <a:rPr sz="1200" b="0" i="1">
-                <a:solidFill>
-                  <a:srgbClr val="8F989D"/>
-                </a:solidFill>
-                <a:latin typeface="Calibri"/>
-              </a:rPr>
-              <a:t>Solo el bloque de </a:t>
-            </a:r>
-            <a:r>
-              <a:rPr sz="1200" b="1" i="1">
-                <a:solidFill>
-                  <a:srgbClr val="8F989D"/>
-                </a:solidFill>
-                <a:latin typeface="Calibri"/>
-              </a:rPr>
-              <a:t>esta</a:t>
-            </a:r>
-            <a:r>
-              <a:rPr sz="1200" b="0" i="1">
-                <a:solidFill>
-                  <a:srgbClr val="8F989D"/>
-                </a:solidFill>
-                <a:latin typeface="Calibri"/>
-              </a:rPr>
-              <a:t> clase · no es el mapa del semestre</a:t>
-            </a:r>
-          </a:p>
-        </p:txBody>
-      </p:sp>
-      <p:sp>
-        <p:nvSpPr>
-          <p:cNvPr id="47" name="TextBox 46"/>
-          <p:cNvSpPr txBox="1"/>
-          <p:nvPr/>
-        </p:nvSpPr>
-        <p:spPr>
-          <a:xfrm>
-            <a:off x="11094415" y="6446520"/>
-            <a:ext cx="548640" cy="274320"/>
-          </a:xfrm>
-          <a:prstGeom prst="rect">
-            <a:avLst/>
-          </a:prstGeom>
-          <a:noFill/>
-        </p:spPr>
-        <p:txBody>
-          <a:bodyPr wrap="square" anchor="t" lIns="0" rIns="0" tIns="0" bIns="0">
-            <a:spAutoFit/>
-          </a:bodyPr>
-          <a:lstStyle/>
-          <a:p>
             <a:pPr algn="r"/>
             <a:r>
-              <a:rPr sz="1000" b="1" i="0">
-                <a:solidFill>
-                  <a:srgbClr val="8F989D"/>
+              <a:rPr sz="1100" b="0" i="0">
+                <a:solidFill>
+                  <a:srgbClr val="666666"/>
                 </a:solidFill>
                 <a:latin typeface="Calibri"/>
               </a:rPr>
@@ -6392,7 +6606,7 @@
         <p:spPr>
           <a:xfrm>
             <a:off x="0" y="0"/>
-            <a:ext cx="12191695" cy="1188720"/>
+            <a:ext cx="12191695" cy="960120"/>
           </a:xfrm>
           <a:prstGeom prst="rect">
             <a:avLst/>
@@ -6403,7 +6617,6 @@
           <a:ln>
             <a:noFill/>
           </a:ln>
-          <a:effectLst/>
         </p:spPr>
         <p:style>
           <a:lnRef idx="1">
@@ -6435,19 +6648,18 @@
         </p:nvSpPr>
         <p:spPr>
           <a:xfrm>
-            <a:off x="0" y="1188720"/>
-            <a:ext cx="12191695" cy="54864"/>
+            <a:off x="0" y="960120"/>
+            <a:ext cx="12191695" cy="41148"/>
           </a:xfrm>
           <a:prstGeom prst="rect">
             <a:avLst/>
           </a:prstGeom>
           <a:solidFill>
-            <a:srgbClr val="269CCB"/>
+            <a:srgbClr val="FFD000"/>
           </a:solidFill>
           <a:ln>
             <a:noFill/>
           </a:ln>
-          <a:effectLst/>
         </p:spPr>
         <p:style>
           <a:lnRef idx="1">
@@ -6479,8 +6691,8 @@
         </p:nvSpPr>
         <p:spPr>
           <a:xfrm>
-            <a:off x="640080" y="0"/>
-            <a:ext cx="9082735" cy="1188720"/>
+            <a:off x="457200" y="164592"/>
+            <a:ext cx="11277295" cy="502920"/>
           </a:xfrm>
           <a:prstGeom prst="rect">
             <a:avLst/>
@@ -6488,12 +6700,11 @@
           <a:noFill/>
         </p:spPr>
         <p:txBody>
-          <a:bodyPr wrap="square" anchor="ctr" lIns="0" rIns="0" tIns="0" bIns="0">
+          <a:bodyPr wrap="square">
             <a:spAutoFit/>
           </a:bodyPr>
           <a:lstStyle/>
           <a:p>
-            <a:pPr algn="ctr"/>
             <a:r>
               <a:rPr sz="2600" b="1" i="0">
                 <a:solidFill>
@@ -6501,7 +6712,7 @@
                 </a:solidFill>
                 <a:latin typeface="Calibri"/>
               </a:rPr>
-              <a:t>Objetivos de la clase</a:t>
+              <a:t>Teoria Core</a:t>
             </a:r>
           </a:p>
         </p:txBody>
@@ -6514,8 +6725,8 @@
         </p:nvSpPr>
         <p:spPr>
           <a:xfrm>
-            <a:off x="640080" y="1737360"/>
-            <a:ext cx="10911535" cy="4572000"/>
+            <a:off x="457200" y="1170432"/>
+            <a:ext cx="11277295" cy="5230368"/>
           </a:xfrm>
           <a:prstGeom prst="rect">
             <a:avLst/>
@@ -6523,144 +6734,104 @@
           <a:noFill/>
         </p:spPr>
         <p:txBody>
-          <a:bodyPr wrap="square" anchor="t" lIns="0" rIns="0" tIns="0" bIns="0">
+          <a:bodyPr wrap="square">
             <a:spAutoFit/>
           </a:bodyPr>
           <a:lstStyle/>
           <a:p>
             <a:pPr>
               <a:spcAft>
-                <a:spcPts val="1000"/>
+                <a:spcPts val="800"/>
               </a:spcAft>
             </a:pPr>
             <a:r>
-              <a:rPr sz="1600" b="0" i="0">
-                <a:solidFill>
-                  <a:srgbClr val="2B2B2B"/>
-                </a:solidFill>
-                <a:latin typeface="Calibri"/>
-              </a:rPr>
-              <a:t>–   Diferenciar con precisión </a:t>
-            </a:r>
-            <a:r>
-              <a:rPr sz="1600" b="1" i="0">
-                <a:solidFill>
-                  <a:srgbClr val="2B2B2B"/>
-                </a:solidFill>
-                <a:latin typeface="Calibri"/>
-              </a:rPr>
-              <a:t>clase</a:t>
-            </a:r>
-            <a:r>
-              <a:rPr sz="1600" b="0" i="0">
-                <a:solidFill>
-                  <a:srgbClr val="2B2B2B"/>
-                </a:solidFill>
-                <a:latin typeface="Calibri"/>
-              </a:rPr>
-              <a:t> (molde) y </a:t>
-            </a:r>
-            <a:r>
-              <a:rPr sz="1600" b="1" i="0">
-                <a:solidFill>
-                  <a:srgbClr val="2B2B2B"/>
-                </a:solidFill>
-                <a:latin typeface="Calibri"/>
-              </a:rPr>
-              <a:t>objeto</a:t>
-            </a:r>
-            <a:r>
-              <a:rPr sz="1600" b="0" i="0">
-                <a:solidFill>
-                  <a:srgbClr val="2B2B2B"/>
-                </a:solidFill>
-                <a:latin typeface="Calibri"/>
-              </a:rPr>
-              <a:t> (instancia en memoria).</a:t>
+              <a:rPr sz="1500" b="0" i="0">
+                <a:solidFill>
+                  <a:srgbClr val="333333"/>
+                </a:solidFill>
+                <a:latin typeface="Calibri"/>
+              </a:rPr>
+              <a:t>–   Antes de la POO un programa era una lista de procedimientos que operaban sobre datos sueltos</a:t>
             </a:r>
           </a:p>
           <a:p>
             <a:pPr>
               <a:spcAft>
-                <a:spcPts val="1000"/>
+                <a:spcPts val="800"/>
               </a:spcAft>
             </a:pPr>
             <a:r>
-              <a:rPr sz="1600" b="0" i="0">
-                <a:solidFill>
-                  <a:srgbClr val="2B2B2B"/>
-                </a:solidFill>
-                <a:latin typeface="Calibri"/>
-              </a:rPr>
-              <a:t>–   Identificar atributos (estado) y métodos (comportamiento) en un dominio simple.</a:t>
+              <a:rPr sz="1500" b="0" i="0">
+                <a:solidFill>
+                  <a:srgbClr val="333333"/>
+                </a:solidFill>
+                <a:latin typeface="Calibri"/>
+              </a:rPr>
+              <a:t>–   La distincion que mas cuesta el primer dia es clase contra objeto</a:t>
             </a:r>
           </a:p>
           <a:p>
             <a:pPr>
               <a:spcAft>
-                <a:spcPts val="1000"/>
+                <a:spcPts val="800"/>
               </a:spcAft>
             </a:pPr>
             <a:r>
-              <a:rPr sz="1600" b="0" i="0">
-                <a:solidFill>
-                  <a:srgbClr val="2B2B2B"/>
-                </a:solidFill>
-                <a:latin typeface="Calibri"/>
-              </a:rPr>
-              <a:t>–   Dejar el </a:t>
-            </a:r>
-            <a:r>
-              <a:rPr sz="1600" b="1" i="0">
-                <a:solidFill>
-                  <a:srgbClr val="2B2B2B"/>
-                </a:solidFill>
-                <a:latin typeface="Calibri"/>
-              </a:rPr>
-              <a:t>entorno de desarrollo</a:t>
-            </a:r>
-            <a:r>
-              <a:rPr sz="1600" b="0" i="0">
-                <a:solidFill>
-                  <a:srgbClr val="2B2B2B"/>
-                </a:solidFill>
-                <a:latin typeface="Calibri"/>
-              </a:rPr>
-              <a:t> listo (JDK + IDE + proyecto compilando).</a:t>
+              <a:rPr sz="1500" b="0" i="0">
+                <a:solidFill>
+                  <a:srgbClr val="333333"/>
+                </a:solidFill>
+                <a:latin typeface="Calibri"/>
+              </a:rPr>
+              <a:t>–   Los cuatro pilares se entienden por el problema que resuelve cada uno</a:t>
             </a:r>
           </a:p>
           <a:p>
             <a:pPr>
               <a:spcAft>
-                <a:spcPts val="1000"/>
+                <a:spcPts val="800"/>
               </a:spcAft>
             </a:pPr>
             <a:r>
-              <a:rPr sz="1600" b="0" i="0">
-                <a:solidFill>
-                  <a:srgbClr val="2B2B2B"/>
-                </a:solidFill>
-                <a:latin typeface="Calibri"/>
-              </a:rPr>
-              <a:t>–   Comprender el alcance del </a:t>
-            </a:r>
-            <a:r>
-              <a:rPr sz="1600" b="1" i="0">
-                <a:solidFill>
-                  <a:srgbClr val="2B2B2B"/>
-                </a:solidFill>
-                <a:latin typeface="Calibri"/>
-              </a:rPr>
-              <a:t>Proyecto Integrador</a:t>
-            </a:r>
-            <a:r>
-              <a:rPr sz="1600" b="0" i="0">
-                <a:solidFill>
-                  <a:srgbClr val="2B2B2B"/>
-                </a:solidFill>
-                <a:latin typeface="Calibri"/>
-              </a:rPr>
-              <a:t> y fijar el primer avance.</a:t>
+              <a:rPr sz="1500" b="0" i="0">
+                <a:solidFill>
+                  <a:srgbClr val="333333"/>
+                </a:solidFill>
+                <a:latin typeface="Calibri"/>
+              </a:rPr>
+              <a:t>–   Herencia es que una clase puede extender a otra y reutilizar lo que ya define: Perro extends Mascota hereda nombre…</a:t>
+            </a:r>
+          </a:p>
+          <a:p>
+            <a:pPr>
+              <a:spcAft>
+                <a:spcPts val="800"/>
+              </a:spcAft>
+            </a:pPr>
+            <a:r>
+              <a:rPr sz="1500" b="0" i="0">
+                <a:solidFill>
+                  <a:srgbClr val="333333"/>
+                </a:solidFill>
+                <a:latin typeface="Calibri"/>
+              </a:rPr>
+              <a:t>–   El constructor es el metodo que se ejecuta al crear el objeto y deja sus atributos en un estado valido</a:t>
+            </a:r>
+          </a:p>
+          <a:p>
+            <a:pPr>
+              <a:spcAft>
+                <a:spcPts val="800"/>
+              </a:spcAft>
+            </a:pPr>
+            <a:r>
+              <a:rPr sz="1500" b="0" i="0">
+                <a:solidFill>
+                  <a:srgbClr val="333333"/>
+                </a:solidFill>
+                <a:latin typeface="Calibri"/>
+              </a:rPr>
+              <a:t>–   Error tipico del docente que no domina el tema: presentar los cuatro pilares como cuatro definiciones que hay que…</a:t>
             </a:r>
           </a:p>
         </p:txBody>
@@ -6673,8 +6844,8 @@
         </p:nvSpPr>
         <p:spPr>
           <a:xfrm>
-            <a:off x="11094415" y="6446520"/>
-            <a:ext cx="548640" cy="274320"/>
+            <a:off x="11185855" y="6473952"/>
+            <a:ext cx="640080" cy="274320"/>
           </a:xfrm>
           <a:prstGeom prst="rect">
             <a:avLst/>
@@ -6682,16 +6853,16 @@
           <a:noFill/>
         </p:spPr>
         <p:txBody>
-          <a:bodyPr wrap="square" anchor="t" lIns="0" rIns="0" tIns="0" bIns="0">
+          <a:bodyPr wrap="square">
             <a:spAutoFit/>
           </a:bodyPr>
           <a:lstStyle/>
           <a:p>
             <a:pPr algn="r"/>
             <a:r>
-              <a:rPr sz="1000" b="1" i="0">
-                <a:solidFill>
-                  <a:srgbClr val="8F989D"/>
+              <a:rPr sz="1100" b="0" i="0">
+                <a:solidFill>
+                  <a:srgbClr val="666666"/>
                 </a:solidFill>
                 <a:latin typeface="Calibri"/>
               </a:rPr>
@@ -6735,7 +6906,7 @@
         <p:spPr>
           <a:xfrm>
             <a:off x="0" y="0"/>
-            <a:ext cx="12191695" cy="1188720"/>
+            <a:ext cx="12191695" cy="960120"/>
           </a:xfrm>
           <a:prstGeom prst="rect">
             <a:avLst/>
@@ -6746,7 +6917,6 @@
           <a:ln>
             <a:noFill/>
           </a:ln>
-          <a:effectLst/>
         </p:spPr>
         <p:style>
           <a:lnRef idx="1">
@@ -6778,19 +6948,18 @@
         </p:nvSpPr>
         <p:spPr>
           <a:xfrm>
-            <a:off x="0" y="1188720"/>
-            <a:ext cx="12191695" cy="54864"/>
+            <a:off x="0" y="960120"/>
+            <a:ext cx="12191695" cy="41148"/>
           </a:xfrm>
           <a:prstGeom prst="rect">
             <a:avLst/>
           </a:prstGeom>
           <a:solidFill>
-            <a:srgbClr val="269CCB"/>
+            <a:srgbClr val="FFD000"/>
           </a:solidFill>
           <a:ln>
             <a:noFill/>
           </a:ln>
-          <a:effectLst/>
         </p:spPr>
         <p:style>
           <a:lnRef idx="1">
@@ -6822,8 +6991,8 @@
         </p:nvSpPr>
         <p:spPr>
           <a:xfrm>
-            <a:off x="640080" y="0"/>
-            <a:ext cx="9082735" cy="1188720"/>
+            <a:off x="457200" y="164592"/>
+            <a:ext cx="11277295" cy="502920"/>
           </a:xfrm>
           <a:prstGeom prst="rect">
             <a:avLst/>
@@ -6831,34 +7000,121 @@
           <a:noFill/>
         </p:spPr>
         <p:txBody>
-          <a:bodyPr wrap="square" anchor="ctr" lIns="0" rIns="0" tIns="0" bIns="0">
+          <a:bodyPr wrap="square">
             <a:spAutoFit/>
           </a:bodyPr>
           <a:lstStyle/>
           <a:p>
+            <a:r>
+              <a:rPr sz="2600" b="1" i="0">
+                <a:solidFill>
+                  <a:srgbClr val="FFFFFF"/>
+                </a:solidFill>
+                <a:latin typeface="Calibri"/>
+              </a:rPr>
+              <a:t>La primera clase de VetCare</a:t>
+            </a:r>
+          </a:p>
+        </p:txBody>
+      </p:sp>
+      <p:sp>
+        <p:nvSpPr>
+          <p:cNvPr id="5" name="Rounded Rectangle 4"/>
+          <p:cNvSpPr/>
+          <p:nvPr/>
+        </p:nvSpPr>
+        <p:spPr>
+          <a:xfrm>
+            <a:off x="457200" y="1261872"/>
+            <a:ext cx="11277295" cy="4773168"/>
+          </a:xfrm>
+          <a:prstGeom prst="roundRect">
+            <a:avLst>
+              <a:gd name="adj" fmla="val 12000"/>
+            </a:avLst>
+          </a:prstGeom>
+          <a:solidFill>
+            <a:srgbClr val="1E2A38"/>
+          </a:solidFill>
+          <a:ln>
+            <a:noFill/>
+          </a:ln>
+        </p:spPr>
+        <p:style>
+          <a:lnRef idx="1">
+            <a:schemeClr val="accent1"/>
+          </a:lnRef>
+          <a:fillRef idx="3">
+            <a:schemeClr val="accent1"/>
+          </a:fillRef>
+          <a:effectRef idx="2">
+            <a:schemeClr val="accent1"/>
+          </a:effectRef>
+          <a:fontRef idx="minor">
+            <a:schemeClr val="lt1"/>
+          </a:fontRef>
+        </p:style>
+        <p:txBody>
+          <a:bodyPr rtlCol="0" anchor="ctr"/>
+          <a:lstStyle/>
+          <a:p>
             <a:pPr algn="ctr"/>
-            <a:r>
-              <a:rPr sz="2600" b="1" i="0">
-                <a:solidFill>
-                  <a:srgbClr val="FFFFFF"/>
-                </a:solidFill>
-                <a:latin typeface="Calibri"/>
-              </a:rPr>
-              <a:t>Clase vs Objeto (analogía)</a:t>
-            </a:r>
-          </a:p>
-        </p:txBody>
-      </p:sp>
-      <p:sp>
-        <p:nvSpPr>
-          <p:cNvPr id="5" name="TextBox 4"/>
+          </a:p>
+        </p:txBody>
+      </p:sp>
+      <p:sp>
+        <p:nvSpPr>
+          <p:cNvPr id="6" name="Rectangle 5"/>
+          <p:cNvSpPr/>
+          <p:nvPr/>
+        </p:nvSpPr>
+        <p:spPr>
+          <a:xfrm>
+            <a:off x="457200" y="1261872"/>
+            <a:ext cx="11277295" cy="320040"/>
+          </a:xfrm>
+          <a:prstGeom prst="rect">
+            <a:avLst/>
+          </a:prstGeom>
+          <a:solidFill>
+            <a:srgbClr val="095292"/>
+          </a:solidFill>
+          <a:ln>
+            <a:noFill/>
+          </a:ln>
+        </p:spPr>
+        <p:style>
+          <a:lnRef idx="1">
+            <a:schemeClr val="accent1"/>
+          </a:lnRef>
+          <a:fillRef idx="3">
+            <a:schemeClr val="accent1"/>
+          </a:fillRef>
+          <a:effectRef idx="2">
+            <a:schemeClr val="accent1"/>
+          </a:effectRef>
+          <a:fontRef idx="minor">
+            <a:schemeClr val="lt1"/>
+          </a:fontRef>
+        </p:style>
+        <p:txBody>
+          <a:bodyPr rtlCol="0" anchor="ctr"/>
+          <a:lstStyle/>
+          <a:p>
+            <a:pPr algn="ctr"/>
+          </a:p>
+        </p:txBody>
+      </p:sp>
+      <p:sp>
+        <p:nvSpPr>
+          <p:cNvPr id="7" name="TextBox 6"/>
           <p:cNvSpPr txBox="1"/>
           <p:nvPr/>
         </p:nvSpPr>
         <p:spPr>
           <a:xfrm>
-            <a:off x="640080" y="1737360"/>
-            <a:ext cx="10911535" cy="4572000"/>
+            <a:off x="685800" y="1307592"/>
+            <a:ext cx="10820095" cy="256032"/>
           </a:xfrm>
           <a:prstGeom prst="rect">
             <a:avLst/>
@@ -6866,192 +7122,310 @@
           <a:noFill/>
         </p:spPr>
         <p:txBody>
-          <a:bodyPr wrap="square" anchor="t" lIns="0" rIns="0" tIns="0" bIns="0">
+          <a:bodyPr wrap="square" anchor="ctr"/>
+          <a:lstStyle/>
+          <a:p>
+            <a:r>
+              <a:rPr sz="1000" b="1" i="0">
+                <a:solidFill>
+                  <a:srgbClr val="269CCB"/>
+                </a:solidFill>
+                <a:latin typeface="Calibri"/>
+              </a:rPr>
+              <a:t>● ● ●</a:t>
+            </a:r>
+          </a:p>
+        </p:txBody>
+      </p:sp>
+      <p:sp>
+        <p:nvSpPr>
+          <p:cNvPr id="8" name="TextBox 7"/>
+          <p:cNvSpPr txBox="1"/>
+          <p:nvPr/>
+        </p:nvSpPr>
+        <p:spPr>
+          <a:xfrm>
+            <a:off x="777240" y="1719072"/>
+            <a:ext cx="10637215" cy="4133087"/>
+          </a:xfrm>
+          <a:prstGeom prst="rect">
+            <a:avLst/>
+          </a:prstGeom>
+          <a:noFill/>
+        </p:spPr>
+        <p:txBody>
+          <a:bodyPr wrap="square">
             <a:spAutoFit/>
           </a:bodyPr>
           <a:lstStyle/>
           <a:p>
             <a:pPr>
               <a:spcAft>
-                <a:spcPts val="1000"/>
+                <a:spcPts val="400"/>
               </a:spcAft>
             </a:pPr>
             <a:r>
-              <a:rPr sz="1600" b="0" i="0">
-                <a:solidFill>
-                  <a:srgbClr val="2B2B2B"/>
-                </a:solidFill>
-                <a:latin typeface="Calibri"/>
-              </a:rPr>
-              <a:t>–   </a:t>
-            </a:r>
-            <a:r>
-              <a:rPr sz="1600" b="1" i="0">
-                <a:solidFill>
-                  <a:srgbClr val="269CCB"/>
-                </a:solidFill>
-                <a:latin typeface="Calibri"/>
-              </a:rPr>
-              <a:t>Clase</a:t>
-            </a:r>
-            <a:r>
-              <a:rPr sz="1600" b="0" i="0">
-                <a:solidFill>
-                  <a:srgbClr val="2B2B2B"/>
-                </a:solidFill>
-                <a:latin typeface="Calibri"/>
-              </a:rPr>
-              <a:t> = el molde de galleta (plano/especificación).</a:t>
+              <a:rPr sz="1400" b="0" i="0">
+                <a:solidFill>
+                  <a:srgbClr val="FFFFFF"/>
+                </a:solidFill>
+                <a:latin typeface="Calibri"/>
+              </a:rPr>
+              <a:t>public class Mascota {</a:t>
             </a:r>
           </a:p>
           <a:p>
             <a:pPr>
               <a:spcAft>
-                <a:spcPts val="1000"/>
+                <a:spcPts val="400"/>
               </a:spcAft>
             </a:pPr>
             <a:r>
-              <a:rPr sz="1600" b="0" i="0">
-                <a:solidFill>
-                  <a:srgbClr val="2B2B2B"/>
-                </a:solidFill>
-                <a:latin typeface="Calibri"/>
-              </a:rPr>
-              <a:t>–   </a:t>
-            </a:r>
-            <a:r>
-              <a:rPr sz="1600" b="1" i="0">
-                <a:solidFill>
-                  <a:srgbClr val="269CCB"/>
-                </a:solidFill>
-                <a:latin typeface="Calibri"/>
-              </a:rPr>
-              <a:t>Objeto</a:t>
-            </a:r>
-            <a:r>
-              <a:rPr sz="1600" b="0" i="0">
-                <a:solidFill>
-                  <a:srgbClr val="2B2B2B"/>
-                </a:solidFill>
-                <a:latin typeface="Calibri"/>
-              </a:rPr>
-              <a:t> = cada galleta horneada (existe en memoria RAM).</a:t>
+              <a:rPr sz="1400" b="0" i="0">
+                <a:solidFill>
+                  <a:srgbClr val="FFFFFF"/>
+                </a:solidFill>
+                <a:latin typeface="Calibri"/>
+              </a:rPr>
+              <a:t>    private String id;          // private = nadie lo toca desde afuera</a:t>
             </a:r>
           </a:p>
           <a:p>
             <a:pPr>
               <a:spcAft>
-                <a:spcPts val="1000"/>
+                <a:spcPts val="400"/>
               </a:spcAft>
             </a:pPr>
             <a:r>
-              <a:rPr sz="1600" b="0" i="0">
-                <a:solidFill>
-                  <a:srgbClr val="2B2B2B"/>
-                </a:solidFill>
-                <a:latin typeface="Calibri"/>
-              </a:rPr>
-              <a:t>–   Puedes crear </a:t>
-            </a:r>
-            <a:r>
-              <a:rPr sz="1600" b="1" i="0">
-                <a:solidFill>
-                  <a:srgbClr val="2B2B2B"/>
-                </a:solidFill>
-                <a:latin typeface="Calibri"/>
-              </a:rPr>
-              <a:t>muchos objetos</a:t>
-            </a:r>
-            <a:r>
-              <a:rPr sz="1600" b="0" i="0">
-                <a:solidFill>
-                  <a:srgbClr val="2B2B2B"/>
-                </a:solidFill>
-                <a:latin typeface="Calibri"/>
-              </a:rPr>
-              <a:t> a partir de una misma clase.</a:t>
+              <a:rPr sz="1400" b="0" i="0">
+                <a:solidFill>
+                  <a:srgbClr val="FFFFFF"/>
+                </a:solidFill>
+                <a:latin typeface="Calibri"/>
+              </a:rPr>
+              <a:t>    private String nombre;</a:t>
             </a:r>
           </a:p>
           <a:p>
             <a:pPr>
               <a:spcAft>
-                <a:spcPts val="1000"/>
+                <a:spcPts val="400"/>
               </a:spcAft>
             </a:pPr>
             <a:r>
-              <a:rPr sz="1600" b="0" i="0">
-                <a:solidFill>
-                  <a:srgbClr val="2B2B2B"/>
-                </a:solidFill>
-                <a:latin typeface="Calibri"/>
-              </a:rPr>
-              <a:t>–   Cada objeto tiene su propia copia de los </a:t>
-            </a:r>
-            <a:r>
-              <a:rPr sz="1600" b="1" i="0">
-                <a:solidFill>
-                  <a:srgbClr val="2B2B2B"/>
-                </a:solidFill>
-                <a:latin typeface="Calibri"/>
-              </a:rPr>
-              <a:t>atributos</a:t>
-            </a:r>
-            <a:r>
-              <a:rPr sz="1600" b="0" i="0">
-                <a:solidFill>
-                  <a:srgbClr val="2B2B2B"/>
-                </a:solidFill>
-                <a:latin typeface="Calibri"/>
-              </a:rPr>
-              <a:t> (estado).</a:t>
+              <a:rPr sz="1400" b="0" i="0">
+                <a:solidFill>
+                  <a:srgbClr val="FFFFFF"/>
+                </a:solidFill>
+                <a:latin typeface="Calibri"/>
+              </a:rPr>
+              <a:t>    private String especie;</a:t>
             </a:r>
           </a:p>
           <a:p>
             <a:pPr>
               <a:spcAft>
-                <a:spcPts val="1000"/>
+                <a:spcPts val="400"/>
               </a:spcAft>
             </a:pPr>
             <a:r>
-              <a:rPr sz="1600" b="0" i="0">
-                <a:solidFill>
-                  <a:srgbClr val="2B2B2B"/>
-                </a:solidFill>
-                <a:latin typeface="Calibri"/>
-              </a:rPr>
-              <a:t>–   Los </a:t>
-            </a:r>
-            <a:r>
-              <a:rPr sz="1600" b="1" i="0">
-                <a:solidFill>
-                  <a:srgbClr val="2B2B2B"/>
-                </a:solidFill>
-                <a:latin typeface="Calibri"/>
-              </a:rPr>
-              <a:t>métodos</a:t>
-            </a:r>
-            <a:r>
-              <a:rPr sz="1600" b="0" i="0">
-                <a:solidFill>
-                  <a:srgbClr val="2B2B2B"/>
-                </a:solidFill>
-                <a:latin typeface="Calibri"/>
-              </a:rPr>
-              <a:t> definen qué puede hacer el objeto.</a:t>
-            </a:r>
-          </a:p>
-        </p:txBody>
-      </p:sp>
-      <p:sp>
-        <p:nvSpPr>
-          <p:cNvPr id="6" name="TextBox 5"/>
+              <a:rPr sz="1400" b="0" i="0">
+                <a:solidFill>
+                  <a:srgbClr val="FFFFFF"/>
+                </a:solidFill>
+                <a:latin typeface="Calibri"/>
+              </a:rPr>
+              <a:t/>
+            </a:r>
+          </a:p>
+          <a:p>
+            <a:pPr>
+              <a:spcAft>
+                <a:spcPts val="400"/>
+              </a:spcAft>
+            </a:pPr>
+            <a:r>
+              <a:rPr sz="1400" b="0" i="0">
+                <a:solidFill>
+                  <a:srgbClr val="FFFFFF"/>
+                </a:solidFill>
+                <a:latin typeface="Calibri"/>
+              </a:rPr>
+              <a:t>    public Mascota(String id, String nombre, String especie) {</a:t>
+            </a:r>
+          </a:p>
+          <a:p>
+            <a:pPr>
+              <a:spcAft>
+                <a:spcPts val="400"/>
+              </a:spcAft>
+            </a:pPr>
+            <a:r>
+              <a:rPr sz="1400" b="0" i="0">
+                <a:solidFill>
+                  <a:srgbClr val="FFFFFF"/>
+                </a:solidFill>
+                <a:latin typeface="Calibri"/>
+              </a:rPr>
+              <a:t>        this.id = id;           // this. distingue atributo de parametro</a:t>
+            </a:r>
+          </a:p>
+          <a:p>
+            <a:pPr>
+              <a:spcAft>
+                <a:spcPts val="400"/>
+              </a:spcAft>
+            </a:pPr>
+            <a:r>
+              <a:rPr sz="1400" b="0" i="0">
+                <a:solidFill>
+                  <a:srgbClr val="FFFFFF"/>
+                </a:solidFill>
+                <a:latin typeface="Calibri"/>
+              </a:rPr>
+              <a:t>        this.nombre = nombre;</a:t>
+            </a:r>
+          </a:p>
+          <a:p>
+            <a:pPr>
+              <a:spcAft>
+                <a:spcPts val="400"/>
+              </a:spcAft>
+            </a:pPr>
+            <a:r>
+              <a:rPr sz="1400" b="0" i="0">
+                <a:solidFill>
+                  <a:srgbClr val="FFFFFF"/>
+                </a:solidFill>
+                <a:latin typeface="Calibri"/>
+              </a:rPr>
+              <a:t>        this.especie = especie;</a:t>
+            </a:r>
+          </a:p>
+          <a:p>
+            <a:pPr>
+              <a:spcAft>
+                <a:spcPts val="400"/>
+              </a:spcAft>
+            </a:pPr>
+            <a:r>
+              <a:rPr sz="1400" b="0" i="0">
+                <a:solidFill>
+                  <a:srgbClr val="FFFFFF"/>
+                </a:solidFill>
+                <a:latin typeface="Calibri"/>
+              </a:rPr>
+              <a:t>    }</a:t>
+            </a:r>
+          </a:p>
+          <a:p>
+            <a:pPr>
+              <a:spcAft>
+                <a:spcPts val="400"/>
+              </a:spcAft>
+            </a:pPr>
+            <a:r>
+              <a:rPr sz="1400" b="0" i="0">
+                <a:solidFill>
+                  <a:srgbClr val="FFFFFF"/>
+                </a:solidFill>
+                <a:latin typeface="Calibri"/>
+              </a:rPr>
+              <a:t/>
+            </a:r>
+          </a:p>
+          <a:p>
+            <a:pPr>
+              <a:spcAft>
+                <a:spcPts val="400"/>
+              </a:spcAft>
+            </a:pPr>
+            <a:r>
+              <a:rPr sz="1400" b="0" i="0">
+                <a:solidFill>
+                  <a:srgbClr val="FFFFFF"/>
+                </a:solidFill>
+                <a:latin typeface="Calibri"/>
+              </a:rPr>
+              <a:t>    @Override</a:t>
+            </a:r>
+          </a:p>
+          <a:p>
+            <a:pPr>
+              <a:spcAft>
+                <a:spcPts val="400"/>
+              </a:spcAft>
+            </a:pPr>
+            <a:r>
+              <a:rPr sz="1400" b="0" i="0">
+                <a:solidFill>
+                  <a:srgbClr val="FFFFFF"/>
+                </a:solidFill>
+                <a:latin typeface="Calibri"/>
+              </a:rPr>
+              <a:t>    public String toString() {  // sin esto se imprime vetcare.Mascota@6d06d69c</a:t>
+            </a:r>
+          </a:p>
+          <a:p>
+            <a:pPr>
+              <a:spcAft>
+                <a:spcPts val="400"/>
+              </a:spcAft>
+            </a:pPr>
+            <a:r>
+              <a:rPr sz="1400" b="0" i="0">
+                <a:solidFill>
+                  <a:srgbClr val="FFFFFF"/>
+                </a:solidFill>
+                <a:latin typeface="Calibri"/>
+              </a:rPr>
+              <a:t>        return id + " - " + nombre + " (" + especie + ")";</a:t>
+            </a:r>
+          </a:p>
+          <a:p>
+            <a:pPr>
+              <a:spcAft>
+                <a:spcPts val="400"/>
+              </a:spcAft>
+            </a:pPr>
+            <a:r>
+              <a:rPr sz="1400" b="0" i="0">
+                <a:solidFill>
+                  <a:srgbClr val="FFFFFF"/>
+                </a:solidFill>
+                <a:latin typeface="Calibri"/>
+              </a:rPr>
+              <a:t>    }</a:t>
+            </a:r>
+          </a:p>
+          <a:p>
+            <a:pPr>
+              <a:spcAft>
+                <a:spcPts val="400"/>
+              </a:spcAft>
+            </a:pPr>
+            <a:r>
+              <a:rPr sz="1400" b="0" i="0">
+                <a:solidFill>
+                  <a:srgbClr val="FFFFFF"/>
+                </a:solidFill>
+                <a:latin typeface="Calibri"/>
+              </a:rPr>
+              <a:t>}</a:t>
+            </a:r>
+          </a:p>
+        </p:txBody>
+      </p:sp>
+      <p:sp>
+        <p:nvSpPr>
+          <p:cNvPr id="9" name="TextBox 8"/>
           <p:cNvSpPr txBox="1"/>
           <p:nvPr/>
         </p:nvSpPr>
         <p:spPr>
           <a:xfrm>
-            <a:off x="11094415" y="6446520"/>
-            <a:ext cx="548640" cy="274320"/>
+            <a:off x="457200" y="6080760"/>
+            <a:ext cx="11277295" cy="320040"/>
           </a:xfrm>
           <a:prstGeom prst="rect">
             <a:avLst/>
@@ -7059,16 +7433,51 @@
           <a:noFill/>
         </p:spPr>
         <p:txBody>
-          <a:bodyPr wrap="square" anchor="t" lIns="0" rIns="0" tIns="0" bIns="0">
+          <a:bodyPr wrap="square">
             <a:spAutoFit/>
           </a:bodyPr>
           <a:lstStyle/>
           <a:p>
+            <a:pPr algn="ctr"/>
+            <a:r>
+              <a:rPr sz="1200" b="0" i="1">
+                <a:solidFill>
+                  <a:srgbClr val="666666"/>
+                </a:solidFill>
+                <a:latin typeface="Calibri"/>
+              </a:rPr>
+              <a:t>La clase es el molde; cada new Mascota(...) fabrica un objeto distinto con ese molde.</a:t>
+            </a:r>
+          </a:p>
+        </p:txBody>
+      </p:sp>
+      <p:sp>
+        <p:nvSpPr>
+          <p:cNvPr id="10" name="TextBox 9"/>
+          <p:cNvSpPr txBox="1"/>
+          <p:nvPr/>
+        </p:nvSpPr>
+        <p:spPr>
+          <a:xfrm>
+            <a:off x="11185855" y="6473952"/>
+            <a:ext cx="640080" cy="274320"/>
+          </a:xfrm>
+          <a:prstGeom prst="rect">
+            <a:avLst/>
+          </a:prstGeom>
+          <a:noFill/>
+        </p:spPr>
+        <p:txBody>
+          <a:bodyPr wrap="square">
+            <a:spAutoFit/>
+          </a:bodyPr>
+          <a:lstStyle/>
+          <a:p>
             <a:pPr algn="r"/>
             <a:r>
-              <a:rPr sz="1000" b="1" i="0">
-                <a:solidFill>
-                  <a:srgbClr val="8F989D"/>
+              <a:rPr sz="1100" b="0" i="0">
+                <a:solidFill>
+                  <a:srgbClr val="666666"/>
                 </a:solidFill>
                 <a:latin typeface="Calibri"/>
               </a:rPr>
@@ -7112,7 +7521,7 @@
         <p:spPr>
           <a:xfrm>
             <a:off x="0" y="0"/>
-            <a:ext cx="12191695" cy="1188720"/>
+            <a:ext cx="12191695" cy="960120"/>
           </a:xfrm>
           <a:prstGeom prst="rect">
             <a:avLst/>
@@ -7123,7 +7532,6 @@
           <a:ln>
             <a:noFill/>
           </a:ln>
-          <a:effectLst/>
         </p:spPr>
         <p:style>
           <a:lnRef idx="1">
@@ -7155,19 +7563,18 @@
         </p:nvSpPr>
         <p:spPr>
           <a:xfrm>
-            <a:off x="0" y="1188720"/>
-            <a:ext cx="12191695" cy="54864"/>
+            <a:off x="0" y="960120"/>
+            <a:ext cx="12191695" cy="41148"/>
           </a:xfrm>
           <a:prstGeom prst="rect">
             <a:avLst/>
           </a:prstGeom>
           <a:solidFill>
-            <a:srgbClr val="269CCB"/>
+            <a:srgbClr val="FFD000"/>
           </a:solidFill>
           <a:ln>
             <a:noFill/>
           </a:ln>
-          <a:effectLst/>
         </p:spPr>
         <p:style>
           <a:lnRef idx="1">
@@ -7199,8 +7606,8 @@
         </p:nvSpPr>
         <p:spPr>
           <a:xfrm>
-            <a:off x="640080" y="0"/>
-            <a:ext cx="9082735" cy="1188720"/>
+            <a:off x="457200" y="164592"/>
+            <a:ext cx="11277295" cy="502920"/>
           </a:xfrm>
           <a:prstGeom prst="rect">
             <a:avLst/>
@@ -7208,12 +7615,11 @@
           <a:noFill/>
         </p:spPr>
         <p:txBody>
-          <a:bodyPr wrap="square" anchor="ctr" lIns="0" rIns="0" tIns="0" bIns="0">
+          <a:bodyPr wrap="square">
             <a:spAutoFit/>
           </a:bodyPr>
           <a:lstStyle/>
           <a:p>
-            <a:pPr algn="ctr"/>
             <a:r>
               <a:rPr sz="2600" b="1" i="0">
                 <a:solidFill>
@@ -7221,393 +7627,118 @@
                 </a:solidFill>
                 <a:latin typeface="Calibri"/>
               </a:rPr>
-              <a:t>Cuatro pilares de la POO (mapa rápido de hoy)</a:t>
-            </a:r>
-          </a:p>
-        </p:txBody>
-      </p:sp>
-      <p:graphicFrame>
-        <p:nvGraphicFramePr>
-          <p:cNvPr id="5" name="Table 4"/>
-          <p:cNvGraphicFramePr>
-            <a:graphicFrameLocks noGrp="1"/>
-          </p:cNvGraphicFramePr>
-          <p:nvPr/>
-        </p:nvGraphicFramePr>
-        <p:xfrm>
-          <a:off x="640080" y="1737360"/>
-          <a:ext cx="10911534" cy="2514600"/>
-        </p:xfrm>
-        <a:graphic>
-          <a:graphicData uri="http://schemas.openxmlformats.org/drawingml/2006/table">
-            <a:tbl>
-              <a:tblPr>
-                <a:tableStyleId>{2D5ABB26-0587-4C30-8999-92F81FD0307C}</a:tableStyleId>
-              </a:tblPr>
-              <a:tblGrid>
-                <a:gridCol w="3637178"/>
-                <a:gridCol w="3637178"/>
-                <a:gridCol w="3637178"/>
-              </a:tblGrid>
-              <a:tr h="502920">
-                <a:tc>
-                  <a:txBody>
-                    <a:bodyPr/>
-                    <a:lstStyle/>
-                    <a:p>
-                      <a:pPr algn="l"/>
-                      <a:r>
-                        <a:rPr sz="1300" b="1" i="0">
-                          <a:solidFill>
-                            <a:srgbClr val="FFFFFF"/>
-                          </a:solidFill>
-                          <a:latin typeface="Calibri"/>
-                        </a:rPr>
-                        <a:t>Pilar</a:t>
-                      </a:r>
-                    </a:p>
-                  </a:txBody>
-                  <a:tcPr anchor="ctr" marL="109728" marR="91440" marT="36576" marB="36576">
-                    <a:solidFill>
-                      <a:srgbClr val="095292"/>
-                    </a:solidFill>
-                  </a:tcPr>
-                </a:tc>
-                <a:tc>
-                  <a:txBody>
-                    <a:bodyPr/>
-                    <a:lstStyle/>
-                    <a:p>
-                      <a:pPr algn="l"/>
-                      <a:r>
-                        <a:rPr sz="1300" b="1" i="0">
-                          <a:solidFill>
-                            <a:srgbClr val="FFFFFF"/>
-                          </a:solidFill>
-                          <a:latin typeface="Calibri"/>
-                        </a:rPr>
-                        <a:t>Idea clave</a:t>
-                      </a:r>
-                    </a:p>
-                  </a:txBody>
-                  <a:tcPr anchor="ctr" marL="109728" marR="91440" marT="36576" marB="36576">
-                    <a:solidFill>
-                      <a:srgbClr val="095292"/>
-                    </a:solidFill>
-                  </a:tcPr>
-                </a:tc>
-                <a:tc>
-                  <a:txBody>
-                    <a:bodyPr/>
-                    <a:lstStyle/>
-                    <a:p>
-                      <a:pPr algn="l"/>
-                      <a:r>
-                        <a:rPr sz="1300" b="1" i="0">
-                          <a:solidFill>
-                            <a:srgbClr val="FFFFFF"/>
-                          </a:solidFill>
-                          <a:latin typeface="Calibri"/>
-                        </a:rPr>
-                        <a:t>Señal de que lo entendiste</a:t>
-                      </a:r>
-                    </a:p>
-                  </a:txBody>
-                  <a:tcPr anchor="ctr" marL="109728" marR="91440" marT="36576" marB="36576">
-                    <a:solidFill>
-                      <a:srgbClr val="095292"/>
-                    </a:solidFill>
-                  </a:tcPr>
-                </a:tc>
-              </a:tr>
-              <a:tr h="502920">
-                <a:tc>
-                  <a:txBody>
-                    <a:bodyPr/>
-                    <a:lstStyle/>
-                    <a:p>
-                      <a:pPr algn="l"/>
-                      <a:r>
-                        <a:rPr sz="1200" b="0" i="0">
-                          <a:solidFill>
-                            <a:srgbClr val="2B2B2B"/>
-                          </a:solidFill>
-                          <a:latin typeface="Calibri"/>
-                        </a:rPr>
-                        <a:t>Encapsulamiento</a:t>
-                      </a:r>
-                    </a:p>
-                  </a:txBody>
-                  <a:tcPr anchor="ctr" marL="109728" marR="91440" marT="36576" marB="36576">
-                    <a:solidFill>
-                      <a:srgbClr val="FFFFFF"/>
-                    </a:solidFill>
-                  </a:tcPr>
-                </a:tc>
-                <a:tc>
-                  <a:txBody>
-                    <a:bodyPr/>
-                    <a:lstStyle/>
-                    <a:p>
-                      <a:pPr algn="l"/>
-                      <a:r>
-                        <a:rPr sz="1200" b="0" i="0">
-                          <a:solidFill>
-                            <a:srgbClr val="2B2B2B"/>
-                          </a:solidFill>
-                          <a:latin typeface="Calibri"/>
-                        </a:rPr>
-                        <a:t>Datos protegidos + API pública</a:t>
-                      </a:r>
-                    </a:p>
-                  </a:txBody>
-                  <a:tcPr anchor="ctr" marL="109728" marR="91440" marT="36576" marB="36576">
-                    <a:solidFill>
-                      <a:srgbClr val="FFFFFF"/>
-                    </a:solidFill>
-                  </a:tcPr>
-                </a:tc>
-                <a:tc>
-                  <a:txBody>
-                    <a:bodyPr/>
-                    <a:lstStyle/>
-                    <a:p>
-                      <a:pPr algn="l"/>
-                      <a:r>
-                        <a:rPr sz="1200" b="0" i="0">
-                          <a:solidFill>
-                            <a:srgbClr val="2B2B2B"/>
-                          </a:solidFill>
-                          <a:latin typeface="Calibri"/>
-                        </a:rPr>
-                        <a:t>Atributos private + getters/setters con sentido</a:t>
-                      </a:r>
-                    </a:p>
-                  </a:txBody>
-                  <a:tcPr anchor="ctr" marL="109728" marR="91440" marT="36576" marB="36576">
-                    <a:solidFill>
-                      <a:srgbClr val="FFFFFF"/>
-                    </a:solidFill>
-                  </a:tcPr>
-                </a:tc>
-              </a:tr>
-              <a:tr h="502920">
-                <a:tc>
-                  <a:txBody>
-                    <a:bodyPr/>
-                    <a:lstStyle/>
-                    <a:p>
-                      <a:pPr algn="l"/>
-                      <a:r>
-                        <a:rPr sz="1200" b="0" i="0">
-                          <a:solidFill>
-                            <a:srgbClr val="2B2B2B"/>
-                          </a:solidFill>
-                          <a:latin typeface="Calibri"/>
-                        </a:rPr>
-                        <a:t>Herencia</a:t>
-                      </a:r>
-                    </a:p>
-                  </a:txBody>
-                  <a:tcPr anchor="ctr" marL="109728" marR="91440" marT="36576" marB="36576">
-                    <a:solidFill>
-                      <a:srgbClr val="F2F2F2"/>
-                    </a:solidFill>
-                  </a:tcPr>
-                </a:tc>
-                <a:tc>
-                  <a:txBody>
-                    <a:bodyPr/>
-                    <a:lstStyle/>
-                    <a:p>
-                      <a:pPr algn="l"/>
-                      <a:r>
-                        <a:rPr sz="1200" b="0" i="0">
-                          <a:solidFill>
-                            <a:srgbClr val="2B2B2B"/>
-                          </a:solidFill>
-                          <a:latin typeface="Calibri"/>
-                        </a:rPr>
-                        <a:t>Reutilizar y especializar</a:t>
-                      </a:r>
-                    </a:p>
-                  </a:txBody>
-                  <a:tcPr anchor="ctr" marL="109728" marR="91440" marT="36576" marB="36576">
-                    <a:solidFill>
-                      <a:srgbClr val="F2F2F2"/>
-                    </a:solidFill>
-                  </a:tcPr>
-                </a:tc>
-                <a:tc>
-                  <a:txBody>
-                    <a:bodyPr/>
-                    <a:lstStyle/>
-                    <a:p>
-                      <a:pPr algn="l"/>
-                      <a:r>
-                        <a:rPr sz="1200" b="0" i="0">
-                          <a:solidFill>
-                            <a:srgbClr val="2B2B2B"/>
-                          </a:solidFill>
-                          <a:latin typeface="Calibri"/>
-                        </a:rPr>
-                        <a:t>Subclase sin copiar/pegar código</a:t>
-                      </a:r>
-                    </a:p>
-                  </a:txBody>
-                  <a:tcPr anchor="ctr" marL="109728" marR="91440" marT="36576" marB="36576">
-                    <a:solidFill>
-                      <a:srgbClr val="F2F2F2"/>
-                    </a:solidFill>
-                  </a:tcPr>
-                </a:tc>
-              </a:tr>
-              <a:tr h="502920">
-                <a:tc>
-                  <a:txBody>
-                    <a:bodyPr/>
-                    <a:lstStyle/>
-                    <a:p>
-                      <a:pPr algn="l"/>
-                      <a:r>
-                        <a:rPr sz="1200" b="0" i="0">
-                          <a:solidFill>
-                            <a:srgbClr val="2B2B2B"/>
-                          </a:solidFill>
-                          <a:latin typeface="Calibri"/>
-                        </a:rPr>
-                        <a:t>Polimorfismo</a:t>
-                      </a:r>
-                    </a:p>
-                  </a:txBody>
-                  <a:tcPr anchor="ctr" marL="109728" marR="91440" marT="36576" marB="36576">
-                    <a:solidFill>
-                      <a:srgbClr val="FFFFFF"/>
-                    </a:solidFill>
-                  </a:tcPr>
-                </a:tc>
-                <a:tc>
-                  <a:txBody>
-                    <a:bodyPr/>
-                    <a:lstStyle/>
-                    <a:p>
-                      <a:pPr algn="l"/>
-                      <a:r>
-                        <a:rPr sz="1200" b="0" i="0">
-                          <a:solidFill>
-                            <a:srgbClr val="2B2B2B"/>
-                          </a:solidFill>
-                          <a:latin typeface="Calibri"/>
-                        </a:rPr>
-                        <a:t>Misma interfaz, distinta forma</a:t>
-                      </a:r>
-                    </a:p>
-                  </a:txBody>
-                  <a:tcPr anchor="ctr" marL="109728" marR="91440" marT="36576" marB="36576">
-                    <a:solidFill>
-                      <a:srgbClr val="FFFFFF"/>
-                    </a:solidFill>
-                  </a:tcPr>
-                </a:tc>
-                <a:tc>
-                  <a:txBody>
-                    <a:bodyPr/>
-                    <a:lstStyle/>
-                    <a:p>
-                      <a:pPr algn="l"/>
-                      <a:r>
-                        <a:rPr sz="1200" b="0" i="0">
-                          <a:solidFill>
-                            <a:srgbClr val="2B2B2B"/>
-                          </a:solidFill>
-                          <a:latin typeface="Calibri"/>
-                        </a:rPr>
-                        <a:t>Una lista de Animal con perro/gato</a:t>
-                      </a:r>
-                    </a:p>
-                  </a:txBody>
-                  <a:tcPr anchor="ctr" marL="109728" marR="91440" marT="36576" marB="36576">
-                    <a:solidFill>
-                      <a:srgbClr val="FFFFFF"/>
-                    </a:solidFill>
-                  </a:tcPr>
-                </a:tc>
-              </a:tr>
-              <a:tr h="502920">
-                <a:tc>
-                  <a:txBody>
-                    <a:bodyPr/>
-                    <a:lstStyle/>
-                    <a:p>
-                      <a:pPr algn="l"/>
-                      <a:r>
-                        <a:rPr sz="1200" b="0" i="0">
-                          <a:solidFill>
-                            <a:srgbClr val="2B2B2B"/>
-                          </a:solidFill>
-                          <a:latin typeface="Calibri"/>
-                        </a:rPr>
-                        <a:t>Abstracción</a:t>
-                      </a:r>
-                    </a:p>
-                  </a:txBody>
-                  <a:tcPr anchor="ctr" marL="109728" marR="91440" marT="36576" marB="36576">
-                    <a:solidFill>
-                      <a:srgbClr val="F2F2F2"/>
-                    </a:solidFill>
-                  </a:tcPr>
-                </a:tc>
-                <a:tc>
-                  <a:txBody>
-                    <a:bodyPr/>
-                    <a:lstStyle/>
-                    <a:p>
-                      <a:pPr algn="l"/>
-                      <a:r>
-                        <a:rPr sz="1200" b="0" i="0">
-                          <a:solidFill>
-                            <a:srgbClr val="2B2B2B"/>
-                          </a:solidFill>
-                          <a:latin typeface="Calibri"/>
-                        </a:rPr>
-                        <a:t>Modelar lo esencial</a:t>
-                      </a:r>
-                    </a:p>
-                  </a:txBody>
-                  <a:tcPr anchor="ctr" marL="109728" marR="91440" marT="36576" marB="36576">
-                    <a:solidFill>
-                      <a:srgbClr val="F2F2F2"/>
-                    </a:solidFill>
-                  </a:tcPr>
-                </a:tc>
-                <a:tc>
-                  <a:txBody>
-                    <a:bodyPr/>
-                    <a:lstStyle/>
-                    <a:p>
-                      <a:pPr algn="l"/>
-                      <a:r>
-                        <a:rPr sz="1200" b="0" i="0">
-                          <a:solidFill>
-                            <a:srgbClr val="2B2B2B"/>
-                          </a:solidFill>
-                          <a:latin typeface="Calibri"/>
-                        </a:rPr>
-                        <a:t>Clase que refleja el dominio, no la UI</a:t>
-                      </a:r>
-                    </a:p>
-                  </a:txBody>
-                  <a:tcPr anchor="ctr" marL="109728" marR="91440" marT="36576" marB="36576">
-                    <a:solidFill>
-                      <a:srgbClr val="F2F2F2"/>
-                    </a:solidFill>
-                  </a:tcPr>
-                </a:tc>
-              </a:tr>
-            </a:tbl>
-          </a:graphicData>
-        </a:graphic>
-      </p:graphicFrame>
+              <a:t>Demo del dia</a:t>
+            </a:r>
+          </a:p>
+        </p:txBody>
+      </p:sp>
+      <p:sp>
+        <p:nvSpPr>
+          <p:cNvPr id="5" name="TextBox 4"/>
+          <p:cNvSpPr txBox="1"/>
+          <p:nvPr/>
+        </p:nvSpPr>
+        <p:spPr>
+          <a:xfrm>
+            <a:off x="457200" y="1170432"/>
+            <a:ext cx="11277295" cy="5230368"/>
+          </a:xfrm>
+          <a:prstGeom prst="rect">
+            <a:avLst/>
+          </a:prstGeom>
+          <a:noFill/>
+        </p:spPr>
+        <p:txBody>
+          <a:bodyPr wrap="square">
+            <a:spAutoFit/>
+          </a:bodyPr>
+          <a:lstStyle/>
+          <a:p>
+            <a:pPr>
+              <a:spcAft>
+                <a:spcPts val="800"/>
+              </a:spcAft>
+            </a:pPr>
+            <a:r>
+              <a:rPr sz="1600" b="0" i="0">
+                <a:solidFill>
+                  <a:srgbClr val="333333"/>
+                </a:solidFill>
+                <a:latin typeface="Calibri"/>
+              </a:rPr>
+              <a:t>–   </a:t>
+            </a:r>
+            <a:r>
+              <a:rPr sz="1600" b="1" i="0">
+                <a:solidFill>
+                  <a:srgbClr val="333333"/>
+                </a:solidFill>
+                <a:latin typeface="Calibri"/>
+              </a:rPr>
+              <a:t>Herramienta:</a:t>
+            </a:r>
+            <a:r>
+              <a:rPr sz="1600" b="0" i="0">
+                <a:solidFill>
+                  <a:srgbClr val="333333"/>
+                </a:solidFill>
+                <a:latin typeface="Calibri"/>
+              </a:rPr>
+              <a:t> Apache NetBeans</a:t>
+            </a:r>
+          </a:p>
+          <a:p>
+            <a:pPr>
+              <a:spcAft>
+                <a:spcPts val="800"/>
+              </a:spcAft>
+            </a:pPr>
+            <a:r>
+              <a:rPr sz="1600" b="0" i="0">
+                <a:solidFill>
+                  <a:srgbClr val="333333"/>
+                </a:solidFill>
+                <a:latin typeface="Calibri"/>
+              </a:rPr>
+              <a:t>–   </a:t>
+            </a:r>
+            <a:r>
+              <a:rPr sz="1600" b="1" i="0">
+                <a:solidFill>
+                  <a:srgbClr val="333333"/>
+                </a:solidFill>
+                <a:latin typeface="Calibri"/>
+              </a:rPr>
+              <a:t>Demo:</a:t>
+            </a:r>
+            <a:r>
+              <a:rPr sz="1600" b="0" i="0">
+                <a:solidFill>
+                  <a:srgbClr val="333333"/>
+                </a:solidFill>
+                <a:latin typeface="Calibri"/>
+              </a:rPr>
+              <a:t> Escribir en vivo la clase Mascota y un main que instancia dos mascotas con datos distintos, mostrando que salen del mismo molde</a:t>
+            </a:r>
+          </a:p>
+          <a:p>
+            <a:pPr>
+              <a:spcAft>
+                <a:spcPts val="800"/>
+              </a:spcAft>
+            </a:pPr>
+            <a:r>
+              <a:rPr sz="1600" b="0" i="0">
+                <a:solidFill>
+                  <a:srgbClr val="333333"/>
+                </a:solidFill>
+                <a:latin typeface="Calibri"/>
+              </a:rPr>
+              <a:t>–   Mismo dominio VetCare — no otro ejemplo.</a:t>
+            </a:r>
+          </a:p>
+        </p:txBody>
+      </p:sp>
       <p:sp>
         <p:nvSpPr>
           <p:cNvPr id="6" name="TextBox 5"/>
@@ -7616,8 +7747,8 @@
         </p:nvSpPr>
         <p:spPr>
           <a:xfrm>
-            <a:off x="11094415" y="6446520"/>
-            <a:ext cx="548640" cy="274320"/>
+            <a:off x="11185855" y="6473952"/>
+            <a:ext cx="640080" cy="274320"/>
           </a:xfrm>
           <a:prstGeom prst="rect">
             <a:avLst/>
@@ -7625,16 +7756,16 @@
           <a:noFill/>
         </p:spPr>
         <p:txBody>
-          <a:bodyPr wrap="square" anchor="t" lIns="0" rIns="0" tIns="0" bIns="0">
+          <a:bodyPr wrap="square">
             <a:spAutoFit/>
           </a:bodyPr>
           <a:lstStyle/>
           <a:p>
             <a:pPr algn="r"/>
             <a:r>
-              <a:rPr sz="1000" b="1" i="0">
-                <a:solidFill>
-                  <a:srgbClr val="8F989D"/>
+              <a:rPr sz="1100" b="0" i="0">
+                <a:solidFill>
+                  <a:srgbClr val="666666"/>
                 </a:solidFill>
                 <a:latin typeface="Calibri"/>
               </a:rPr>
@@ -7678,7 +7809,7 @@
         <p:spPr>
           <a:xfrm>
             <a:off x="0" y="0"/>
-            <a:ext cx="12191695" cy="1188720"/>
+            <a:ext cx="12191695" cy="960120"/>
           </a:xfrm>
           <a:prstGeom prst="rect">
             <a:avLst/>
@@ -7689,7 +7820,6 @@
           <a:ln>
             <a:noFill/>
           </a:ln>
-          <a:effectLst/>
         </p:spPr>
         <p:style>
           <a:lnRef idx="1">
@@ -7721,19 +7851,18 @@
         </p:nvSpPr>
         <p:spPr>
           <a:xfrm>
-            <a:off x="0" y="1188720"/>
-            <a:ext cx="12191695" cy="54864"/>
+            <a:off x="0" y="960120"/>
+            <a:ext cx="12191695" cy="41148"/>
           </a:xfrm>
           <a:prstGeom prst="rect">
             <a:avLst/>
           </a:prstGeom>
           <a:solidFill>
-            <a:srgbClr val="269CCB"/>
+            <a:srgbClr val="FFD000"/>
           </a:solidFill>
           <a:ln>
             <a:noFill/>
           </a:ln>
-          <a:effectLst/>
         </p:spPr>
         <p:style>
           <a:lnRef idx="1">
@@ -7765,8 +7894,8 @@
         </p:nvSpPr>
         <p:spPr>
           <a:xfrm>
-            <a:off x="640080" y="0"/>
-            <a:ext cx="9082735" cy="1188720"/>
+            <a:off x="457200" y="164592"/>
+            <a:ext cx="11277295" cy="502920"/>
           </a:xfrm>
           <a:prstGeom prst="rect">
             <a:avLst/>
@@ -7774,12 +7903,11 @@
           <a:noFill/>
         </p:spPr>
         <p:txBody>
-          <a:bodyPr wrap="square" anchor="ctr" lIns="0" rIns="0" tIns="0" bIns="0">
+          <a:bodyPr wrap="square">
             <a:spAutoFit/>
           </a:bodyPr>
           <a:lstStyle/>
           <a:p>
-            <a:pPr algn="ctr"/>
             <a:r>
               <a:rPr sz="2600" b="1" i="0">
                 <a:solidFill>
@@ -7787,7 +7915,7 @@
                 </a:solidFill>
                 <a:latin typeface="Calibri"/>
               </a:rPr>
-              <a:t>Mini-demo en código (mental)</a:t>
+              <a:t>Taller PI — por que importa</a:t>
             </a:r>
           </a:p>
         </p:txBody>
@@ -7800,8 +7928,8 @@
         </p:nvSpPr>
         <p:spPr>
           <a:xfrm>
-            <a:off x="640080" y="1737360"/>
-            <a:ext cx="10911535" cy="4572000"/>
+            <a:off x="457200" y="1170432"/>
+            <a:ext cx="11277295" cy="5230368"/>
           </a:xfrm>
           <a:prstGeom prst="rect">
             <a:avLst/>
@@ -7809,106 +7937,74 @@
           <a:noFill/>
         </p:spPr>
         <p:txBody>
-          <a:bodyPr wrap="square" anchor="t" lIns="0" rIns="0" tIns="0" bIns="0">
+          <a:bodyPr wrap="square">
             <a:spAutoFit/>
           </a:bodyPr>
           <a:lstStyle/>
           <a:p>
             <a:pPr>
               <a:spcAft>
-                <a:spcPts val="1000"/>
+                <a:spcPts val="800"/>
               </a:spcAft>
             </a:pPr>
             <a:r>
               <a:rPr sz="1600" b="0" i="0">
                 <a:solidFill>
-                  <a:srgbClr val="2B2B2B"/>
-                </a:solidFill>
-                <a:latin typeface="Calibri"/>
-              </a:rPr>
-              <a:t>–   `class Mascota { private String nombre; … }`</a:t>
+                  <a:srgbClr val="333333"/>
+                </a:solidFill>
+                <a:latin typeface="Calibri"/>
+              </a:rPr>
+              <a:t>–   </a:t>
+            </a:r>
+            <a:r>
+              <a:rPr sz="1600" b="1" i="0">
+                <a:solidFill>
+                  <a:srgbClr val="333333"/>
+                </a:solidFill>
+                <a:latin typeface="Calibri"/>
+              </a:rPr>
+              <a:t>Por que importa al PI:</a:t>
+            </a:r>
+            <a:r>
+              <a:rPr sz="1600" b="0" i="0">
+                <a:solidFill>
+                  <a:srgbClr val="333333"/>
+                </a:solidFill>
+                <a:latin typeface="Calibri"/>
+              </a:rPr>
+              <a:t> la clase Mascota que escriba hoy es la semilla de todo VetCare; las clases siguientes se apoyan en ella.</a:t>
             </a:r>
           </a:p>
           <a:p>
             <a:pPr>
               <a:spcAft>
-                <a:spcPts val="1000"/>
+                <a:spcPts val="800"/>
               </a:spcAft>
             </a:pPr>
             <a:r>
               <a:rPr sz="1600" b="0" i="0">
                 <a:solidFill>
-                  <a:srgbClr val="2B2B2B"/>
-                </a:solidFill>
-                <a:latin typeface="Calibri"/>
-              </a:rPr>
-              <a:t>–   `Mascota m1 = new Mascota("Luna");`</a:t>
+                  <a:srgbClr val="333333"/>
+                </a:solidFill>
+                <a:latin typeface="Calibri"/>
+              </a:rPr>
+              <a:t>–   Sin entorno funcionando no se puede avanzar en ninguna sesion posterior: por eso hoy se resuelve.</a:t>
             </a:r>
           </a:p>
           <a:p>
             <a:pPr>
               <a:spcAft>
-                <a:spcPts val="1000"/>
+                <a:spcPts val="800"/>
               </a:spcAft>
             </a:pPr>
             <a:r>
               <a:rPr sz="1600" b="0" i="0">
                 <a:solidFill>
-                  <a:srgbClr val="2B2B2B"/>
-                </a:solidFill>
-                <a:latin typeface="Calibri"/>
-              </a:rPr>
-              <a:t>–   `Mascota m2 = new Mascota("Rocky");`</a:t>
-            </a:r>
-          </a:p>
-          <a:p>
-            <a:pPr>
-              <a:spcAft>
-                <a:spcPts val="1000"/>
-              </a:spcAft>
-            </a:pPr>
-            <a:r>
-              <a:rPr sz="1600" b="0" i="0">
-                <a:solidFill>
-                  <a:srgbClr val="2B2B2B"/>
-                </a:solidFill>
-                <a:latin typeface="Calibri"/>
-              </a:rPr>
-              <a:t>–   m1 y m2 son </a:t>
-            </a:r>
-            <a:r>
-              <a:rPr sz="1600" b="1" i="0">
-                <a:solidFill>
-                  <a:srgbClr val="2B2B2B"/>
-                </a:solidFill>
-                <a:latin typeface="Calibri"/>
-              </a:rPr>
-              <a:t>dos objetos</a:t>
-            </a:r>
-            <a:r>
-              <a:rPr sz="1600" b="0" i="0">
-                <a:solidFill>
-                  <a:srgbClr val="2B2B2B"/>
-                </a:solidFill>
-                <a:latin typeface="Calibri"/>
-              </a:rPr>
-              <a:t>; comparten la clase, no el estado.</a:t>
-            </a:r>
-          </a:p>
-          <a:p>
-            <a:pPr>
-              <a:spcAft>
-                <a:spcPts val="1000"/>
-              </a:spcAft>
-            </a:pPr>
-            <a:r>
-              <a:rPr sz="1600" b="0" i="0">
-                <a:solidFill>
-                  <a:srgbClr val="2B2B2B"/>
-                </a:solidFill>
-                <a:latin typeface="Calibri"/>
-              </a:rPr>
-              <a:t>–   Error frecuente: confundir el nombre de la clase con una variable… o dejar referencias `null`.</a:t>
+                  <a:srgbClr val="333333"/>
+                </a:solidFill>
+                <a:latin typeface="Calibri"/>
+              </a:rPr>
+              <a:t>–   El diagnostico de hoy no tiene nota: sirve para calibrar el ritmo de las proximas clases.</a:t>
             </a:r>
           </a:p>
         </p:txBody>
@@ -7921,8 +8017,8 @@
         </p:nvSpPr>
         <p:spPr>
           <a:xfrm>
-            <a:off x="11094415" y="6446520"/>
-            <a:ext cx="548640" cy="274320"/>
+            <a:off x="11185855" y="6473952"/>
+            <a:ext cx="640080" cy="274320"/>
           </a:xfrm>
           <a:prstGeom prst="rect">
             <a:avLst/>
@@ -7930,16 +8026,16 @@
           <a:noFill/>
         </p:spPr>
         <p:txBody>
-          <a:bodyPr wrap="square" anchor="t" lIns="0" rIns="0" tIns="0" bIns="0">
+          <a:bodyPr wrap="square">
             <a:spAutoFit/>
           </a:bodyPr>
           <a:lstStyle/>
           <a:p>
             <a:pPr algn="r"/>
             <a:r>
-              <a:rPr sz="1000" b="1" i="0">
-                <a:solidFill>
-                  <a:srgbClr val="8F989D"/>
+              <a:rPr sz="1100" b="0" i="0">
+                <a:solidFill>
+                  <a:srgbClr val="666666"/>
                 </a:solidFill>
                 <a:latin typeface="Calibri"/>
               </a:rPr>
@@ -7983,7 +8079,7 @@
         <p:spPr>
           <a:xfrm>
             <a:off x="0" y="0"/>
-            <a:ext cx="12191695" cy="1188720"/>
+            <a:ext cx="12191695" cy="960120"/>
           </a:xfrm>
           <a:prstGeom prst="rect">
             <a:avLst/>
@@ -7994,7 +8090,6 @@
           <a:ln>
             <a:noFill/>
           </a:ln>
-          <a:effectLst/>
         </p:spPr>
         <p:style>
           <a:lnRef idx="1">
@@ -8026,19 +8121,18 @@
         </p:nvSpPr>
         <p:spPr>
           <a:xfrm>
-            <a:off x="0" y="1188720"/>
-            <a:ext cx="12191695" cy="54864"/>
+            <a:off x="0" y="960120"/>
+            <a:ext cx="12191695" cy="41148"/>
           </a:xfrm>
           <a:prstGeom prst="rect">
             <a:avLst/>
           </a:prstGeom>
           <a:solidFill>
-            <a:srgbClr val="269CCB"/>
+            <a:srgbClr val="FFD000"/>
           </a:solidFill>
           <a:ln>
             <a:noFill/>
           </a:ln>
-          <a:effectLst/>
         </p:spPr>
         <p:style>
           <a:lnRef idx="1">
@@ -8070,8 +8164,8 @@
         </p:nvSpPr>
         <p:spPr>
           <a:xfrm>
-            <a:off x="640080" y="0"/>
-            <a:ext cx="9082735" cy="1188720"/>
+            <a:off x="457200" y="164592"/>
+            <a:ext cx="11277295" cy="502920"/>
           </a:xfrm>
           <a:prstGeom prst="rect">
             <a:avLst/>
@@ -8079,12 +8173,11 @@
           <a:noFill/>
         </p:spPr>
         <p:txBody>
-          <a:bodyPr wrap="square" anchor="ctr" lIns="0" rIns="0" tIns="0" bIns="0">
+          <a:bodyPr wrap="square">
             <a:spAutoFit/>
           </a:bodyPr>
           <a:lstStyle/>
           <a:p>
-            <a:pPr algn="ctr"/>
             <a:r>
               <a:rPr sz="2600" b="1" i="0">
                 <a:solidFill>
@@ -8092,7 +8185,7 @@
                 </a:solidFill>
                 <a:latin typeface="Calibri"/>
               </a:rPr>
-              <a:t>Laboratorio: entorno listo</a:t>
+              <a:t>Taller PI — punto de partida</a:t>
             </a:r>
           </a:p>
         </p:txBody>
@@ -8105,8 +8198,8 @@
         </p:nvSpPr>
         <p:spPr>
           <a:xfrm>
-            <a:off x="640080" y="1737360"/>
-            <a:ext cx="10911535" cy="4572000"/>
+            <a:off x="457200" y="1170432"/>
+            <a:ext cx="11277295" cy="5230368"/>
           </a:xfrm>
           <a:prstGeom prst="rect">
             <a:avLst/>
@@ -8114,106 +8207,56 @@
           <a:noFill/>
         </p:spPr>
         <p:txBody>
-          <a:bodyPr wrap="square" anchor="t" lIns="0" rIns="0" tIns="0" bIns="0">
+          <a:bodyPr wrap="square">
             <a:spAutoFit/>
           </a:bodyPr>
           <a:lstStyle/>
           <a:p>
             <a:pPr>
               <a:spcAft>
-                <a:spcPts val="1000"/>
+                <a:spcPts val="800"/>
               </a:spcAft>
             </a:pPr>
             <a:r>
               <a:rPr sz="1600" b="0" i="0">
                 <a:solidFill>
-                  <a:srgbClr val="2B2B2B"/>
-                </a:solidFill>
-                <a:latin typeface="Calibri"/>
-              </a:rPr>
-              <a:t>–   Verificar </a:t>
-            </a:r>
-            <a:r>
-              <a:rPr sz="1600" b="1" i="0">
-                <a:solidFill>
-                  <a:srgbClr val="2B2B2B"/>
-                </a:solidFill>
-                <a:latin typeface="Calibri"/>
-              </a:rPr>
-              <a:t>JDK 17+</a:t>
-            </a:r>
-            <a:r>
-              <a:rPr sz="1600" b="0" i="0">
-                <a:solidFill>
-                  <a:srgbClr val="2B2B2B"/>
-                </a:solidFill>
-                <a:latin typeface="Calibri"/>
-              </a:rPr>
-              <a:t> (`java -version`, `javac -version`).</a:t>
+                  <a:srgbClr val="333333"/>
+                </a:solidFill>
+                <a:latin typeface="Calibri"/>
+              </a:rPr>
+              <a:t>–   Dominio: clinica veterinaria Huellitas, que hoy lleva toda su gestion en papel.</a:t>
             </a:r>
           </a:p>
           <a:p>
             <a:pPr>
               <a:spcAft>
-                <a:spcPts val="1000"/>
+                <a:spcPts val="800"/>
               </a:spcAft>
             </a:pPr>
             <a:r>
               <a:rPr sz="1600" b="0" i="0">
                 <a:solidFill>
-                  <a:srgbClr val="2B2B2B"/>
-                </a:solidFill>
-                <a:latin typeface="Calibri"/>
-              </a:rPr>
-              <a:t>–   Abrir el IDE (IntelliJ / VS Code / NetBeans) y crear proyecto `Prog2_Clase01`.</a:t>
+                  <a:srgbClr val="333333"/>
+                </a:solidFill>
+                <a:latin typeface="Calibri"/>
+              </a:rPr>
+              <a:t>–   Herramienta: Apache NetBeans con JDK instalado.</a:t>
             </a:r>
           </a:p>
           <a:p>
             <a:pPr>
               <a:spcAft>
-                <a:spcPts val="1000"/>
+                <a:spcPts val="800"/>
               </a:spcAft>
             </a:pPr>
             <a:r>
               <a:rPr sz="1600" b="0" i="0">
                 <a:solidFill>
-                  <a:srgbClr val="2B2B2B"/>
-                </a:solidFill>
-                <a:latin typeface="Calibri"/>
-              </a:rPr>
-              <a:t>–   Crear paquete `co.edu.uniajc.prog2` y clase `HolaPOO` con `main`.</a:t>
-            </a:r>
-          </a:p>
-          <a:p>
-            <a:pPr>
-              <a:spcAft>
-                <a:spcPts val="1000"/>
-              </a:spcAft>
-            </a:pPr>
-            <a:r>
-              <a:rPr sz="1600" b="0" i="0">
-                <a:solidFill>
-                  <a:srgbClr val="2B2B2B"/>
-                </a:solidFill>
-                <a:latin typeface="Calibri"/>
-              </a:rPr>
-              <a:t>–   Compilar y ejecutar. Captura/ok verbal al docente = listo.</a:t>
-            </a:r>
-          </a:p>
-          <a:p>
-            <a:pPr>
-              <a:spcAft>
-                <a:spcPts val="1000"/>
-              </a:spcAft>
-            </a:pPr>
-            <a:r>
-              <a:rPr sz="1600" b="0" i="0">
-                <a:solidFill>
-                  <a:srgbClr val="2B2B2B"/>
-                </a:solidFill>
-                <a:latin typeface="Calibri"/>
-              </a:rPr>
-              <a:t>–   Independiente dirigido de la semana: terminar configuración y lectura de conceptos previos.</a:t>
+                  <a:srgbClr val="333333"/>
+                </a:solidFill>
+                <a:latin typeface="Calibri"/>
+              </a:rPr>
+              <a:t>–   Se parte de cero: no hay codigo previo del proyecto.</a:t>
             </a:r>
           </a:p>
         </p:txBody>
@@ -8226,8 +8269,8 @@
         </p:nvSpPr>
         <p:spPr>
           <a:xfrm>
-            <a:off x="11094415" y="6446520"/>
-            <a:ext cx="548640" cy="274320"/>
+            <a:off x="11185855" y="6473952"/>
+            <a:ext cx="640080" cy="274320"/>
           </a:xfrm>
           <a:prstGeom prst="rect">
             <a:avLst/>
@@ -8235,16 +8278,16 @@
           <a:noFill/>
         </p:spPr>
         <p:txBody>
-          <a:bodyPr wrap="square" anchor="t" lIns="0" rIns="0" tIns="0" bIns="0">
+          <a:bodyPr wrap="square">
             <a:spAutoFit/>
           </a:bodyPr>
           <a:lstStyle/>
           <a:p>
             <a:pPr algn="r"/>
             <a:r>
-              <a:rPr sz="1000" b="1" i="0">
-                <a:solidFill>
-                  <a:srgbClr val="8F989D"/>
+              <a:rPr sz="1100" b="0" i="0">
+                <a:solidFill>
+                  <a:srgbClr val="666666"/>
                 </a:solidFill>
                 <a:latin typeface="Calibri"/>
               </a:rPr>
@@ -8288,7 +8331,7 @@
         <p:spPr>
           <a:xfrm>
             <a:off x="0" y="0"/>
-            <a:ext cx="12191695" cy="1188720"/>
+            <a:ext cx="12191695" cy="960120"/>
           </a:xfrm>
           <a:prstGeom prst="rect">
             <a:avLst/>
@@ -8299,7 +8342,6 @@
           <a:ln>
             <a:noFill/>
           </a:ln>
-          <a:effectLst/>
         </p:spPr>
         <p:style>
           <a:lnRef idx="1">
@@ -8331,19 +8373,18 @@
         </p:nvSpPr>
         <p:spPr>
           <a:xfrm>
-            <a:off x="0" y="1188720"/>
-            <a:ext cx="12191695" cy="54864"/>
+            <a:off x="0" y="960120"/>
+            <a:ext cx="12191695" cy="41148"/>
           </a:xfrm>
           <a:prstGeom prst="rect">
             <a:avLst/>
           </a:prstGeom>
           <a:solidFill>
-            <a:srgbClr val="269CCB"/>
+            <a:srgbClr val="FFD000"/>
           </a:solidFill>
           <a:ln>
             <a:noFill/>
           </a:ln>
-          <a:effectLst/>
         </p:spPr>
         <p:style>
           <a:lnRef idx="1">
@@ -8375,8 +8416,8 @@
         </p:nvSpPr>
         <p:spPr>
           <a:xfrm>
-            <a:off x="640080" y="0"/>
-            <a:ext cx="9082735" cy="1188720"/>
+            <a:off x="457200" y="164592"/>
+            <a:ext cx="11277295" cy="502920"/>
           </a:xfrm>
           <a:prstGeom prst="rect">
             <a:avLst/>
@@ -8384,34 +8425,156 @@
           <a:noFill/>
         </p:spPr>
         <p:txBody>
-          <a:bodyPr wrap="square" anchor="ctr" lIns="0" rIns="0" tIns="0" bIns="0">
+          <a:bodyPr wrap="square">
             <a:spAutoFit/>
           </a:bodyPr>
           <a:lstStyle/>
           <a:p>
+            <a:r>
+              <a:rPr sz="2600" b="1" i="0">
+                <a:solidFill>
+                  <a:srgbClr val="FFFFFF"/>
+                </a:solidFill>
+                <a:latin typeface="Calibri"/>
+              </a:rPr>
+              <a:t>Taller PI — pasos guiados</a:t>
+            </a:r>
+          </a:p>
+        </p:txBody>
+      </p:sp>
+      <p:sp>
+        <p:nvSpPr>
+          <p:cNvPr id="5" name="Rounded Rectangle 4"/>
+          <p:cNvSpPr/>
+          <p:nvPr/>
+        </p:nvSpPr>
+        <p:spPr>
+          <a:xfrm>
+            <a:off x="457200" y="1234440"/>
+            <a:ext cx="11277295" cy="777240"/>
+          </a:xfrm>
+          <a:prstGeom prst="roundRect">
+            <a:avLst>
+              <a:gd name="adj" fmla="val 12000"/>
+            </a:avLst>
+          </a:prstGeom>
+          <a:solidFill>
+            <a:srgbClr val="F2F2F2"/>
+          </a:solidFill>
+          <a:ln>
+            <a:noFill/>
+          </a:ln>
+        </p:spPr>
+        <p:style>
+          <a:lnRef idx="1">
+            <a:schemeClr val="accent1"/>
+          </a:lnRef>
+          <a:fillRef idx="3">
+            <a:schemeClr val="accent1"/>
+          </a:fillRef>
+          <a:effectRef idx="2">
+            <a:schemeClr val="accent1"/>
+          </a:effectRef>
+          <a:fontRef idx="minor">
+            <a:schemeClr val="lt1"/>
+          </a:fontRef>
+        </p:style>
+        <p:txBody>
+          <a:bodyPr rtlCol="0" anchor="ctr"/>
+          <a:lstStyle/>
+          <a:p>
             <a:pPr algn="ctr"/>
-            <a:r>
-              <a:rPr sz="2600" b="1" i="0">
+          </a:p>
+        </p:txBody>
+      </p:sp>
+      <p:sp>
+        <p:nvSpPr>
+          <p:cNvPr id="6" name="Rounded Rectangle 5"/>
+          <p:cNvSpPr/>
+          <p:nvPr/>
+        </p:nvSpPr>
+        <p:spPr>
+          <a:xfrm>
+            <a:off x="594360" y="1403604"/>
+            <a:ext cx="438912" cy="438912"/>
+          </a:xfrm>
+          <a:prstGeom prst="roundRect">
+            <a:avLst>
+              <a:gd name="adj" fmla="val 12000"/>
+            </a:avLst>
+          </a:prstGeom>
+          <a:solidFill>
+            <a:srgbClr val="095292"/>
+          </a:solidFill>
+          <a:ln>
+            <a:noFill/>
+          </a:ln>
+        </p:spPr>
+        <p:style>
+          <a:lnRef idx="1">
+            <a:schemeClr val="accent1"/>
+          </a:lnRef>
+          <a:fillRef idx="3">
+            <a:schemeClr val="accent1"/>
+          </a:fillRef>
+          <a:effectRef idx="2">
+            <a:schemeClr val="accent1"/>
+          </a:effectRef>
+          <a:fontRef idx="minor">
+            <a:schemeClr val="lt1"/>
+          </a:fontRef>
+        </p:style>
+        <p:txBody>
+          <a:bodyPr rtlCol="0" anchor="ctr"/>
+          <a:lstStyle/>
+          <a:p>
+            <a:pPr algn="ctr"/>
+          </a:p>
+        </p:txBody>
+      </p:sp>
+      <p:sp>
+        <p:nvSpPr>
+          <p:cNvPr id="7" name="TextBox 6"/>
+          <p:cNvSpPr txBox="1"/>
+          <p:nvPr/>
+        </p:nvSpPr>
+        <p:spPr>
+          <a:xfrm>
+            <a:off x="594360" y="1403604"/>
+            <a:ext cx="438912" cy="438912"/>
+          </a:xfrm>
+          <a:prstGeom prst="rect">
+            <a:avLst/>
+          </a:prstGeom>
+          <a:noFill/>
+        </p:spPr>
+        <p:txBody>
+          <a:bodyPr wrap="square" anchor="ctr"/>
+          <a:lstStyle/>
+          <a:p>
+            <a:pPr algn="ctr"/>
+            <a:r>
+              <a:rPr sz="1600" b="1" i="0">
                 <a:solidFill>
                   <a:srgbClr val="FFFFFF"/>
                 </a:solidFill>
                 <a:latin typeface="Calibri"/>
               </a:rPr>
-              <a:t>Proyecto Integrador — primer contacto</a:t>
-            </a:r>
-          </a:p>
-        </p:txBody>
-      </p:sp>
-      <p:sp>
-        <p:nvSpPr>
-          <p:cNvPr id="5" name="TextBox 4"/>
+              <a:t>1</a:t>
+            </a:r>
+          </a:p>
+        </p:txBody>
+      </p:sp>
+      <p:sp>
+        <p:nvSpPr>
+          <p:cNvPr id="8" name="TextBox 7"/>
           <p:cNvSpPr txBox="1"/>
           <p:nvPr/>
         </p:nvSpPr>
         <p:spPr>
           <a:xfrm>
-            <a:off x="640080" y="1737360"/>
-            <a:ext cx="10911535" cy="4572000"/>
+            <a:off x="1188720" y="1325880"/>
+            <a:ext cx="10271455" cy="612647"/>
           </a:xfrm>
           <a:prstGeom prst="rect">
             <a:avLst/>
@@ -8419,139 +8582,668 @@
           <a:noFill/>
         </p:spPr>
         <p:txBody>
-          <a:bodyPr wrap="square" anchor="t" lIns="0" rIns="0" tIns="0" bIns="0">
+          <a:bodyPr wrap="square" anchor="ctr"/>
+          <a:lstStyle/>
+          <a:p>
+            <a:r>
+              <a:rPr sz="1500" b="1" i="0">
+                <a:solidFill>
+                  <a:srgbClr val="095292"/>
+                </a:solidFill>
+                <a:latin typeface="Calibri"/>
+              </a:rPr>
+              <a:t>Instale y verifique el entorno (JDK + Apache NetBeans) y cree un proyecto Java Application llamado VetCare con paquete vetcare. Este paso es el objetivo real del bloque: nadie puede quedarse sin entorno funcionando.</a:t>
+            </a:r>
+          </a:p>
+        </p:txBody>
+      </p:sp>
+      <p:sp>
+        <p:nvSpPr>
+          <p:cNvPr id="9" name="Rounded Rectangle 8"/>
+          <p:cNvSpPr/>
+          <p:nvPr/>
+        </p:nvSpPr>
+        <p:spPr>
+          <a:xfrm>
+            <a:off x="457200" y="2103120"/>
+            <a:ext cx="11277295" cy="777240"/>
+          </a:xfrm>
+          <a:prstGeom prst="roundRect">
+            <a:avLst>
+              <a:gd name="adj" fmla="val 12000"/>
+            </a:avLst>
+          </a:prstGeom>
+          <a:solidFill>
+            <a:srgbClr val="E8F4FA"/>
+          </a:solidFill>
+          <a:ln>
+            <a:noFill/>
+          </a:ln>
+        </p:spPr>
+        <p:style>
+          <a:lnRef idx="1">
+            <a:schemeClr val="accent1"/>
+          </a:lnRef>
+          <a:fillRef idx="3">
+            <a:schemeClr val="accent1"/>
+          </a:fillRef>
+          <a:effectRef idx="2">
+            <a:schemeClr val="accent1"/>
+          </a:effectRef>
+          <a:fontRef idx="minor">
+            <a:schemeClr val="lt1"/>
+          </a:fontRef>
+        </p:style>
+        <p:txBody>
+          <a:bodyPr rtlCol="0" anchor="ctr"/>
+          <a:lstStyle/>
+          <a:p>
+            <a:pPr algn="ctr"/>
+          </a:p>
+        </p:txBody>
+      </p:sp>
+      <p:sp>
+        <p:nvSpPr>
+          <p:cNvPr id="10" name="Rounded Rectangle 9"/>
+          <p:cNvSpPr/>
+          <p:nvPr/>
+        </p:nvSpPr>
+        <p:spPr>
+          <a:xfrm>
+            <a:off x="594360" y="2272284"/>
+            <a:ext cx="438912" cy="438912"/>
+          </a:xfrm>
+          <a:prstGeom prst="roundRect">
+            <a:avLst>
+              <a:gd name="adj" fmla="val 12000"/>
+            </a:avLst>
+          </a:prstGeom>
+          <a:solidFill>
+            <a:srgbClr val="095292"/>
+          </a:solidFill>
+          <a:ln>
+            <a:noFill/>
+          </a:ln>
+        </p:spPr>
+        <p:style>
+          <a:lnRef idx="1">
+            <a:schemeClr val="accent1"/>
+          </a:lnRef>
+          <a:fillRef idx="3">
+            <a:schemeClr val="accent1"/>
+          </a:fillRef>
+          <a:effectRef idx="2">
+            <a:schemeClr val="accent1"/>
+          </a:effectRef>
+          <a:fontRef idx="minor">
+            <a:schemeClr val="lt1"/>
+          </a:fontRef>
+        </p:style>
+        <p:txBody>
+          <a:bodyPr rtlCol="0" anchor="ctr"/>
+          <a:lstStyle/>
+          <a:p>
+            <a:pPr algn="ctr"/>
+          </a:p>
+        </p:txBody>
+      </p:sp>
+      <p:sp>
+        <p:nvSpPr>
+          <p:cNvPr id="11" name="TextBox 10"/>
+          <p:cNvSpPr txBox="1"/>
+          <p:nvPr/>
+        </p:nvSpPr>
+        <p:spPr>
+          <a:xfrm>
+            <a:off x="594360" y="2272284"/>
+            <a:ext cx="438912" cy="438912"/>
+          </a:xfrm>
+          <a:prstGeom prst="rect">
+            <a:avLst/>
+          </a:prstGeom>
+          <a:noFill/>
+        </p:spPr>
+        <p:txBody>
+          <a:bodyPr wrap="square" anchor="ctr"/>
+          <a:lstStyle/>
+          <a:p>
+            <a:pPr algn="ctr"/>
+            <a:r>
+              <a:rPr sz="1600" b="1" i="0">
+                <a:solidFill>
+                  <a:srgbClr val="FFFFFF"/>
+                </a:solidFill>
+                <a:latin typeface="Calibri"/>
+              </a:rPr>
+              <a:t>2</a:t>
+            </a:r>
+          </a:p>
+        </p:txBody>
+      </p:sp>
+      <p:sp>
+        <p:nvSpPr>
+          <p:cNvPr id="12" name="TextBox 11"/>
+          <p:cNvSpPr txBox="1"/>
+          <p:nvPr/>
+        </p:nvSpPr>
+        <p:spPr>
+          <a:xfrm>
+            <a:off x="1188720" y="2194560"/>
+            <a:ext cx="10271455" cy="612647"/>
+          </a:xfrm>
+          <a:prstGeom prst="rect">
+            <a:avLst/>
+          </a:prstGeom>
+          <a:noFill/>
+        </p:spPr>
+        <p:txBody>
+          <a:bodyPr wrap="square" anchor="ctr"/>
+          <a:lstStyle/>
+          <a:p>
+            <a:r>
+              <a:rPr sz="1500" b="1" i="0">
+                <a:solidFill>
+                  <a:srgbClr val="095292"/>
+                </a:solidFill>
+                <a:latin typeface="Calibri"/>
+              </a:rPr>
+              <a:t>Escriba la clase Mascota con al menos tres atributos privados (id, nombre, especie) y un constructor que los reciba todos.</a:t>
+            </a:r>
+          </a:p>
+        </p:txBody>
+      </p:sp>
+      <p:sp>
+        <p:nvSpPr>
+          <p:cNvPr id="13" name="Rounded Rectangle 12"/>
+          <p:cNvSpPr/>
+          <p:nvPr/>
+        </p:nvSpPr>
+        <p:spPr>
+          <a:xfrm>
+            <a:off x="457200" y="2971800"/>
+            <a:ext cx="11277295" cy="777240"/>
+          </a:xfrm>
+          <a:prstGeom prst="roundRect">
+            <a:avLst>
+              <a:gd name="adj" fmla="val 12000"/>
+            </a:avLst>
+          </a:prstGeom>
+          <a:solidFill>
+            <a:srgbClr val="F2F2F2"/>
+          </a:solidFill>
+          <a:ln>
+            <a:noFill/>
+          </a:ln>
+        </p:spPr>
+        <p:style>
+          <a:lnRef idx="1">
+            <a:schemeClr val="accent1"/>
+          </a:lnRef>
+          <a:fillRef idx="3">
+            <a:schemeClr val="accent1"/>
+          </a:fillRef>
+          <a:effectRef idx="2">
+            <a:schemeClr val="accent1"/>
+          </a:effectRef>
+          <a:fontRef idx="minor">
+            <a:schemeClr val="lt1"/>
+          </a:fontRef>
+        </p:style>
+        <p:txBody>
+          <a:bodyPr rtlCol="0" anchor="ctr"/>
+          <a:lstStyle/>
+          <a:p>
+            <a:pPr algn="ctr"/>
+          </a:p>
+        </p:txBody>
+      </p:sp>
+      <p:sp>
+        <p:nvSpPr>
+          <p:cNvPr id="14" name="Rounded Rectangle 13"/>
+          <p:cNvSpPr/>
+          <p:nvPr/>
+        </p:nvSpPr>
+        <p:spPr>
+          <a:xfrm>
+            <a:off x="594360" y="3140964"/>
+            <a:ext cx="438912" cy="438912"/>
+          </a:xfrm>
+          <a:prstGeom prst="roundRect">
+            <a:avLst>
+              <a:gd name="adj" fmla="val 12000"/>
+            </a:avLst>
+          </a:prstGeom>
+          <a:solidFill>
+            <a:srgbClr val="095292"/>
+          </a:solidFill>
+          <a:ln>
+            <a:noFill/>
+          </a:ln>
+        </p:spPr>
+        <p:style>
+          <a:lnRef idx="1">
+            <a:schemeClr val="accent1"/>
+          </a:lnRef>
+          <a:fillRef idx="3">
+            <a:schemeClr val="accent1"/>
+          </a:fillRef>
+          <a:effectRef idx="2">
+            <a:schemeClr val="accent1"/>
+          </a:effectRef>
+          <a:fontRef idx="minor">
+            <a:schemeClr val="lt1"/>
+          </a:fontRef>
+        </p:style>
+        <p:txBody>
+          <a:bodyPr rtlCol="0" anchor="ctr"/>
+          <a:lstStyle/>
+          <a:p>
+            <a:pPr algn="ctr"/>
+          </a:p>
+        </p:txBody>
+      </p:sp>
+      <p:sp>
+        <p:nvSpPr>
+          <p:cNvPr id="15" name="TextBox 14"/>
+          <p:cNvSpPr txBox="1"/>
+          <p:nvPr/>
+        </p:nvSpPr>
+        <p:spPr>
+          <a:xfrm>
+            <a:off x="594360" y="3140964"/>
+            <a:ext cx="438912" cy="438912"/>
+          </a:xfrm>
+          <a:prstGeom prst="rect">
+            <a:avLst/>
+          </a:prstGeom>
+          <a:noFill/>
+        </p:spPr>
+        <p:txBody>
+          <a:bodyPr wrap="square" anchor="ctr"/>
+          <a:lstStyle/>
+          <a:p>
+            <a:pPr algn="ctr"/>
+            <a:r>
+              <a:rPr sz="1600" b="1" i="0">
+                <a:solidFill>
+                  <a:srgbClr val="FFFFFF"/>
+                </a:solidFill>
+                <a:latin typeface="Calibri"/>
+              </a:rPr>
+              <a:t>3</a:t>
+            </a:r>
+          </a:p>
+        </p:txBody>
+      </p:sp>
+      <p:sp>
+        <p:nvSpPr>
+          <p:cNvPr id="16" name="TextBox 15"/>
+          <p:cNvSpPr txBox="1"/>
+          <p:nvPr/>
+        </p:nvSpPr>
+        <p:spPr>
+          <a:xfrm>
+            <a:off x="1188720" y="3063240"/>
+            <a:ext cx="10271455" cy="612647"/>
+          </a:xfrm>
+          <a:prstGeom prst="rect">
+            <a:avLst/>
+          </a:prstGeom>
+          <a:noFill/>
+        </p:spPr>
+        <p:txBody>
+          <a:bodyPr wrap="square" anchor="ctr"/>
+          <a:lstStyle/>
+          <a:p>
+            <a:r>
+              <a:rPr sz="1500" b="1" i="0">
+                <a:solidFill>
+                  <a:srgbClr val="095292"/>
+                </a:solidFill>
+                <a:latin typeface="Calibri"/>
+              </a:rPr>
+              <a:t>Agregue al menos un getter y sobreescriba toString() para que la mascota se imprima de forma legible.</a:t>
+            </a:r>
+          </a:p>
+        </p:txBody>
+      </p:sp>
+      <p:sp>
+        <p:nvSpPr>
+          <p:cNvPr id="17" name="Rounded Rectangle 16"/>
+          <p:cNvSpPr/>
+          <p:nvPr/>
+        </p:nvSpPr>
+        <p:spPr>
+          <a:xfrm>
+            <a:off x="457200" y="3840479"/>
+            <a:ext cx="11277295" cy="777240"/>
+          </a:xfrm>
+          <a:prstGeom prst="roundRect">
+            <a:avLst>
+              <a:gd name="adj" fmla="val 12000"/>
+            </a:avLst>
+          </a:prstGeom>
+          <a:solidFill>
+            <a:srgbClr val="E8F4FA"/>
+          </a:solidFill>
+          <a:ln>
+            <a:noFill/>
+          </a:ln>
+        </p:spPr>
+        <p:style>
+          <a:lnRef idx="1">
+            <a:schemeClr val="accent1"/>
+          </a:lnRef>
+          <a:fillRef idx="3">
+            <a:schemeClr val="accent1"/>
+          </a:fillRef>
+          <a:effectRef idx="2">
+            <a:schemeClr val="accent1"/>
+          </a:effectRef>
+          <a:fontRef idx="minor">
+            <a:schemeClr val="lt1"/>
+          </a:fontRef>
+        </p:style>
+        <p:txBody>
+          <a:bodyPr rtlCol="0" anchor="ctr"/>
+          <a:lstStyle/>
+          <a:p>
+            <a:pPr algn="ctr"/>
+          </a:p>
+        </p:txBody>
+      </p:sp>
+      <p:sp>
+        <p:nvSpPr>
+          <p:cNvPr id="18" name="Rounded Rectangle 17"/>
+          <p:cNvSpPr/>
+          <p:nvPr/>
+        </p:nvSpPr>
+        <p:spPr>
+          <a:xfrm>
+            <a:off x="594360" y="4009643"/>
+            <a:ext cx="438912" cy="438912"/>
+          </a:xfrm>
+          <a:prstGeom prst="roundRect">
+            <a:avLst>
+              <a:gd name="adj" fmla="val 12000"/>
+            </a:avLst>
+          </a:prstGeom>
+          <a:solidFill>
+            <a:srgbClr val="095292"/>
+          </a:solidFill>
+          <a:ln>
+            <a:noFill/>
+          </a:ln>
+        </p:spPr>
+        <p:style>
+          <a:lnRef idx="1">
+            <a:schemeClr val="accent1"/>
+          </a:lnRef>
+          <a:fillRef idx="3">
+            <a:schemeClr val="accent1"/>
+          </a:fillRef>
+          <a:effectRef idx="2">
+            <a:schemeClr val="accent1"/>
+          </a:effectRef>
+          <a:fontRef idx="minor">
+            <a:schemeClr val="lt1"/>
+          </a:fontRef>
+        </p:style>
+        <p:txBody>
+          <a:bodyPr rtlCol="0" anchor="ctr"/>
+          <a:lstStyle/>
+          <a:p>
+            <a:pPr algn="ctr"/>
+          </a:p>
+        </p:txBody>
+      </p:sp>
+      <p:sp>
+        <p:nvSpPr>
+          <p:cNvPr id="19" name="TextBox 18"/>
+          <p:cNvSpPr txBox="1"/>
+          <p:nvPr/>
+        </p:nvSpPr>
+        <p:spPr>
+          <a:xfrm>
+            <a:off x="594360" y="4009643"/>
+            <a:ext cx="438912" cy="438912"/>
+          </a:xfrm>
+          <a:prstGeom prst="rect">
+            <a:avLst/>
+          </a:prstGeom>
+          <a:noFill/>
+        </p:spPr>
+        <p:txBody>
+          <a:bodyPr wrap="square" anchor="ctr"/>
+          <a:lstStyle/>
+          <a:p>
+            <a:pPr algn="ctr"/>
+            <a:r>
+              <a:rPr sz="1600" b="1" i="0">
+                <a:solidFill>
+                  <a:srgbClr val="FFFFFF"/>
+                </a:solidFill>
+                <a:latin typeface="Calibri"/>
+              </a:rPr>
+              <a:t>4</a:t>
+            </a:r>
+          </a:p>
+        </p:txBody>
+      </p:sp>
+      <p:sp>
+        <p:nvSpPr>
+          <p:cNvPr id="20" name="TextBox 19"/>
+          <p:cNvSpPr txBox="1"/>
+          <p:nvPr/>
+        </p:nvSpPr>
+        <p:spPr>
+          <a:xfrm>
+            <a:off x="1188720" y="3931919"/>
+            <a:ext cx="10271455" cy="612647"/>
+          </a:xfrm>
+          <a:prstGeom prst="rect">
+            <a:avLst/>
+          </a:prstGeom>
+          <a:noFill/>
+        </p:spPr>
+        <p:txBody>
+          <a:bodyPr wrap="square" anchor="ctr"/>
+          <a:lstStyle/>
+          <a:p>
+            <a:r>
+              <a:rPr sz="1500" b="1" i="0">
+                <a:solidFill>
+                  <a:srgbClr val="095292"/>
+                </a:solidFill>
+                <a:latin typeface="Calibri"/>
+              </a:rPr>
+              <a:t>En el main, cree DOS objetos Mascota con datos distintos e imprimalos: debe verse que salen del mismo molde pero con valores diferentes.</a:t>
+            </a:r>
+          </a:p>
+        </p:txBody>
+      </p:sp>
+      <p:sp>
+        <p:nvSpPr>
+          <p:cNvPr id="21" name="Rounded Rectangle 20"/>
+          <p:cNvSpPr/>
+          <p:nvPr/>
+        </p:nvSpPr>
+        <p:spPr>
+          <a:xfrm>
+            <a:off x="457200" y="4709160"/>
+            <a:ext cx="11277295" cy="777240"/>
+          </a:xfrm>
+          <a:prstGeom prst="roundRect">
+            <a:avLst>
+              <a:gd name="adj" fmla="val 12000"/>
+            </a:avLst>
+          </a:prstGeom>
+          <a:solidFill>
+            <a:srgbClr val="F2F2F2"/>
+          </a:solidFill>
+          <a:ln>
+            <a:noFill/>
+          </a:ln>
+        </p:spPr>
+        <p:style>
+          <a:lnRef idx="1">
+            <a:schemeClr val="accent1"/>
+          </a:lnRef>
+          <a:fillRef idx="3">
+            <a:schemeClr val="accent1"/>
+          </a:fillRef>
+          <a:effectRef idx="2">
+            <a:schemeClr val="accent1"/>
+          </a:effectRef>
+          <a:fontRef idx="minor">
+            <a:schemeClr val="lt1"/>
+          </a:fontRef>
+        </p:style>
+        <p:txBody>
+          <a:bodyPr rtlCol="0" anchor="ctr"/>
+          <a:lstStyle/>
+          <a:p>
+            <a:pPr algn="ctr"/>
+          </a:p>
+        </p:txBody>
+      </p:sp>
+      <p:sp>
+        <p:nvSpPr>
+          <p:cNvPr id="22" name="Rounded Rectangle 21"/>
+          <p:cNvSpPr/>
+          <p:nvPr/>
+        </p:nvSpPr>
+        <p:spPr>
+          <a:xfrm>
+            <a:off x="594360" y="4878324"/>
+            <a:ext cx="438912" cy="438912"/>
+          </a:xfrm>
+          <a:prstGeom prst="roundRect">
+            <a:avLst>
+              <a:gd name="adj" fmla="val 12000"/>
+            </a:avLst>
+          </a:prstGeom>
+          <a:solidFill>
+            <a:srgbClr val="095292"/>
+          </a:solidFill>
+          <a:ln>
+            <a:noFill/>
+          </a:ln>
+        </p:spPr>
+        <p:style>
+          <a:lnRef idx="1">
+            <a:schemeClr val="accent1"/>
+          </a:lnRef>
+          <a:fillRef idx="3">
+            <a:schemeClr val="accent1"/>
+          </a:fillRef>
+          <a:effectRef idx="2">
+            <a:schemeClr val="accent1"/>
+          </a:effectRef>
+          <a:fontRef idx="minor">
+            <a:schemeClr val="lt1"/>
+          </a:fontRef>
+        </p:style>
+        <p:txBody>
+          <a:bodyPr rtlCol="0" anchor="ctr"/>
+          <a:lstStyle/>
+          <a:p>
+            <a:pPr algn="ctr"/>
+          </a:p>
+        </p:txBody>
+      </p:sp>
+      <p:sp>
+        <p:nvSpPr>
+          <p:cNvPr id="23" name="TextBox 22"/>
+          <p:cNvSpPr txBox="1"/>
+          <p:nvPr/>
+        </p:nvSpPr>
+        <p:spPr>
+          <a:xfrm>
+            <a:off x="594360" y="4878324"/>
+            <a:ext cx="438912" cy="438912"/>
+          </a:xfrm>
+          <a:prstGeom prst="rect">
+            <a:avLst/>
+          </a:prstGeom>
+          <a:noFill/>
+        </p:spPr>
+        <p:txBody>
+          <a:bodyPr wrap="square" anchor="ctr"/>
+          <a:lstStyle/>
+          <a:p>
+            <a:pPr algn="ctr"/>
+            <a:r>
+              <a:rPr sz="1600" b="1" i="0">
+                <a:solidFill>
+                  <a:srgbClr val="FFFFFF"/>
+                </a:solidFill>
+                <a:latin typeface="Calibri"/>
+              </a:rPr>
+              <a:t>5</a:t>
+            </a:r>
+          </a:p>
+        </p:txBody>
+      </p:sp>
+      <p:sp>
+        <p:nvSpPr>
+          <p:cNvPr id="24" name="TextBox 23"/>
+          <p:cNvSpPr txBox="1"/>
+          <p:nvPr/>
+        </p:nvSpPr>
+        <p:spPr>
+          <a:xfrm>
+            <a:off x="1188720" y="4800600"/>
+            <a:ext cx="10271455" cy="612647"/>
+          </a:xfrm>
+          <a:prstGeom prst="rect">
+            <a:avLst/>
+          </a:prstGeom>
+          <a:noFill/>
+        </p:spPr>
+        <p:txBody>
+          <a:bodyPr wrap="square" anchor="ctr"/>
+          <a:lstStyle/>
+          <a:p>
+            <a:r>
+              <a:rPr sz="1500" b="1" i="0">
+                <a:solidFill>
+                  <a:srgbClr val="095292"/>
+                </a:solidFill>
+                <a:latin typeface="Calibri"/>
+              </a:rPr>
+              <a:t>Si termina antes: agregue un setter que valide (por ejemplo, que rechace una edad negativa) y pruebelo desde el main.</a:t>
+            </a:r>
+          </a:p>
+        </p:txBody>
+      </p:sp>
+      <p:sp>
+        <p:nvSpPr>
+          <p:cNvPr id="25" name="TextBox 24"/>
+          <p:cNvSpPr txBox="1"/>
+          <p:nvPr/>
+        </p:nvSpPr>
+        <p:spPr>
+          <a:xfrm>
+            <a:off x="11185855" y="6473952"/>
+            <a:ext cx="640080" cy="274320"/>
+          </a:xfrm>
+          <a:prstGeom prst="rect">
+            <a:avLst/>
+          </a:prstGeom>
+          <a:noFill/>
+        </p:spPr>
+        <p:txBody>
+          <a:bodyPr wrap="square">
             <a:spAutoFit/>
           </a:bodyPr>
           <a:lstStyle/>
           <a:p>
-            <a:pPr>
-              <a:spcAft>
-                <a:spcPts val="1000"/>
-              </a:spcAft>
-            </a:pPr>
-            <a:r>
-              <a:rPr sz="1600" b="0" i="0">
-                <a:solidFill>
-                  <a:srgbClr val="2B2B2B"/>
-                </a:solidFill>
-                <a:latin typeface="Calibri"/>
-              </a:rPr>
-              <a:t>–   Hoy leemos el enunciado, aclaramos el dominio y definimos el </a:t>
-            </a:r>
-            <a:r>
-              <a:rPr sz="1600" b="1" i="0">
-                <a:solidFill>
-                  <a:srgbClr val="2B2B2B"/>
-                </a:solidFill>
-                <a:latin typeface="Calibri"/>
-              </a:rPr>
-              <a:t>primer avance</a:t>
-            </a:r>
-            <a:r>
-              <a:rPr sz="1600" b="0" i="0">
-                <a:solidFill>
-                  <a:srgbClr val="2B2B2B"/>
-                </a:solidFill>
-                <a:latin typeface="Calibri"/>
-              </a:rPr>
-              <a:t>.</a:t>
-            </a:r>
-          </a:p>
-          <a:p>
-            <a:pPr>
-              <a:spcAft>
-                <a:spcPts val="1000"/>
-              </a:spcAft>
-            </a:pPr>
-            <a:r>
-              <a:rPr sz="1600" b="0" i="0">
-                <a:solidFill>
-                  <a:srgbClr val="2B2B2B"/>
-                </a:solidFill>
-                <a:latin typeface="Calibri"/>
-              </a:rPr>
-              <a:t>–   Entregable de salida: problema en 2–3 frases + </a:t>
-            </a:r>
-            <a:r>
-              <a:rPr sz="1600" b="1" i="0">
-                <a:solidFill>
-                  <a:srgbClr val="2B2B2B"/>
-                </a:solidFill>
-                <a:latin typeface="Calibri"/>
-              </a:rPr>
-              <a:t>3 entidades</a:t>
-            </a:r>
-            <a:r>
-              <a:rPr sz="1600" b="0" i="0">
-                <a:solidFill>
-                  <a:srgbClr val="2B2B2B"/>
-                </a:solidFill>
-                <a:latin typeface="Calibri"/>
-              </a:rPr>
-              <a:t> candidatas + 1 funcionalidad cercana.</a:t>
-            </a:r>
-          </a:p>
-          <a:p>
-            <a:pPr>
-              <a:spcAft>
-                <a:spcPts val="1000"/>
-              </a:spcAft>
-            </a:pPr>
-            <a:r>
-              <a:rPr sz="1600" b="0" i="0">
-                <a:solidFill>
-                  <a:srgbClr val="2B2B2B"/>
-                </a:solidFill>
-                <a:latin typeface="Calibri"/>
-              </a:rPr>
-              <a:t>–   Criterio de hoy: cada estudiante/equipo deja escrito el problema que resolverá.</a:t>
-            </a:r>
-          </a:p>
-          <a:p>
-            <a:pPr>
-              <a:spcAft>
-                <a:spcPts val="1000"/>
-              </a:spcAft>
-            </a:pPr>
-            <a:r>
-              <a:rPr sz="1600" b="0" i="0">
-                <a:solidFill>
-                  <a:srgbClr val="2B2B2B"/>
-                </a:solidFill>
-                <a:latin typeface="Calibri"/>
-              </a:rPr>
-              <a:t>–   Detalle de peso y cortes: Presentación del Curso / Acuerdo pedagógico (no se repite aquí).</a:t>
-            </a:r>
-          </a:p>
-        </p:txBody>
-      </p:sp>
-      <p:sp>
-        <p:nvSpPr>
-          <p:cNvPr id="6" name="TextBox 5"/>
-          <p:cNvSpPr txBox="1"/>
-          <p:nvPr/>
-        </p:nvSpPr>
-        <p:spPr>
-          <a:xfrm>
-            <a:off x="11094415" y="6446520"/>
-            <a:ext cx="548640" cy="274320"/>
-          </a:xfrm>
-          <a:prstGeom prst="rect">
-            <a:avLst/>
-          </a:prstGeom>
-          <a:noFill/>
-        </p:spPr>
-        <p:txBody>
-          <a:bodyPr wrap="square" anchor="t" lIns="0" rIns="0" tIns="0" bIns="0">
-            <a:spAutoFit/>
-          </a:bodyPr>
-          <a:lstStyle/>
-          <a:p>
             <a:pPr algn="r"/>
             <a:r>
-              <a:rPr sz="1000" b="1" i="0">
-                <a:solidFill>
-                  <a:srgbClr val="8F989D"/>
+              <a:rPr sz="1100" b="0" i="0">
+                <a:solidFill>
+                  <a:srgbClr val="666666"/>
                 </a:solidFill>
                 <a:latin typeface="Calibri"/>
               </a:rPr>

--- a/Programacion II/Clases/Clase 1 - Introduccion a POO/Presentacion.pptx
+++ b/Programacion II/Clases/Clase 1 - Introduccion a POO/Presentacion.pptx
@@ -4512,7 +4512,7 @@
                 </a:solidFill>
                 <a:latin typeface="Calibri"/>
               </a:rPr>
-              <a:t>Entrega en ExamLab (examlab.lovable.app/app)</a:t>
+              <a:t>Entrega en ExamLab (https://examlab.lovable.app/)</a:t>
             </a:r>
             <a:r>
               <a:rPr sz="1600" b="0" i="0">
@@ -5116,7 +5116,7 @@
                 </a:solidFill>
                 <a:latin typeface="Calibri"/>
               </a:rPr>
-              <a:t>Entrega del taller en ExamLab (examlab.lovable.app/app) · domingo 23:59.</a:t>
+              <a:t>Entrega del taller en ExamLab (https://examlab.lovable.app/) · domingo 23:59.</a:t>
             </a:r>
           </a:p>
         </p:txBody>

--- a/Programacion II/Clases/Clase 1 - Introduccion a POO/Presentacion.pptx
+++ b/Programacion II/Clases/Clase 1 - Introduccion a POO/Presentacion.pptx
@@ -6816,22 +6816,6 @@
                 <a:latin typeface="Calibri"/>
               </a:rPr>
               <a:t>–   El constructor es el metodo que se ejecuta al crear el objeto y deja sus atributos en un estado valido</a:t>
-            </a:r>
-          </a:p>
-          <a:p>
-            <a:pPr>
-              <a:spcAft>
-                <a:spcPts val="800"/>
-              </a:spcAft>
-            </a:pPr>
-            <a:r>
-              <a:rPr sz="1500" b="0" i="0">
-                <a:solidFill>
-                  <a:srgbClr val="333333"/>
-                </a:solidFill>
-                <a:latin typeface="Calibri"/>
-              </a:rPr>
-              <a:t>–   Error tipico del docente que no domina el tema: presentar los cuatro pilares como cuatro definiciones que hay que…</a:t>
             </a:r>
           </a:p>
         </p:txBody>

--- a/Programacion II/Clases/Clase 1 - Introduccion a POO/Presentacion.pptx
+++ b/Programacion II/Clases/Clase 1 - Introduccion a POO/Presentacion.pptx
@@ -4512,7 +4512,7 @@
                 </a:solidFill>
                 <a:latin typeface="Calibri"/>
               </a:rPr>
-              <a:t>Entrega en ExamLab (https://examlab.lovable.app/)</a:t>
+              <a:t>Entrega en ExamLab (https://uniaj.examlab.workers.dev/)</a:t>
             </a:r>
             <a:r>
               <a:rPr sz="1600" b="0" i="0">
@@ -5116,7 +5116,7 @@
                 </a:solidFill>
                 <a:latin typeface="Calibri"/>
               </a:rPr>
-              <a:t>Entrega del taller en ExamLab (https://examlab.lovable.app/) · domingo 23:59.</a:t>
+              <a:t>Entrega del taller en ExamLab (https://uniaj.examlab.workers.dev/) · domingo 23:59.</a:t>
             </a:r>
           </a:p>
         </p:txBody>

--- a/Programacion II/Clases/Clase 1 - Introduccion a POO/Presentacion.pptx
+++ b/Programacion II/Clases/Clase 1 - Introduccion a POO/Presentacion.pptx
@@ -8435,7 +8435,7 @@
         <p:spPr>
           <a:xfrm>
             <a:off x="457200" y="1234440"/>
-            <a:ext cx="11277295" cy="777240"/>
+            <a:ext cx="11277295" cy="950976"/>
           </a:xfrm>
           <a:prstGeom prst="roundRect">
             <a:avLst>
@@ -8479,7 +8479,7 @@
         </p:nvSpPr>
         <p:spPr>
           <a:xfrm>
-            <a:off x="594360" y="1403604"/>
+            <a:off x="594360" y="1490472"/>
             <a:ext cx="438912" cy="438912"/>
           </a:xfrm>
           <a:prstGeom prst="roundRect">
@@ -8524,7 +8524,7 @@
         </p:nvSpPr>
         <p:spPr>
           <a:xfrm>
-            <a:off x="594360" y="1403604"/>
+            <a:off x="594360" y="1490472"/>
             <a:ext cx="438912" cy="438912"/>
           </a:xfrm>
           <a:prstGeom prst="rect">
@@ -8558,7 +8558,7 @@
         <p:spPr>
           <a:xfrm>
             <a:off x="1188720" y="1325880"/>
-            <a:ext cx="10271455" cy="612647"/>
+            <a:ext cx="10271455" cy="786384"/>
           </a:xfrm>
           <a:prstGeom prst="rect">
             <a:avLst/>
@@ -8589,8 +8589,8 @@
         </p:nvSpPr>
         <p:spPr>
           <a:xfrm>
-            <a:off x="457200" y="2103120"/>
-            <a:ext cx="11277295" cy="777240"/>
+            <a:off x="457200" y="2276856"/>
+            <a:ext cx="11277295" cy="950976"/>
           </a:xfrm>
           <a:prstGeom prst="roundRect">
             <a:avLst>
@@ -8634,7 +8634,7 @@
         </p:nvSpPr>
         <p:spPr>
           <a:xfrm>
-            <a:off x="594360" y="2272284"/>
+            <a:off x="594360" y="2532888"/>
             <a:ext cx="438912" cy="438912"/>
           </a:xfrm>
           <a:prstGeom prst="roundRect">
@@ -8679,7 +8679,7 @@
         </p:nvSpPr>
         <p:spPr>
           <a:xfrm>
-            <a:off x="594360" y="2272284"/>
+            <a:off x="594360" y="2532888"/>
             <a:ext cx="438912" cy="438912"/>
           </a:xfrm>
           <a:prstGeom prst="rect">
@@ -8712,8 +8712,8 @@
         </p:nvSpPr>
         <p:spPr>
           <a:xfrm>
-            <a:off x="1188720" y="2194560"/>
-            <a:ext cx="10271455" cy="612647"/>
+            <a:off x="1188720" y="2368296"/>
+            <a:ext cx="10271455" cy="786384"/>
           </a:xfrm>
           <a:prstGeom prst="rect">
             <a:avLst/>
@@ -8744,8 +8744,8 @@
         </p:nvSpPr>
         <p:spPr>
           <a:xfrm>
-            <a:off x="457200" y="2971800"/>
-            <a:ext cx="11277295" cy="777240"/>
+            <a:off x="457200" y="3319272"/>
+            <a:ext cx="11277295" cy="950976"/>
           </a:xfrm>
           <a:prstGeom prst="roundRect">
             <a:avLst>
@@ -8789,7 +8789,7 @@
         </p:nvSpPr>
         <p:spPr>
           <a:xfrm>
-            <a:off x="594360" y="3140964"/>
+            <a:off x="594360" y="3575304"/>
             <a:ext cx="438912" cy="438912"/>
           </a:xfrm>
           <a:prstGeom prst="roundRect">
@@ -8834,7 +8834,7 @@
         </p:nvSpPr>
         <p:spPr>
           <a:xfrm>
-            <a:off x="594360" y="3140964"/>
+            <a:off x="594360" y="3575304"/>
             <a:ext cx="438912" cy="438912"/>
           </a:xfrm>
           <a:prstGeom prst="rect">
@@ -8867,8 +8867,8 @@
         </p:nvSpPr>
         <p:spPr>
           <a:xfrm>
-            <a:off x="1188720" y="3063240"/>
-            <a:ext cx="10271455" cy="612647"/>
+            <a:off x="1188720" y="3410712"/>
+            <a:ext cx="10271455" cy="786384"/>
           </a:xfrm>
           <a:prstGeom prst="rect">
             <a:avLst/>
@@ -8899,8 +8899,8 @@
         </p:nvSpPr>
         <p:spPr>
           <a:xfrm>
-            <a:off x="457200" y="3840479"/>
-            <a:ext cx="11277295" cy="777240"/>
+            <a:off x="457200" y="4361688"/>
+            <a:ext cx="11277295" cy="950976"/>
           </a:xfrm>
           <a:prstGeom prst="roundRect">
             <a:avLst>
@@ -8944,7 +8944,7 @@
         </p:nvSpPr>
         <p:spPr>
           <a:xfrm>
-            <a:off x="594360" y="4009643"/>
+            <a:off x="594360" y="4617720"/>
             <a:ext cx="438912" cy="438912"/>
           </a:xfrm>
           <a:prstGeom prst="roundRect">
@@ -8989,7 +8989,7 @@
         </p:nvSpPr>
         <p:spPr>
           <a:xfrm>
-            <a:off x="594360" y="4009643"/>
+            <a:off x="594360" y="4617720"/>
             <a:ext cx="438912" cy="438912"/>
           </a:xfrm>
           <a:prstGeom prst="rect">
@@ -9022,8 +9022,8 @@
         </p:nvSpPr>
         <p:spPr>
           <a:xfrm>
-            <a:off x="1188720" y="3931919"/>
-            <a:ext cx="10271455" cy="612647"/>
+            <a:off x="1188720" y="4453128"/>
+            <a:ext cx="10271455" cy="786384"/>
           </a:xfrm>
           <a:prstGeom prst="rect">
             <a:avLst/>
@@ -9054,8 +9054,8 @@
         </p:nvSpPr>
         <p:spPr>
           <a:xfrm>
-            <a:off x="457200" y="4709160"/>
-            <a:ext cx="11277295" cy="777240"/>
+            <a:off x="457200" y="5404104"/>
+            <a:ext cx="11277295" cy="950976"/>
           </a:xfrm>
           <a:prstGeom prst="roundRect">
             <a:avLst>
@@ -9099,7 +9099,7 @@
         </p:nvSpPr>
         <p:spPr>
           <a:xfrm>
-            <a:off x="594360" y="4878324"/>
+            <a:off x="594360" y="5660136"/>
             <a:ext cx="438912" cy="438912"/>
           </a:xfrm>
           <a:prstGeom prst="roundRect">
@@ -9144,7 +9144,7 @@
         </p:nvSpPr>
         <p:spPr>
           <a:xfrm>
-            <a:off x="594360" y="4878324"/>
+            <a:off x="594360" y="5660136"/>
             <a:ext cx="438912" cy="438912"/>
           </a:xfrm>
           <a:prstGeom prst="rect">
@@ -9177,8 +9177,8 @@
         </p:nvSpPr>
         <p:spPr>
           <a:xfrm>
-            <a:off x="1188720" y="4800600"/>
-            <a:ext cx="10271455" cy="612647"/>
+            <a:off x="1188720" y="5495544"/>
+            <a:ext cx="10271455" cy="786384"/>
           </a:xfrm>
           <a:prstGeom prst="rect">
             <a:avLst/>

--- a/Programacion II/Clases/Clase 1 - Introduccion a POO/Presentacion.pptx
+++ b/Programacion II/Clases/Clase 1 - Introduccion a POO/Presentacion.pptx
@@ -4327,7 +4327,7 @@
               </a:spcAft>
             </a:pPr>
             <a:r>
-              <a:rPr sz="1600" b="0" i="0">
+              <a:rPr sz="2000" b="0" i="0">
                 <a:solidFill>
                   <a:srgbClr val="333333"/>
                 </a:solidFill>
@@ -4336,7 +4336,7 @@
               <a:t>–   </a:t>
             </a:r>
             <a:r>
-              <a:rPr sz="1600" b="1" i="0">
+              <a:rPr sz="2000" b="1" i="0">
                 <a:solidFill>
                   <a:srgbClr val="333333"/>
                 </a:solidFill>
@@ -4345,7 +4345,7 @@
               <a:t>Entregable:</a:t>
             </a:r>
             <a:r>
-              <a:rPr sz="1600" b="0" i="0">
+              <a:rPr sz="2000" b="0" i="0">
                 <a:solidFill>
                   <a:srgbClr val="333333"/>
                 </a:solidFill>
@@ -4361,7 +4361,7 @@
               </a:spcAft>
             </a:pPr>
             <a:r>
-              <a:rPr sz="1600" b="0" i="0">
+              <a:rPr sz="2000" b="0" i="0">
                 <a:solidFill>
                   <a:srgbClr val="333333"/>
                 </a:solidFill>
@@ -4370,7 +4370,7 @@
               <a:t>–   </a:t>
             </a:r>
             <a:r>
-              <a:rPr sz="1600" b="1" i="0">
+              <a:rPr sz="2000" b="1" i="0">
                 <a:solidFill>
                   <a:srgbClr val="333333"/>
                 </a:solidFill>
@@ -4379,7 +4379,7 @@
               <a:t>Exito:</a:t>
             </a:r>
             <a:r>
-              <a:rPr sz="1600" b="0" i="0">
+              <a:rPr sz="2000" b="0" i="0">
                 <a:solidFill>
                   <a:srgbClr val="333333"/>
                 </a:solidFill>
@@ -4395,7 +4395,7 @@
               </a:spcAft>
             </a:pPr>
             <a:r>
-              <a:rPr sz="1600" b="0" i="0">
+              <a:rPr sz="2000" b="0" i="0">
                 <a:solidFill>
                   <a:srgbClr val="333333"/>
                 </a:solidFill>
@@ -4404,7 +4404,7 @@
               <a:t>–   </a:t>
             </a:r>
             <a:r>
-              <a:rPr sz="1600" b="1" i="0">
+              <a:rPr sz="2000" b="1" i="0">
                 <a:solidFill>
                   <a:srgbClr val="333333"/>
                 </a:solidFill>
@@ -4413,7 +4413,7 @@
               <a:t>Exito:</a:t>
             </a:r>
             <a:r>
-              <a:rPr sz="1600" b="0" i="0">
+              <a:rPr sz="2000" b="0" i="0">
                 <a:solidFill>
                   <a:srgbClr val="333333"/>
                 </a:solidFill>
@@ -4429,7 +4429,7 @@
               </a:spcAft>
             </a:pPr>
             <a:r>
-              <a:rPr sz="1600" b="0" i="0">
+              <a:rPr sz="2000" b="0" i="0">
                 <a:solidFill>
                   <a:srgbClr val="333333"/>
                 </a:solidFill>
@@ -4438,7 +4438,7 @@
               <a:t>–   </a:t>
             </a:r>
             <a:r>
-              <a:rPr sz="1600" b="1" i="0">
+              <a:rPr sz="2000" b="1" i="0">
                 <a:solidFill>
                   <a:srgbClr val="333333"/>
                 </a:solidFill>
@@ -4447,7 +4447,7 @@
               <a:t>Exito:</a:t>
             </a:r>
             <a:r>
-              <a:rPr sz="1600" b="0" i="0">
+              <a:rPr sz="2000" b="0" i="0">
                 <a:solidFill>
                   <a:srgbClr val="333333"/>
                 </a:solidFill>
@@ -4463,7 +4463,7 @@
               </a:spcAft>
             </a:pPr>
             <a:r>
-              <a:rPr sz="1600" b="0" i="0">
+              <a:rPr sz="2000" b="0" i="0">
                 <a:solidFill>
                   <a:srgbClr val="333333"/>
                 </a:solidFill>
@@ -4472,7 +4472,7 @@
               <a:t>–   </a:t>
             </a:r>
             <a:r>
-              <a:rPr sz="1600" b="1" i="0">
+              <a:rPr sz="2000" b="1" i="0">
                 <a:solidFill>
                   <a:srgbClr val="333333"/>
                 </a:solidFill>
@@ -4481,7 +4481,7 @@
               <a:t>Exito:</a:t>
             </a:r>
             <a:r>
-              <a:rPr sz="1600" b="0" i="0">
+              <a:rPr sz="2000" b="0" i="0">
                 <a:solidFill>
                   <a:srgbClr val="333333"/>
                 </a:solidFill>
@@ -4497,7 +4497,7 @@
               </a:spcAft>
             </a:pPr>
             <a:r>
-              <a:rPr sz="1600" b="0" i="0">
+              <a:rPr sz="2000" b="0" i="0">
                 <a:solidFill>
                   <a:srgbClr val="333333"/>
                 </a:solidFill>
@@ -4506,7 +4506,7 @@
               <a:t>–   </a:t>
             </a:r>
             <a:r>
-              <a:rPr sz="1600" b="1" i="0">
+              <a:rPr sz="2000" b="1" i="0">
                 <a:solidFill>
                   <a:srgbClr val="333333"/>
                 </a:solidFill>
@@ -4515,7 +4515,7 @@
               <a:t>Entrega en ExamLab (https://uniaj.examlab.workers.dev/)</a:t>
             </a:r>
             <a:r>
-              <a:rPr sz="1600" b="0" i="0">
+              <a:rPr sz="2000" b="0" i="0">
                 <a:solidFill>
                   <a:srgbClr val="333333"/>
                 </a:solidFill>
@@ -5562,7 +5562,7 @@
               </a:spcAft>
             </a:pPr>
             <a:r>
-              <a:rPr sz="1600" b="0" i="0">
+              <a:rPr sz="2000" b="0" i="0">
                 <a:solidFill>
                   <a:srgbClr val="333333"/>
                 </a:solidFill>
@@ -5571,7 +5571,7 @@
               <a:t>–   </a:t>
             </a:r>
             <a:r>
-              <a:rPr sz="1600" b="1" i="0">
+              <a:rPr sz="2000" b="1" i="0">
                 <a:solidFill>
                   <a:srgbClr val="333333"/>
                 </a:solidFill>
@@ -5580,7 +5580,7 @@
               <a:t>Hoy avanzamos VetCare en:</a:t>
             </a:r>
             <a:r>
-              <a:rPr sz="1600" b="0" i="0">
+              <a:rPr sz="2000" b="0" i="0">
                 <a:solidFill>
                   <a:srgbClr val="333333"/>
                 </a:solidFill>
@@ -5596,7 +5596,7 @@
               </a:spcAft>
             </a:pPr>
             <a:r>
-              <a:rPr sz="1600" b="0" i="0">
+              <a:rPr sz="2000" b="0" i="0">
                 <a:solidFill>
                   <a:srgbClr val="333333"/>
                 </a:solidFill>
@@ -5605,7 +5605,7 @@
               <a:t>–   Herramienta: </a:t>
             </a:r>
             <a:r>
-              <a:rPr sz="1600" b="1" i="0">
+              <a:rPr sz="2000" b="1" i="0">
                 <a:solidFill>
                   <a:srgbClr val="333333"/>
                 </a:solidFill>
@@ -5614,7 +5614,7 @@
               <a:t>Apache NetBeans</a:t>
             </a:r>
             <a:r>
-              <a:rPr sz="1600" b="0" i="0">
+              <a:rPr sz="2000" b="0" i="0">
                 <a:solidFill>
                   <a:srgbClr val="333333"/>
                 </a:solidFill>
@@ -5623,7 +5623,7 @@
               <a:t> · Bloque </a:t>
             </a:r>
             <a:r>
-              <a:rPr sz="1600" b="1" i="0">
+              <a:rPr sz="2000" b="1" i="0">
                 <a:solidFill>
                   <a:srgbClr val="333333"/>
                 </a:solidFill>
@@ -5639,7 +5639,7 @@
               </a:spcAft>
             </a:pPr>
             <a:r>
-              <a:rPr sz="1600" b="0" i="0">
+              <a:rPr sz="2000" b="0" i="0">
                 <a:solidFill>
                   <a:srgbClr val="333333"/>
                 </a:solidFill>
@@ -5648,7 +5648,7 @@
               <a:t>–   </a:t>
             </a:r>
             <a:r>
-              <a:rPr sz="1600" b="1" i="0">
+              <a:rPr sz="2000" b="1" i="0">
                 <a:solidFill>
                   <a:srgbClr val="333333"/>
                 </a:solidFill>
@@ -5657,7 +5657,7 @@
               <a:t>Entregable de hoy:</a:t>
             </a:r>
             <a:r>
-              <a:rPr sz="1600" b="0" i="0">
+              <a:rPr sz="2000" b="0" i="0">
                 <a:solidFill>
                   <a:srgbClr val="333333"/>
                 </a:solidFill>
@@ -5673,7 +5673,7 @@
               </a:spcAft>
             </a:pPr>
             <a:r>
-              <a:rPr sz="1600" b="0" i="0">
+              <a:rPr sz="2000" b="0" i="0">
                 <a:solidFill>
                   <a:srgbClr val="333333"/>
                 </a:solidFill>
@@ -5997,7 +5997,7 @@
         <p:spPr>
           <a:xfrm>
             <a:off x="502920" y="2587752"/>
-            <a:ext cx="2164019" cy="2560320"/>
+            <a:ext cx="2164019" cy="3310128"/>
           </a:xfrm>
           <a:prstGeom prst="rect">
             <a:avLst/>
@@ -6112,7 +6112,7 @@
         <p:spPr>
           <a:xfrm>
             <a:off x="2758379" y="2587752"/>
-            <a:ext cx="2164019" cy="2560320"/>
+            <a:ext cx="2164019" cy="3310128"/>
           </a:xfrm>
           <a:prstGeom prst="rect">
             <a:avLst/>
@@ -6227,7 +6227,7 @@
         <p:spPr>
           <a:xfrm>
             <a:off x="5013838" y="2587752"/>
-            <a:ext cx="2164019" cy="2560320"/>
+            <a:ext cx="2164019" cy="3310128"/>
           </a:xfrm>
           <a:prstGeom prst="rect">
             <a:avLst/>
@@ -6342,7 +6342,7 @@
         <p:spPr>
           <a:xfrm>
             <a:off x="7269297" y="2587752"/>
-            <a:ext cx="2164019" cy="2560320"/>
+            <a:ext cx="2164019" cy="3310128"/>
           </a:xfrm>
           <a:prstGeom prst="rect">
             <a:avLst/>
@@ -6457,7 +6457,7 @@
         <p:spPr>
           <a:xfrm>
             <a:off x="9524756" y="2587752"/>
-            <a:ext cx="2164019" cy="2560320"/>
+            <a:ext cx="2164019" cy="3310128"/>
           </a:xfrm>
           <a:prstGeom prst="rect">
             <a:avLst/>
@@ -6491,8 +6491,8 @@
         </p:nvSpPr>
         <p:spPr>
           <a:xfrm>
-            <a:off x="457200" y="5943600"/>
-            <a:ext cx="11277295" cy="365760"/>
+            <a:off x="457200" y="5806440"/>
+            <a:ext cx="11277295" cy="640080"/>
           </a:xfrm>
           <a:prstGeom prst="rect">
             <a:avLst/>
@@ -6745,7 +6745,7 @@
               </a:spcAft>
             </a:pPr>
             <a:r>
-              <a:rPr sz="1500" b="0" i="0">
+              <a:rPr sz="2000" b="0" i="0">
                 <a:solidFill>
                   <a:srgbClr val="333333"/>
                 </a:solidFill>
@@ -6761,7 +6761,7 @@
               </a:spcAft>
             </a:pPr>
             <a:r>
-              <a:rPr sz="1500" b="0" i="0">
+              <a:rPr sz="2000" b="0" i="0">
                 <a:solidFill>
                   <a:srgbClr val="333333"/>
                 </a:solidFill>
@@ -6777,7 +6777,7 @@
               </a:spcAft>
             </a:pPr>
             <a:r>
-              <a:rPr sz="1500" b="0" i="0">
+              <a:rPr sz="2000" b="0" i="0">
                 <a:solidFill>
                   <a:srgbClr val="333333"/>
                 </a:solidFill>
@@ -6793,7 +6793,7 @@
               </a:spcAft>
             </a:pPr>
             <a:r>
-              <a:rPr sz="1500" b="0" i="0">
+              <a:rPr sz="2000" b="0" i="0">
                 <a:solidFill>
                   <a:srgbClr val="333333"/>
                 </a:solidFill>
@@ -6809,7 +6809,7 @@
               </a:spcAft>
             </a:pPr>
             <a:r>
-              <a:rPr sz="1500" b="0" i="0">
+              <a:rPr sz="2000" b="0" i="0">
                 <a:solidFill>
                   <a:srgbClr val="333333"/>
                 </a:solidFill>
@@ -7145,11 +7145,11 @@
           <a:p>
             <a:pPr>
               <a:spcAft>
-                <a:spcPts val="400"/>
+                <a:spcPts val="371"/>
               </a:spcAft>
             </a:pPr>
             <a:r>
-              <a:rPr sz="1400" b="0" i="0">
+              <a:rPr sz="1300" b="0" i="0">
                 <a:solidFill>
                   <a:srgbClr val="FFFFFF"/>
                 </a:solidFill>
@@ -7161,11 +7161,11 @@
           <a:p>
             <a:pPr>
               <a:spcAft>
-                <a:spcPts val="400"/>
+                <a:spcPts val="371"/>
               </a:spcAft>
             </a:pPr>
             <a:r>
-              <a:rPr sz="1400" b="0" i="0">
+              <a:rPr sz="1300" b="0" i="0">
                 <a:solidFill>
                   <a:srgbClr val="FFFFFF"/>
                 </a:solidFill>
@@ -7177,11 +7177,11 @@
           <a:p>
             <a:pPr>
               <a:spcAft>
-                <a:spcPts val="400"/>
+                <a:spcPts val="371"/>
               </a:spcAft>
             </a:pPr>
             <a:r>
-              <a:rPr sz="1400" b="0" i="0">
+              <a:rPr sz="1300" b="0" i="0">
                 <a:solidFill>
                   <a:srgbClr val="FFFFFF"/>
                 </a:solidFill>
@@ -7193,11 +7193,11 @@
           <a:p>
             <a:pPr>
               <a:spcAft>
-                <a:spcPts val="400"/>
+                <a:spcPts val="371"/>
               </a:spcAft>
             </a:pPr>
             <a:r>
-              <a:rPr sz="1400" b="0" i="0">
+              <a:rPr sz="1300" b="0" i="0">
                 <a:solidFill>
                   <a:srgbClr val="FFFFFF"/>
                 </a:solidFill>
@@ -7209,11 +7209,11 @@
           <a:p>
             <a:pPr>
               <a:spcAft>
-                <a:spcPts val="400"/>
+                <a:spcPts val="371"/>
               </a:spcAft>
             </a:pPr>
             <a:r>
-              <a:rPr sz="1400" b="0" i="0">
+              <a:rPr sz="1300" b="0" i="0">
                 <a:solidFill>
                   <a:srgbClr val="FFFFFF"/>
                 </a:solidFill>
@@ -7225,11 +7225,11 @@
           <a:p>
             <a:pPr>
               <a:spcAft>
-                <a:spcPts val="400"/>
+                <a:spcPts val="371"/>
               </a:spcAft>
             </a:pPr>
             <a:r>
-              <a:rPr sz="1400" b="0" i="0">
+              <a:rPr sz="1300" b="0" i="0">
                 <a:solidFill>
                   <a:srgbClr val="FFFFFF"/>
                 </a:solidFill>
@@ -7241,11 +7241,11 @@
           <a:p>
             <a:pPr>
               <a:spcAft>
-                <a:spcPts val="400"/>
+                <a:spcPts val="371"/>
               </a:spcAft>
             </a:pPr>
             <a:r>
-              <a:rPr sz="1400" b="0" i="0">
+              <a:rPr sz="1300" b="0" i="0">
                 <a:solidFill>
                   <a:srgbClr val="FFFFFF"/>
                 </a:solidFill>
@@ -7257,11 +7257,11 @@
           <a:p>
             <a:pPr>
               <a:spcAft>
-                <a:spcPts val="400"/>
+                <a:spcPts val="371"/>
               </a:spcAft>
             </a:pPr>
             <a:r>
-              <a:rPr sz="1400" b="0" i="0">
+              <a:rPr sz="1300" b="0" i="0">
                 <a:solidFill>
                   <a:srgbClr val="FFFFFF"/>
                 </a:solidFill>
@@ -7273,11 +7273,11 @@
           <a:p>
             <a:pPr>
               <a:spcAft>
-                <a:spcPts val="400"/>
+                <a:spcPts val="371"/>
               </a:spcAft>
             </a:pPr>
             <a:r>
-              <a:rPr sz="1400" b="0" i="0">
+              <a:rPr sz="1300" b="0" i="0">
                 <a:solidFill>
                   <a:srgbClr val="FFFFFF"/>
                 </a:solidFill>
@@ -7289,11 +7289,11 @@
           <a:p>
             <a:pPr>
               <a:spcAft>
-                <a:spcPts val="400"/>
+                <a:spcPts val="371"/>
               </a:spcAft>
             </a:pPr>
             <a:r>
-              <a:rPr sz="1400" b="0" i="0">
+              <a:rPr sz="1300" b="0" i="0">
                 <a:solidFill>
                   <a:srgbClr val="FFFFFF"/>
                 </a:solidFill>
@@ -7305,11 +7305,11 @@
           <a:p>
             <a:pPr>
               <a:spcAft>
-                <a:spcPts val="400"/>
+                <a:spcPts val="371"/>
               </a:spcAft>
             </a:pPr>
             <a:r>
-              <a:rPr sz="1400" b="0" i="0">
+              <a:rPr sz="1300" b="0" i="0">
                 <a:solidFill>
                   <a:srgbClr val="FFFFFF"/>
                 </a:solidFill>
@@ -7321,11 +7321,11 @@
           <a:p>
             <a:pPr>
               <a:spcAft>
-                <a:spcPts val="400"/>
+                <a:spcPts val="371"/>
               </a:spcAft>
             </a:pPr>
             <a:r>
-              <a:rPr sz="1400" b="0" i="0">
+              <a:rPr sz="1300" b="0" i="0">
                 <a:solidFill>
                   <a:srgbClr val="FFFFFF"/>
                 </a:solidFill>
@@ -7337,11 +7337,11 @@
           <a:p>
             <a:pPr>
               <a:spcAft>
-                <a:spcPts val="400"/>
+                <a:spcPts val="371"/>
               </a:spcAft>
             </a:pPr>
             <a:r>
-              <a:rPr sz="1400" b="0" i="0">
+              <a:rPr sz="1300" b="0" i="0">
                 <a:solidFill>
                   <a:srgbClr val="FFFFFF"/>
                 </a:solidFill>
@@ -7353,11 +7353,11 @@
           <a:p>
             <a:pPr>
               <a:spcAft>
-                <a:spcPts val="400"/>
+                <a:spcPts val="371"/>
               </a:spcAft>
             </a:pPr>
             <a:r>
-              <a:rPr sz="1400" b="0" i="0">
+              <a:rPr sz="1300" b="0" i="0">
                 <a:solidFill>
                   <a:srgbClr val="FFFFFF"/>
                 </a:solidFill>
@@ -7369,11 +7369,11 @@
           <a:p>
             <a:pPr>
               <a:spcAft>
-                <a:spcPts val="400"/>
+                <a:spcPts val="371"/>
               </a:spcAft>
             </a:pPr>
             <a:r>
-              <a:rPr sz="1400" b="0" i="0">
+              <a:rPr sz="1300" b="0" i="0">
                 <a:solidFill>
                   <a:srgbClr val="FFFFFF"/>
                 </a:solidFill>
@@ -7385,11 +7385,11 @@
           <a:p>
             <a:pPr>
               <a:spcAft>
-                <a:spcPts val="400"/>
+                <a:spcPts val="371"/>
               </a:spcAft>
             </a:pPr>
             <a:r>
-              <a:rPr sz="1400" b="0" i="0">
+              <a:rPr sz="1300" b="0" i="0">
                 <a:solidFill>
                   <a:srgbClr val="FFFFFF"/>
                 </a:solidFill>
@@ -7644,7 +7644,7 @@
               </a:spcAft>
             </a:pPr>
             <a:r>
-              <a:rPr sz="1600" b="0" i="0">
+              <a:rPr sz="2000" b="0" i="0">
                 <a:solidFill>
                   <a:srgbClr val="333333"/>
                 </a:solidFill>
@@ -7653,7 +7653,7 @@
               <a:t>–   </a:t>
             </a:r>
             <a:r>
-              <a:rPr sz="1600" b="1" i="0">
+              <a:rPr sz="2000" b="1" i="0">
                 <a:solidFill>
                   <a:srgbClr val="333333"/>
                 </a:solidFill>
@@ -7662,7 +7662,7 @@
               <a:t>Herramienta:</a:t>
             </a:r>
             <a:r>
-              <a:rPr sz="1600" b="0" i="0">
+              <a:rPr sz="2000" b="0" i="0">
                 <a:solidFill>
                   <a:srgbClr val="333333"/>
                 </a:solidFill>
@@ -7678,7 +7678,7 @@
               </a:spcAft>
             </a:pPr>
             <a:r>
-              <a:rPr sz="1600" b="0" i="0">
+              <a:rPr sz="2000" b="0" i="0">
                 <a:solidFill>
                   <a:srgbClr val="333333"/>
                 </a:solidFill>
@@ -7687,7 +7687,7 @@
               <a:t>–   </a:t>
             </a:r>
             <a:r>
-              <a:rPr sz="1600" b="1" i="0">
+              <a:rPr sz="2000" b="1" i="0">
                 <a:solidFill>
                   <a:srgbClr val="333333"/>
                 </a:solidFill>
@@ -7696,7 +7696,7 @@
               <a:t>Demo:</a:t>
             </a:r>
             <a:r>
-              <a:rPr sz="1600" b="0" i="0">
+              <a:rPr sz="2000" b="0" i="0">
                 <a:solidFill>
                   <a:srgbClr val="333333"/>
                 </a:solidFill>
@@ -7712,7 +7712,7 @@
               </a:spcAft>
             </a:pPr>
             <a:r>
-              <a:rPr sz="1600" b="0" i="0">
+              <a:rPr sz="2000" b="0" i="0">
                 <a:solidFill>
                   <a:srgbClr val="333333"/>
                 </a:solidFill>
@@ -7932,7 +7932,7 @@
               </a:spcAft>
             </a:pPr>
             <a:r>
-              <a:rPr sz="1600" b="0" i="0">
+              <a:rPr sz="2000" b="0" i="0">
                 <a:solidFill>
                   <a:srgbClr val="333333"/>
                 </a:solidFill>
@@ -7941,7 +7941,7 @@
               <a:t>–   </a:t>
             </a:r>
             <a:r>
-              <a:rPr sz="1600" b="1" i="0">
+              <a:rPr sz="2000" b="1" i="0">
                 <a:solidFill>
                   <a:srgbClr val="333333"/>
                 </a:solidFill>
@@ -7950,7 +7950,7 @@
               <a:t>Por que importa al PI:</a:t>
             </a:r>
             <a:r>
-              <a:rPr sz="1600" b="0" i="0">
+              <a:rPr sz="2000" b="0" i="0">
                 <a:solidFill>
                   <a:srgbClr val="333333"/>
                 </a:solidFill>
@@ -7966,7 +7966,7 @@
               </a:spcAft>
             </a:pPr>
             <a:r>
-              <a:rPr sz="1600" b="0" i="0">
+              <a:rPr sz="2000" b="0" i="0">
                 <a:solidFill>
                   <a:srgbClr val="333333"/>
                 </a:solidFill>
@@ -7982,7 +7982,7 @@
               </a:spcAft>
             </a:pPr>
             <a:r>
-              <a:rPr sz="1600" b="0" i="0">
+              <a:rPr sz="2000" b="0" i="0">
                 <a:solidFill>
                   <a:srgbClr val="333333"/>
                 </a:solidFill>
@@ -8202,7 +8202,7 @@
               </a:spcAft>
             </a:pPr>
             <a:r>
-              <a:rPr sz="1600" b="0" i="0">
+              <a:rPr sz="2000" b="0" i="0">
                 <a:solidFill>
                   <a:srgbClr val="333333"/>
                 </a:solidFill>
@@ -8218,7 +8218,7 @@
               </a:spcAft>
             </a:pPr>
             <a:r>
-              <a:rPr sz="1600" b="0" i="0">
+              <a:rPr sz="2000" b="0" i="0">
                 <a:solidFill>
                   <a:srgbClr val="333333"/>
                 </a:solidFill>
@@ -8234,7 +8234,7 @@
               </a:spcAft>
             </a:pPr>
             <a:r>
-              <a:rPr sz="1600" b="0" i="0">
+              <a:rPr sz="2000" b="0" i="0">
                 <a:solidFill>
                   <a:srgbClr val="333333"/>
                 </a:solidFill>

--- a/Programacion II/Clases/Clase 1 - Introduccion a POO/Presentacion.pptx
+++ b/Programacion II/Clases/Clase 1 - Introduccion a POO/Presentacion.pptx
@@ -4351,7 +4351,7 @@
                 </a:solidFill>
                 <a:latin typeface="Calibri"/>
               </a:rPr>
-              <a:t> Proyecto NetBeans con la clase Mascota (atributos privados, constructor y toString) y un main que crea dos objetos distintos</a:t>
+              <a:t> Proyecto Java con la clase Mascota (atributos privados, constructor y toString) y un main que crea dos objetos distintos</a:t>
             </a:r>
           </a:p>
           <a:p>
@@ -4385,7 +4385,7 @@
                 </a:solidFill>
                 <a:latin typeface="Calibri"/>
               </a:rPr>
-              <a:t> El proyecto compila y ejecuta sin errores en NetBeans.</a:t>
+              <a:t> El proyecto compila y ejecuta sin errores en VS Code.</a:t>
             </a:r>
           </a:p>
           <a:p>
@@ -4512,7 +4512,7 @@
                 </a:solidFill>
                 <a:latin typeface="Calibri"/>
               </a:rPr>
-              <a:t>Entrega en ExamLab (https://uniaj.examlab.workers.dev/)</a:t>
+              <a:t>Entrega en la plataforma del curso</a:t>
             </a:r>
             <a:r>
               <a:rPr sz="2000" b="0" i="0">
@@ -4521,7 +4521,7 @@
                 </a:solidFill>
                 <a:latin typeface="Calibri"/>
               </a:rPr>
-              <a:t> — domingo 23:59.</a:t>
+              <a:t> — en la fecha que indique el docente.</a:t>
             </a:r>
           </a:p>
         </p:txBody>
@@ -5116,7 +5116,7 @@
                 </a:solidFill>
                 <a:latin typeface="Calibri"/>
               </a:rPr>
-              <a:t>Entrega del taller en ExamLab (https://uniaj.examlab.workers.dev/) · domingo 23:59.</a:t>
+              <a:t>Entrega del taller, si el docente lo asigna · en la fecha que indique el docente.</a:t>
             </a:r>
           </a:p>
         </p:txBody>
@@ -5332,7 +5332,7 @@
                 </a:solidFill>
                 <a:latin typeface="Calibri"/>
               </a:rPr>
-              <a:t>Entregable: Proyecto NetBeans con la clase Mascota (atributos privados, constructor y toString) y un main que crea dos objetos distintos</a:t>
+              <a:t>Entregable: Proyecto Java con la clase Mascota (atributos privados, constructor y toString) y un main que crea dos objetos distintos</a:t>
             </a:r>
           </a:p>
           <a:p>
@@ -5611,7 +5611,7 @@
                 </a:solidFill>
                 <a:latin typeface="Calibri"/>
               </a:rPr>
-              <a:t>Apache NetBeans</a:t>
+              <a:t>Visual Studio Code (Java)</a:t>
             </a:r>
             <a:r>
               <a:rPr sz="2000" b="0" i="0">
@@ -5663,7 +5663,7 @@
                 </a:solidFill>
                 <a:latin typeface="Calibri"/>
               </a:rPr>
-              <a:t> Proyecto NetBeans con la clase Mascota (atributos privados, constructor y toString) y un main que crea dos objetos distintos</a:t>
+              <a:t> Proyecto Java con la clase Mascota (atributos privados, constructor y toString) y un main que crea dos objetos distintos</a:t>
             </a:r>
           </a:p>
           <a:p>
@@ -7668,7 +7668,7 @@
                 </a:solidFill>
                 <a:latin typeface="Calibri"/>
               </a:rPr>
-              <a:t> Apache NetBeans</a:t>
+              <a:t> Visual Studio Code (Java)</a:t>
             </a:r>
           </a:p>
           <a:p>
@@ -8224,7 +8224,7 @@
                 </a:solidFill>
                 <a:latin typeface="Calibri"/>
               </a:rPr>
-              <a:t>–   Herramienta: Apache NetBeans con JDK instalado.</a:t>
+              <a:t>–   Herramienta: VS Code con el Extension Pack for Java y el JDK 17+ instalado.</a:t>
             </a:r>
           </a:p>
           <a:p>
@@ -8576,7 +8576,7 @@
                 </a:solidFill>
                 <a:latin typeface="Calibri"/>
               </a:rPr>
-              <a:t>Instale y verifique el entorno (JDK + Apache NetBeans) y cree un proyecto Java Application llamado VetCare con paquete vetcare. Este paso es el objetivo real del bloque: nadie puede quedarse sin entorno funcionando.</a:t>
+              <a:t>Instale y verifique el entorno (JDK 17+ y VS Code con el Extension Pack for Java) y cree un proyecto Java llamado VetCare con paquete vetcare. Este paso es el objetivo real del bloque: nadie puede quedarse sin entorno funcionando.</a:t>
             </a:r>
           </a:p>
         </p:txBody>
